--- a/system-design-101/vi/lessons/sd-10-004/slides/sd-10-004.pptx
+++ b/system-design-101/vi/lessons/sd-10-004/slides/sd-10-004.pptx
@@ -2222,7 +2222,7 @@
               <a:buNone/>
             </a:pPr>
             <a:r>
-              <a:rPr lang="en-US" sz="2400" dirty="0" spc="-9" kern="0">
+              <a:rPr lang="en-US" sz="2400" dirty="0" spc="0" kern="0">
                 <a:solidFill>
                   <a:srgbClr val="C4C8D6"/>
                 </a:solidFill>
@@ -2230,7 +2230,7 @@
                 <a:ea typeface="Be Vietnam Pro" pitchFamily="34" charset="-122"/>
                 <a:cs typeface="Be Vietnam Pro" pitchFamily="34" charset="-120"/>
               </a:rPr>
-              <a:t>chạy</a:t>
+              <a:t>tính</a:t>
             </a:r>
             <a:r>
               <a:rPr lang="en-US" sz="2400" dirty="0" spc="1" kern="0">
@@ -2241,10 +2241,10 @@
                 <a:ea typeface="Be Vietnam Pro" pitchFamily="34" charset="-122"/>
                 <a:cs typeface="Be Vietnam Pro" pitchFamily="34" charset="-120"/>
               </a:rPr>
-              <a:t> nhanh hơn</a:t>
-            </a:r>
-            <a:r>
-              <a:rPr lang="en-US" sz="2400" dirty="0" spc="-9" kern="0">
+              <a:t> bằng</a:t>
+            </a:r>
+            <a:r>
+              <a:rPr lang="en-US" sz="2400" dirty="0" spc="0" kern="0">
                 <a:solidFill>
                   <a:srgbClr val="C4C8D6"/>
                 </a:solidFill>
@@ -2252,10 +2252,10 @@
                 <a:ea typeface="Be Vietnam Pro" pitchFamily="34" charset="-122"/>
                 <a:cs typeface="Be Vietnam Pro" pitchFamily="34" charset="-120"/>
               </a:rPr>
-              <a:t> hay</a:t>
-            </a:r>
-            <a:r>
-              <a:rPr lang="en-US" sz="2400" dirty="0" spc="2" kern="0">
+              <a:t> mili</a:t>
+            </a:r>
+            <a:r>
+              <a:rPr lang="en-US" sz="2400" dirty="0" spc="-6" kern="0">
                 <a:solidFill>
                   <a:srgbClr val="C4C8D6"/>
                 </a:solidFill>
@@ -2263,18 +2263,7 @@
                 <a:ea typeface="Be Vietnam Pro" pitchFamily="34" charset="-122"/>
                 <a:cs typeface="Be Vietnam Pro" pitchFamily="34" charset="-120"/>
               </a:rPr>
-              <a:t> chậm</a:t>
-            </a:r>
-            <a:r>
-              <a:rPr lang="en-US" sz="2400" dirty="0" spc="1" kern="0">
-                <a:solidFill>
-                  <a:srgbClr val="C4C8D6"/>
-                </a:solidFill>
-                <a:latin typeface="Be Vietnam Pro" pitchFamily="34" charset="0"/>
-                <a:ea typeface="Be Vietnam Pro" pitchFamily="34" charset="-122"/>
-                <a:cs typeface="Be Vietnam Pro" pitchFamily="34" charset="-120"/>
-              </a:rPr>
-              <a:t> hơn</a:t>
+              <a:t> giây</a:t>
             </a:r>
             <a:endParaRPr lang="en-US" sz="2400" dirty="0"/>
           </a:p>
@@ -2449,7 +2438,7 @@
               <a:buNone/>
             </a:pPr>
             <a:r>
-              <a:rPr lang="en-US" sz="2400" dirty="0" spc="15" kern="0">
+              <a:rPr lang="en-US" sz="2400" dirty="0" spc="24" kern="0">
                 <a:solidFill>
                   <a:srgbClr val="C4C8D6"/>
                 </a:solidFill>
@@ -2457,10 +2446,10 @@
                 <a:ea typeface="Be Vietnam Pro" pitchFamily="34" charset="-122"/>
                 <a:cs typeface="Be Vietnam Pro" pitchFamily="34" charset="-120"/>
               </a:rPr>
-              <a:t>mức</a:t>
-            </a:r>
-            <a:r>
-              <a:rPr lang="en-US" sz="2400" dirty="0" spc="3" kern="0">
+              <a:t>đỉnh</a:t>
+            </a:r>
+            <a:r>
+              <a:rPr lang="en-US" sz="2400" dirty="0" spc="-2" kern="0">
                 <a:solidFill>
                   <a:srgbClr val="C4C8D6"/>
                 </a:solidFill>
@@ -2468,7 +2457,18 @@
                 <a:ea typeface="Be Vietnam Pro" pitchFamily="34" charset="-122"/>
                 <a:cs typeface="Be Vietnam Pro" pitchFamily="34" charset="-120"/>
               </a:rPr>
-              <a:t> dùng</a:t>
+              <a:t> bộ</a:t>
+            </a:r>
+            <a:r>
+              <a:rPr lang="en-US" sz="2400" dirty="0" spc="1" kern="0">
+                <a:solidFill>
+                  <a:srgbClr val="C4C8D6"/>
+                </a:solidFill>
+                <a:latin typeface="Be Vietnam Pro" pitchFamily="34" charset="0"/>
+                <a:ea typeface="Be Vietnam Pro" pitchFamily="34" charset="-122"/>
+                <a:cs typeface="Be Vietnam Pro" pitchFamily="34" charset="-120"/>
+              </a:rPr>
+              <a:t> nhớ</a:t>
             </a:r>
             <a:r>
               <a:rPr lang="en-US" sz="2400" dirty="0" spc="-2" kern="0">
@@ -2479,10 +2479,10 @@
                 <a:ea typeface="Be Vietnam Pro" pitchFamily="34" charset="-122"/>
                 <a:cs typeface="Be Vietnam Pro" pitchFamily="34" charset="-120"/>
               </a:rPr>
-              <a:t> bộ</a:t>
-            </a:r>
-            <a:r>
-              <a:rPr lang="en-US" sz="2400" dirty="0" spc="1" kern="0">
+              <a:t> khi</a:t>
+            </a:r>
+            <a:r>
+              <a:rPr lang="en-US" sz="2400" dirty="0" spc="-7" kern="0">
                 <a:solidFill>
                   <a:srgbClr val="C4C8D6"/>
                 </a:solidFill>
@@ -2490,7 +2490,7 @@
                 <a:ea typeface="Be Vietnam Pro" pitchFamily="34" charset="-122"/>
                 <a:cs typeface="Be Vietnam Pro" pitchFamily="34" charset="-120"/>
               </a:rPr>
-              <a:t> nhớ</a:t>
+              <a:t> chạy</a:t>
             </a:r>
             <a:endParaRPr lang="en-US" sz="2400" dirty="0"/>
           </a:p>
@@ -2665,7 +2665,7 @@
               <a:buNone/>
             </a:pPr>
             <a:r>
-              <a:rPr lang="en-US" sz="2400" dirty="0" spc="3" kern="0">
+              <a:rPr lang="en-US" sz="2400" dirty="0" spc="0" kern="0">
                 <a:solidFill>
                   <a:srgbClr val="C4C8D6"/>
                 </a:solidFill>
@@ -2673,10 +2673,10 @@
                 <a:ea typeface="Be Vietnam Pro" pitchFamily="34" charset="-122"/>
                 <a:cs typeface="Be Vietnam Pro" pitchFamily="34" charset="-120"/>
               </a:rPr>
-              <a:t>năng</a:t>
-            </a:r>
-            <a:r>
-              <a:rPr lang="en-US" sz="2400" dirty="0" spc="7" kern="0">
+              <a:t>tính</a:t>
+            </a:r>
+            <a:r>
+              <a:rPr lang="en-US" sz="2400" dirty="0" spc="1" kern="0">
                 <a:solidFill>
                   <a:srgbClr val="C4C8D6"/>
                 </a:solidFill>
@@ -2684,10 +2684,10 @@
                 <a:ea typeface="Be Vietnam Pro" pitchFamily="34" charset="-122"/>
                 <a:cs typeface="Be Vietnam Pro" pitchFamily="34" charset="-120"/>
               </a:rPr>
-              <a:t> lượng</a:t>
-            </a:r>
-            <a:r>
-              <a:rPr lang="en-US" sz="2400" dirty="0" spc="-1" kern="0">
+              <a:t> bằng</a:t>
+            </a:r>
+            <a:r>
+              <a:rPr lang="en-US" sz="2400" dirty="0" spc="-9" kern="0">
                 <a:solidFill>
                   <a:srgbClr val="C4C8D6"/>
                 </a:solidFill>
@@ -2695,18 +2695,7 @@
                 <a:ea typeface="Be Vietnam Pro" pitchFamily="34" charset="-122"/>
                 <a:cs typeface="Be Vietnam Pro" pitchFamily="34" charset="-120"/>
               </a:rPr>
-              <a:t> tiêu</a:t>
-            </a:r>
-            <a:r>
-              <a:rPr lang="en-US" sz="2400" dirty="0" spc="2" kern="0">
-                <a:solidFill>
-                  <a:srgbClr val="C4C8D6"/>
-                </a:solidFill>
-                <a:latin typeface="Be Vietnam Pro" pitchFamily="34" charset="0"/>
-                <a:ea typeface="Be Vietnam Pro" pitchFamily="34" charset="-122"/>
-                <a:cs typeface="Be Vietnam Pro" pitchFamily="34" charset="-120"/>
-              </a:rPr>
-              <a:t> thụ</a:t>
+              <a:t> joule</a:t>
             </a:r>
             <a:endParaRPr lang="en-US" sz="2400" dirty="0"/>
           </a:p>
@@ -2931,7 +2920,7 @@
               <a:buNone/>
             </a:pPr>
             <a:r>
-              <a:rPr lang="en-US" sz="6300" dirty="0" spc="-3" kern="0">
+              <a:rPr lang="en-US" sz="6300" dirty="0" spc="-1" kern="0">
                 <a:solidFill>
                   <a:srgbClr val="F3EEE3"/>
                 </a:solidFill>
@@ -2939,7 +2928,7 @@
                 <a:ea typeface="Bricolage Grotesque ExtraBold" pitchFamily="34" charset="-122"/>
                 <a:cs typeface="Bricolage Grotesque ExtraBold" pitchFamily="34" charset="-120"/>
               </a:rPr>
-              <a:t>3</a:t>
+              <a:t>4</a:t>
             </a:r>
             <a:endParaRPr lang="en-US" sz="6300" dirty="0"/>
           </a:p>
@@ -2970,7 +2959,7 @@
               <a:buNone/>
             </a:pPr>
             <a:r>
-              <a:rPr lang="en-US" sz="1950" dirty="0" spc="-10" kern="0">
+              <a:rPr lang="en-US" sz="1950" dirty="0" spc="0" kern="0">
                 <a:solidFill>
                   <a:srgbClr val="C4C8D6"/>
                 </a:solidFill>
@@ -2978,10 +2967,10 @@
                 <a:ea typeface="Be Vietnam Pro" pitchFamily="34" charset="-122"/>
                 <a:cs typeface="Be Vietnam Pro" pitchFamily="34" charset="-120"/>
               </a:rPr>
-              <a:t>số</a:t>
-            </a:r>
-            <a:r>
-              <a:rPr lang="en-US" sz="1950" dirty="0" spc="14" kern="0">
+              <a:t>thao</a:t>
+            </a:r>
+            <a:r>
+              <a:rPr lang="en-US" sz="1950" dirty="0" spc="-12" kern="0">
                 <a:solidFill>
                   <a:srgbClr val="C4C8D6"/>
                 </a:solidFill>
@@ -2989,7 +2978,7 @@
                 <a:ea typeface="Be Vietnam Pro" pitchFamily="34" charset="-122"/>
                 <a:cs typeface="Be Vietnam Pro" pitchFamily="34" charset="-120"/>
               </a:rPr>
-              <a:t> đo</a:t>
+              <a:t> tác</a:t>
             </a:r>
             <a:endParaRPr lang="en-US" sz="1950" dirty="0"/>
           </a:p>
@@ -3020,7 +3009,7 @@
               <a:buNone/>
             </a:pPr>
             <a:r>
-              <a:rPr lang="en-US" sz="6300" dirty="0" spc="-16" kern="0">
+              <a:rPr lang="en-US" sz="6300" dirty="0" spc="1" kern="0">
                 <a:solidFill>
                   <a:srgbClr val="F3EEE3"/>
                 </a:solidFill>
@@ -3028,18 +3017,7 @@
                 <a:ea typeface="Bricolage Grotesque ExtraBold" pitchFamily="34" charset="-122"/>
                 <a:cs typeface="Bricolage Grotesque ExtraBold" pitchFamily="34" charset="-120"/>
               </a:rPr>
-              <a:t>gần</a:t>
-            </a:r>
-            <a:r>
-              <a:rPr lang="en-US" sz="6300" dirty="0" spc="10" kern="0">
-                <a:solidFill>
-                  <a:srgbClr val="F3EEE3"/>
-                </a:solidFill>
-                <a:latin typeface="Bricolage Grotesque ExtraBold" pitchFamily="34" charset="0"/>
-                <a:ea typeface="Bricolage Grotesque ExtraBold" pitchFamily="34" charset="-122"/>
-                <a:cs typeface="Bricolage Grotesque ExtraBold" pitchFamily="34" charset="-120"/>
-              </a:rPr>
-              <a:t> 30</a:t>
+              <a:t>28</a:t>
             </a:r>
             <a:endParaRPr lang="en-US" sz="6300" dirty="0"/>
           </a:p>
@@ -3398,10 +3376,21 @@
                 <a:ea typeface="Be Vietnam Pro" pitchFamily="34" charset="-122"/>
                 <a:cs typeface="Be Vietnam Pro" pitchFamily="34" charset="-120"/>
               </a:rPr>
+              <a:t> nhóm</a:t>
+            </a:r>
+            <a:r>
+              <a:rPr lang="en-US" sz="2700" dirty="0" spc="-3" kern="0">
+                <a:solidFill>
+                  <a:srgbClr val="14161C"/>
+                </a:solidFill>
+                <a:latin typeface="Be Vietnam Pro" pitchFamily="34" charset="0"/>
+                <a:ea typeface="Be Vietnam Pro" pitchFamily="34" charset="-122"/>
+                <a:cs typeface="Be Vietnam Pro" pitchFamily="34" charset="-120"/>
+              </a:rPr>
               <a:t> nghiên</a:t>
             </a:r>
             <a:r>
-              <a:rPr lang="en-US" sz="2700" dirty="0" spc="20" kern="0">
+              <a:rPr lang="en-US" sz="2700" dirty="0" spc="21" kern="0">
                 <a:solidFill>
                   <a:srgbClr val="14161C"/>
                 </a:solidFill>
@@ -3412,15 +3401,48 @@
               <a:t> cứu</a:t>
             </a:r>
             <a:r>
-              <a:rPr lang="en-US" sz="2700" dirty="0" spc="16" kern="0">
-                <a:solidFill>
-                  <a:srgbClr val="14161C"/>
-                </a:solidFill>
-                <a:latin typeface="Be Vietnam Pro" pitchFamily="34" charset="0"/>
-                <a:ea typeface="Be Vietnam Pro" pitchFamily="34" charset="-122"/>
-                <a:cs typeface="Be Vietnam Pro" pitchFamily="34" charset="-120"/>
-              </a:rPr>
-              <a:t> đã</a:t>
+              <a:rPr lang="en-US" sz="2700" dirty="0" spc="-1" kern="0">
+                <a:solidFill>
+                  <a:srgbClr val="14161C"/>
+                </a:solidFill>
+                <a:latin typeface="Be Vietnam Pro" pitchFamily="34" charset="0"/>
+                <a:ea typeface="Be Vietnam Pro" pitchFamily="34" charset="-122"/>
+                <a:cs typeface="Be Vietnam Pro" pitchFamily="34" charset="-120"/>
+              </a:rPr>
+              <a:t> công</a:t>
+            </a:r>
+            <a:r>
+              <a:rPr lang="en-US" sz="2700" dirty="0" spc="-7" kern="0">
+                <a:solidFill>
+                  <a:srgbClr val="14161C"/>
+                </a:solidFill>
+                <a:latin typeface="Be Vietnam Pro" pitchFamily="34" charset="0"/>
+                <a:ea typeface="Be Vietnam Pro" pitchFamily="34" charset="-122"/>
+                <a:cs typeface="Be Vietnam Pro" pitchFamily="34" charset="-120"/>
+              </a:rPr>
+              <a:t> bố</a:t>
+            </a:r>
+            <a:r>
+              <a:rPr lang="en-US" sz="2700" dirty="0" spc="-3" kern="0">
+                <a:solidFill>
+                  <a:srgbClr val="14161C"/>
+                </a:solidFill>
+                <a:latin typeface="Be Vietnam Pro" pitchFamily="34" charset="0"/>
+                <a:ea typeface="Be Vietnam Pro" pitchFamily="34" charset="-122"/>
+                <a:cs typeface="Be Vietnam Pro" pitchFamily="34" charset="-120"/>
+              </a:rPr>
+              <a:t> kho</a:t>
+            </a:r>
+            <a:r>
+              <a:rPr lang="en-US" sz="2700" dirty="0" spc="-1" kern="0">
+                <a:solidFill>
+                  <a:srgbClr val="14161C"/>
+                </a:solidFill>
+                <a:latin typeface="Be Vietnam Pro" pitchFamily="34" charset="0"/>
+                <a:ea typeface="Be Vietnam Pro" pitchFamily="34" charset="-122"/>
+                <a:cs typeface="Be Vietnam Pro" pitchFamily="34" charset="-120"/>
+              </a:rPr>
+              <a:t> mã</a:t>
             </a:r>
             <a:r>
               <a:rPr lang="en-US" sz="2700" dirty="0" spc="15" kern="0">
@@ -3445,6 +3467,39 @@
               <a:t> thời</a:t>
             </a:r>
             <a:r>
+              <a:rPr lang="en-US" sz="2700" dirty="0" spc="-3" kern="0">
+                <a:solidFill>
+                  <a:srgbClr val="14161C"/>
+                </a:solidFill>
+                <a:latin typeface="Be Vietnam Pro" pitchFamily="34" charset="0"/>
+                <a:ea typeface="Be Vietnam Pro" pitchFamily="34" charset="-122"/>
+                <a:cs typeface="Be Vietnam Pro" pitchFamily="34" charset="-120"/>
+              </a:rPr>
+              <a:t> gian</a:t>
+            </a:r>
+            <a:r>
+              <a:rPr lang="en-US" sz="2700" dirty="0" spc="-6" kern="0">
+                <a:solidFill>
+                  <a:srgbClr val="14161C"/>
+                </a:solidFill>
+                <a:latin typeface="Be Vietnam Pro" pitchFamily="34" charset="0"/>
+                <a:ea typeface="Be Vietnam Pro" pitchFamily="34" charset="-122"/>
+                <a:cs typeface="Be Vietnam Pro" pitchFamily="34" charset="-120"/>
+              </a:rPr>
+              <a:t> chạy,</a:t>
+            </a:r>
+            <a:r>
+              <a:rPr lang="en-US" sz="2700" dirty="0" spc="-7" kern="0">
+                <a:solidFill>
+                  <a:srgbClr val="14161C"/>
+                </a:solidFill>
+                <a:latin typeface="Be Vietnam Pro" pitchFamily="34" charset="0"/>
+                <a:ea typeface="Be Vietnam Pro" pitchFamily="34" charset="-122"/>
+                <a:cs typeface="Be Vietnam Pro" pitchFamily="34" charset="-120"/>
+              </a:rPr>
+              <a:t> bộ</a:t>
+            </a:r>
+            <a:r>
               <a:rPr lang="en-US" sz="2700" dirty="0" spc="-2" kern="0">
                 <a:solidFill>
                   <a:srgbClr val="14161C"/>
@@ -3453,29 +3508,18 @@
                 <a:ea typeface="Be Vietnam Pro" pitchFamily="34" charset="-122"/>
                 <a:cs typeface="Be Vietnam Pro" pitchFamily="34" charset="-120"/>
               </a:rPr>
-              <a:t> gian</a:t>
-            </a:r>
-            <a:r>
-              <a:rPr lang="en-US" sz="2700" dirty="0" spc="-6" kern="0">
-                <a:solidFill>
-                  <a:srgbClr val="14161C"/>
-                </a:solidFill>
-                <a:latin typeface="Be Vietnam Pro" pitchFamily="34" charset="0"/>
-                <a:ea typeface="Be Vietnam Pro" pitchFamily="34" charset="-122"/>
-                <a:cs typeface="Be Vietnam Pro" pitchFamily="34" charset="-120"/>
-              </a:rPr>
-              <a:t> chạy,</a:t>
-            </a:r>
-            <a:r>
-              <a:rPr lang="en-US" sz="2700" dirty="0" spc="-8" kern="0">
-                <a:solidFill>
-                  <a:srgbClr val="14161C"/>
-                </a:solidFill>
-                <a:latin typeface="Be Vietnam Pro" pitchFamily="34" charset="0"/>
-                <a:ea typeface="Be Vietnam Pro" pitchFamily="34" charset="-122"/>
-                <a:cs typeface="Be Vietnam Pro" pitchFamily="34" charset="-120"/>
-              </a:rPr>
-              <a:t> bộ</a:t>
+              <a:t> nhớ</a:t>
+            </a:r>
+            <a:r>
+              <a:rPr lang="en-US" sz="2700" dirty="0" spc="-18" kern="0">
+                <a:solidFill>
+                  <a:srgbClr val="14161C"/>
+                </a:solidFill>
+                <a:latin typeface="Be Vietnam Pro" pitchFamily="34" charset="0"/>
+                <a:ea typeface="Be Vietnam Pro" pitchFamily="34" charset="-122"/>
+                <a:cs typeface="Be Vietnam Pro" pitchFamily="34" charset="-120"/>
+              </a:rPr>
+              <a:t> và</a:t>
             </a:r>
             <a:r>
               <a:rPr lang="en-US" sz="2700" dirty="0" spc="-2" kern="0">
@@ -3486,18 +3530,18 @@
                 <a:ea typeface="Be Vietnam Pro" pitchFamily="34" charset="-122"/>
                 <a:cs typeface="Be Vietnam Pro" pitchFamily="34" charset="-120"/>
               </a:rPr>
-              <a:t> nhớ</a:t>
-            </a:r>
-            <a:r>
-              <a:rPr lang="en-US" sz="2700" dirty="0" spc="-18" kern="0">
-                <a:solidFill>
-                  <a:srgbClr val="14161C"/>
-                </a:solidFill>
-                <a:latin typeface="Be Vietnam Pro" pitchFamily="34" charset="0"/>
-                <a:ea typeface="Be Vietnam Pro" pitchFamily="34" charset="-122"/>
-                <a:cs typeface="Be Vietnam Pro" pitchFamily="34" charset="-120"/>
-              </a:rPr>
-              <a:t> và</a:t>
+              <a:t> năng</a:t>
+            </a:r>
+            <a:r>
+              <a:rPr lang="en-US" sz="2700" dirty="0" spc="6" kern="0">
+                <a:solidFill>
+                  <a:srgbClr val="14161C"/>
+                </a:solidFill>
+                <a:latin typeface="Be Vietnam Pro" pitchFamily="34" charset="0"/>
+                <a:ea typeface="Be Vietnam Pro" pitchFamily="34" charset="-122"/>
+                <a:cs typeface="Be Vietnam Pro" pitchFamily="34" charset="-120"/>
+              </a:rPr>
+              <a:t> lượng</a:t>
             </a:r>
             <a:r>
               <a:rPr lang="en-US" sz="2700" dirty="0" spc="-2" kern="0">
@@ -3508,18 +3552,51 @@
                 <a:ea typeface="Be Vietnam Pro" pitchFamily="34" charset="-122"/>
                 <a:cs typeface="Be Vietnam Pro" pitchFamily="34" charset="-120"/>
               </a:rPr>
-              <a:t> năng</a:t>
-            </a:r>
-            <a:r>
-              <a:rPr lang="en-US" sz="2700" dirty="0" spc="6" kern="0">
-                <a:solidFill>
-                  <a:srgbClr val="14161C"/>
-                </a:solidFill>
-                <a:latin typeface="Be Vietnam Pro" pitchFamily="34" charset="0"/>
-                <a:ea typeface="Be Vietnam Pro" pitchFamily="34" charset="-122"/>
-                <a:cs typeface="Be Vietnam Pro" pitchFamily="34" charset="-120"/>
-              </a:rPr>
-              <a:t> lượng</a:t>
+              <a:t> của</a:t>
+            </a:r>
+            <a:r>
+              <a:rPr lang="en-US" sz="2700" dirty="0" spc="-1" kern="0">
+                <a:solidFill>
+                  <a:srgbClr val="14161C"/>
+                </a:solidFill>
+                <a:latin typeface="Be Vietnam Pro" pitchFamily="34" charset="0"/>
+                <a:ea typeface="Be Vietnam Pro" pitchFamily="34" charset="-122"/>
+                <a:cs typeface="Be Vietnam Pro" pitchFamily="34" charset="-120"/>
+              </a:rPr>
+              <a:t> cùng</a:t>
+            </a:r>
+            <a:r>
+              <a:rPr lang="en-US" sz="2700" dirty="0" spc="8" kern="0">
+                <a:solidFill>
+                  <a:srgbClr val="14161C"/>
+                </a:solidFill>
+                <a:latin typeface="Be Vietnam Pro" pitchFamily="34" charset="0"/>
+                <a:ea typeface="Be Vietnam Pro" pitchFamily="34" charset="-122"/>
+                <a:cs typeface="Be Vietnam Pro" pitchFamily="34" charset="-120"/>
+              </a:rPr>
+              <a:t> mười</a:t>
+            </a:r>
+            <a:r>
+              <a:rPr lang="en-US" sz="2700" dirty="0" spc="-5" kern="0">
+                <a:solidFill>
+                  <a:srgbClr val="14161C"/>
+                </a:solidFill>
+                <a:latin typeface="Be Vietnam Pro" pitchFamily="34" charset="0"/>
+                <a:ea typeface="Be Vietnam Pro" pitchFamily="34" charset="-122"/>
+                <a:cs typeface="Be Vietnam Pro" pitchFamily="34" charset="-120"/>
+              </a:rPr>
+              <a:t> bài</a:t>
+            </a:r>
+            <a:r>
+              <a:rPr lang="en-US" sz="2700" dirty="0" spc="-15" kern="0">
+                <a:solidFill>
+                  <a:srgbClr val="14161C"/>
+                </a:solidFill>
+                <a:latin typeface="Be Vietnam Pro" pitchFamily="34" charset="0"/>
+                <a:ea typeface="Be Vietnam Pro" pitchFamily="34" charset="-122"/>
+                <a:cs typeface="Be Vietnam Pro" pitchFamily="34" charset="-120"/>
+              </a:rPr>
+              <a:t> toán</a:t>
             </a:r>
             <a:r>
               <a:rPr lang="en-US" sz="2700" dirty="0" spc="-2" kern="0">
@@ -3530,21 +3607,10 @@
                 <a:ea typeface="Be Vietnam Pro" pitchFamily="34" charset="-122"/>
                 <a:cs typeface="Be Vietnam Pro" pitchFamily="34" charset="-120"/>
               </a:rPr>
-              <a:t> của</a:t>
-            </a:r>
-            <a:r>
-              <a:rPr lang="en-US" sz="2700" dirty="0" spc="-1" kern="0">
-                <a:solidFill>
-                  <a:srgbClr val="14161C"/>
-                </a:solidFill>
-                <a:latin typeface="Be Vietnam Pro" pitchFamily="34" charset="0"/>
-                <a:ea typeface="Be Vietnam Pro" pitchFamily="34" charset="-122"/>
-                <a:cs typeface="Be Vietnam Pro" pitchFamily="34" charset="-120"/>
-              </a:rPr>
-              <a:t> nhiều</a:t>
-            </a:r>
-            <a:r>
-              <a:rPr lang="en-US" sz="2700" dirty="0" spc="-14" kern="0">
+              <a:t> ở nhiều</a:t>
+            </a:r>
+            <a:r>
+              <a:rPr lang="en-US" sz="2700" dirty="0" spc="-13" kern="0">
                 <a:solidFill>
                   <a:srgbClr val="14161C"/>
                 </a:solidFill>
@@ -3563,62 +3629,7 @@
                 <a:ea typeface="Be Vietnam Pro" pitchFamily="34" charset="-122"/>
                 <a:cs typeface="Be Vietnam Pro" pitchFamily="34" charset="-120"/>
               </a:rPr>
-              <a:t> ngữ</a:t>
-            </a:r>
-            <a:r>
-              <a:rPr lang="en-US" sz="2700" dirty="0" spc="-24" kern="0">
-                <a:solidFill>
-                  <a:srgbClr val="14161C"/>
-                </a:solidFill>
-                <a:latin typeface="Be Vietnam Pro" pitchFamily="34" charset="0"/>
-                <a:ea typeface="Be Vietnam Pro" pitchFamily="34" charset="-122"/>
-                <a:cs typeface="Be Vietnam Pro" pitchFamily="34" charset="-120"/>
-              </a:rPr>
-              <a:t> trên</a:t>
-            </a:r>
-            <a:r>
-              <a:rPr lang="en-US" sz="2700" dirty="0" spc="-1" kern="0">
-                <a:solidFill>
-                  <a:srgbClr val="14161C"/>
-                </a:solidFill>
-                <a:latin typeface="Be Vietnam Pro" pitchFamily="34" charset="0"/>
-                <a:ea typeface="Be Vietnam Pro" pitchFamily="34" charset="-122"/>
-                <a:cs typeface="Be Vietnam Pro" pitchFamily="34" charset="-120"/>
-              </a:rPr>
-              <a:t> cùng</a:t>
-            </a:r>
-            <a:r>
-              <a:rPr lang="en-US" sz="2700" dirty="0" spc="7" kern="0">
-                <a:solidFill>
-                  <a:srgbClr val="14161C"/>
-                </a:solidFill>
-                <a:latin typeface="Be Vietnam Pro" pitchFamily="34" charset="0"/>
-                <a:ea typeface="Be Vietnam Pro" pitchFamily="34" charset="-122"/>
-                <a:cs typeface="Be Vietnam Pro" pitchFamily="34" charset="-120"/>
-              </a:rPr>
-              <a:t> mười</a:t>
-            </a:r>
-            <a:r>
-              <a:rPr lang="en-US" sz="2700" dirty="0" spc="-4" kern="0">
-                <a:solidFill>
-                  <a:srgbClr val="14161C"/>
-                </a:solidFill>
-                <a:latin typeface="Be Vietnam Pro" pitchFamily="34" charset="0"/>
-                <a:ea typeface="Be Vietnam Pro" pitchFamily="34" charset="-122"/>
-                <a:cs typeface="Be Vietnam Pro" pitchFamily="34" charset="-120"/>
-              </a:rPr>
-              <a:t> bài</a:t>
-            </a:r>
-            <a:r>
-              <a:rPr lang="en-US" sz="2700" dirty="0" spc="-13" kern="0">
-                <a:solidFill>
-                  <a:srgbClr val="14161C"/>
-                </a:solidFill>
-                <a:latin typeface="Be Vietnam Pro" pitchFamily="34" charset="0"/>
-                <a:ea typeface="Be Vietnam Pro" pitchFamily="34" charset="-122"/>
-                <a:cs typeface="Be Vietnam Pro" pitchFamily="34" charset="-120"/>
-              </a:rPr>
-              <a:t> toán.</a:t>
+              <a:t> ngữ.</a:t>
             </a:r>
             <a:endParaRPr lang="en-US" sz="2700" dirty="0"/>
           </a:p>
@@ -3746,15 +3757,59 @@
               <a:t> cách</a:t>
             </a:r>
             <a:r>
-              <a:rPr lang="en-US" sz="2550" dirty="0" spc="2" kern="0">
-                <a:solidFill>
-                  <a:srgbClr val="14161C"/>
-                </a:solidFill>
-                <a:latin typeface="Be Vietnam Pro" pitchFamily="34" charset="0"/>
-                <a:ea typeface="Be Vietnam Pro" pitchFamily="34" charset="-122"/>
-                <a:cs typeface="Be Vietnam Pro" pitchFamily="34" charset="-120"/>
-              </a:rPr>
-              <a:t> làm</a:t>
+              <a:rPr lang="en-US" sz="2550" dirty="0" spc="17" kern="0">
+                <a:solidFill>
+                  <a:srgbClr val="14161C"/>
+                </a:solidFill>
+                <a:latin typeface="Be Vietnam Pro" pitchFamily="34" charset="0"/>
+                <a:ea typeface="Be Vietnam Pro" pitchFamily="34" charset="-122"/>
+                <a:cs typeface="Be Vietnam Pro" pitchFamily="34" charset="-120"/>
+              </a:rPr>
+              <a:t> đo</a:t>
+            </a:r>
+            <a:r>
+              <a:rPr lang="en-US" sz="2550" dirty="0" spc="6" kern="0">
+                <a:solidFill>
+                  <a:srgbClr val="14161C"/>
+                </a:solidFill>
+                <a:latin typeface="Be Vietnam Pro" pitchFamily="34" charset="0"/>
+                <a:ea typeface="Be Vietnam Pro" pitchFamily="34" charset="-122"/>
+                <a:cs typeface="Be Vietnam Pro" pitchFamily="34" charset="-120"/>
+              </a:rPr>
+              <a:t> trước</a:t>
+            </a:r>
+            <a:r>
+              <a:rPr lang="en-US" sz="2550" dirty="0" spc="0" kern="0">
+                <a:solidFill>
+                  <a:srgbClr val="14161C"/>
+                </a:solidFill>
+                <a:latin typeface="Be Vietnam Pro" pitchFamily="34" charset="0"/>
+                <a:ea typeface="Be Vietnam Pro" pitchFamily="34" charset="-122"/>
+                <a:cs typeface="Be Vietnam Pro" pitchFamily="34" charset="-120"/>
+              </a:rPr>
+              <a:t> khi tin</a:t>
+            </a:r>
+            <a:r>
+              <a:rPr lang="en-US" sz="2550" dirty="0" spc="-5" kern="0">
+                <a:solidFill>
+                  <a:srgbClr val="14161C"/>
+                </a:solidFill>
+                <a:latin typeface="Be Vietnam Pro" pitchFamily="34" charset="0"/>
+                <a:ea typeface="Be Vietnam Pro" pitchFamily="34" charset="-122"/>
+                <a:cs typeface="Be Vietnam Pro" pitchFamily="34" charset="-120"/>
+              </a:rPr>
+              <a:t> một</a:t>
+            </a:r>
+            <a:r>
+              <a:rPr lang="en-US" sz="2550" dirty="0" spc="-2" kern="0">
+                <a:solidFill>
+                  <a:srgbClr val="14161C"/>
+                </a:solidFill>
+                <a:latin typeface="Be Vietnam Pro" pitchFamily="34" charset="0"/>
+                <a:ea typeface="Be Vietnam Pro" pitchFamily="34" charset="-122"/>
+                <a:cs typeface="Be Vietnam Pro" pitchFamily="34" charset="-120"/>
+              </a:rPr>
+              <a:t> bảng</a:t>
             </a:r>
             <a:r>
               <a:rPr lang="en-US" sz="2550" dirty="0" spc="-19" kern="0">
@@ -3765,7 +3820,7 @@
                 <a:ea typeface="Be Vietnam Pro" pitchFamily="34" charset="-122"/>
                 <a:cs typeface="Be Vietnam Pro" pitchFamily="34" charset="-120"/>
               </a:rPr>
-              <a:t> và</a:t>
+              <a:t> xếp</a:t>
             </a:r>
             <a:r>
               <a:rPr lang="en-US" sz="2550" dirty="0" spc="0" kern="0">
@@ -3776,87 +3831,10 @@
                 <a:ea typeface="Be Vietnam Pro" pitchFamily="34" charset="-122"/>
                 <a:cs typeface="Be Vietnam Pro" pitchFamily="34" charset="-120"/>
               </a:rPr>
-              <a:t> cách</a:t>
-            </a:r>
-            <a:r>
-              <a:rPr lang="en-US" sz="2550" dirty="0" spc="-1" kern="0">
-                <a:solidFill>
-                  <a:srgbClr val="14161C"/>
-                </a:solidFill>
-                <a:latin typeface="Be Vietnam Pro" pitchFamily="34" charset="0"/>
-                <a:ea typeface="Be Vietnam Pro" pitchFamily="34" charset="-122"/>
-                <a:cs typeface="Be Vietnam Pro" pitchFamily="34" charset="-120"/>
-              </a:rPr>
-              <a:t> dùng</a:t>
-            </a:r>
-            <a:r>
-              <a:rPr lang="en-US" sz="2550" dirty="0" spc="-33" kern="0">
-                <a:solidFill>
-                  <a:srgbClr val="14161C"/>
-                </a:solidFill>
-                <a:latin typeface="Be Vietnam Pro" pitchFamily="34" charset="0"/>
-                <a:ea typeface="Be Vietnam Pro" pitchFamily="34" charset="-122"/>
-                <a:cs typeface="Be Vietnam Pro" pitchFamily="34" charset="-120"/>
-              </a:rPr>
-              <a:t> kết</a:t>
-            </a:r>
-            <a:r>
-              <a:rPr lang="en-US" sz="2550" dirty="0" spc="2" kern="0">
-                <a:solidFill>
-                  <a:srgbClr val="14161C"/>
-                </a:solidFill>
-                <a:latin typeface="Be Vietnam Pro" pitchFamily="34" charset="0"/>
-                <a:ea typeface="Be Vietnam Pro" pitchFamily="34" charset="-122"/>
-                <a:cs typeface="Be Vietnam Pro" pitchFamily="34" charset="-120"/>
-              </a:rPr>
-              <a:t> quả</a:t>
-            </a:r>
-            <a:r>
-              <a:rPr lang="en-US" sz="2550" dirty="0" spc="0" kern="0">
-                <a:solidFill>
-                  <a:srgbClr val="14161C"/>
-                </a:solidFill>
-                <a:latin typeface="Be Vietnam Pro" pitchFamily="34" charset="0"/>
-                <a:ea typeface="Be Vietnam Pro" pitchFamily="34" charset="-122"/>
-                <a:cs typeface="Be Vietnam Pro" pitchFamily="34" charset="-120"/>
-              </a:rPr>
-              <a:t> cho</a:t>
+              <a:t> hạng, không</a:t>
             </a:r>
             <a:r>
               <a:rPr lang="en-US" sz="2550" dirty="0" spc="1" kern="0">
-                <a:solidFill>
-                  <a:srgbClr val="14161C"/>
-                </a:solidFill>
-                <a:latin typeface="Be Vietnam Pro" pitchFamily="34" charset="0"/>
-                <a:ea typeface="Be Vietnam Pro" pitchFamily="34" charset="-122"/>
-                <a:cs typeface="Be Vietnam Pro" pitchFamily="34" charset="-120"/>
-              </a:rPr>
-              <a:t> thận</a:t>
-            </a:r>
-            <a:r>
-              <a:rPr lang="en-US" sz="2550" dirty="0" spc="-15" kern="0">
-                <a:solidFill>
-                  <a:srgbClr val="14161C"/>
-                </a:solidFill>
-                <a:latin typeface="Be Vietnam Pro" pitchFamily="34" charset="0"/>
-                <a:ea typeface="Be Vietnam Pro" pitchFamily="34" charset="-122"/>
-                <a:cs typeface="Be Vietnam Pro" pitchFamily="34" charset="-120"/>
-              </a:rPr>
-              <a:t> trọng,</a:t>
-            </a:r>
-            <a:r>
-              <a:rPr lang="en-US" sz="2550" dirty="0" spc="1" kern="0">
-                <a:solidFill>
-                  <a:srgbClr val="14161C"/>
-                </a:solidFill>
-                <a:latin typeface="Be Vietnam Pro" pitchFamily="34" charset="0"/>
-                <a:ea typeface="Be Vietnam Pro" pitchFamily="34" charset="-122"/>
-                <a:cs typeface="Be Vietnam Pro" pitchFamily="34" charset="-120"/>
-              </a:rPr>
-              <a:t> không</a:t>
-            </a:r>
-            <a:r>
-              <a:rPr lang="en-US" sz="2550" dirty="0" spc="0" kern="0">
                 <a:solidFill>
                   <a:srgbClr val="14161C"/>
                 </a:solidFill>
@@ -5211,6 +5189,39 @@
               <a:buNone/>
             </a:pPr>
             <a:r>
+              <a:rPr lang="en-US" sz="2700" dirty="0" spc="2" kern="0">
+                <a:solidFill>
+                  <a:srgbClr val="C4C8D6"/>
+                </a:solidFill>
+                <a:latin typeface="Be Vietnam Pro" pitchFamily="34" charset="0"/>
+                <a:ea typeface="Be Vietnam Pro" pitchFamily="34" charset="-122"/>
+                <a:cs typeface="Be Vietnam Pro" pitchFamily="34" charset="-120"/>
+              </a:rPr>
+              <a:t>Mã</a:t>
+            </a:r>
+            <a:r>
+              <a:rPr lang="en-US" sz="2700" dirty="0" spc="-11" kern="0">
+                <a:solidFill>
+                  <a:srgbClr val="C4C8D6"/>
+                </a:solidFill>
+                <a:latin typeface="Be Vietnam Pro" pitchFamily="34" charset="0"/>
+                <a:ea typeface="Be Vietnam Pro" pitchFamily="34" charset="-122"/>
+                <a:cs typeface="Be Vietnam Pro" pitchFamily="34" charset="-120"/>
+              </a:rPr>
+              <a:t> lấy</a:t>
+            </a:r>
+            <a:r>
+              <a:rPr lang="en-US" sz="2700" dirty="0" spc="-16" kern="0">
+                <a:solidFill>
+                  <a:srgbClr val="C4C8D6"/>
+                </a:solidFill>
+                <a:latin typeface="Be Vietnam Pro" pitchFamily="34" charset="0"/>
+                <a:ea typeface="Be Vietnam Pro" pitchFamily="34" charset="-122"/>
+                <a:cs typeface="Be Vietnam Pro" pitchFamily="34" charset="-120"/>
+              </a:rPr>
+              <a:t> nguyên</a:t>
+            </a:r>
+            <a:r>
               <a:rPr lang="en-US" sz="2700" dirty="0" spc="0" kern="0">
                 <a:solidFill>
                   <a:srgbClr val="C4C8D6"/>
@@ -5219,10 +5230,10 @@
                 <a:ea typeface="Be Vietnam Pro" pitchFamily="34" charset="-122"/>
                 <a:cs typeface="Be Vietnam Pro" pitchFamily="34" charset="-120"/>
               </a:rPr>
-              <a:t>Mỗi</a:t>
-            </a:r>
-            <a:r>
-              <a:rPr lang="en-US" sz="2700" dirty="0" spc="-4" kern="0">
+              <a:t> từ</a:t>
+            </a:r>
+            <a:r>
+              <a:rPr lang="en-US" sz="2700" dirty="0" spc="-6" kern="0">
                 <a:solidFill>
                   <a:srgbClr val="C4C8D6"/>
                 </a:solidFill>
@@ -5230,10 +5241,10 @@
                 <a:ea typeface="Be Vietnam Pro" pitchFamily="34" charset="-122"/>
                 <a:cs typeface="Be Vietnam Pro" pitchFamily="34" charset="-120"/>
               </a:rPr>
-              <a:t> bài</a:t>
-            </a:r>
-            <a:r>
-              <a:rPr lang="en-US" sz="2700" dirty="0" spc="9" kern="0">
+              <a:t> Computer</a:t>
+            </a:r>
+            <a:r>
+              <a:rPr lang="en-US" sz="2700" dirty="0" spc="-19" kern="0">
                 <a:solidFill>
                   <a:srgbClr val="C4C8D6"/>
                 </a:solidFill>
@@ -5241,7 +5252,29 @@
                 <a:ea typeface="Be Vietnam Pro" pitchFamily="34" charset="-122"/>
                 <a:cs typeface="Be Vietnam Pro" pitchFamily="34" charset="-120"/>
               </a:rPr>
-              <a:t> được</a:t>
+              <a:t> Language</a:t>
+            </a:r>
+            <a:r>
+              <a:rPr lang="en-US" sz="2700" dirty="0" spc="-7" kern="0">
+                <a:solidFill>
+                  <a:srgbClr val="C4C8D6"/>
+                </a:solidFill>
+                <a:latin typeface="Be Vietnam Pro" pitchFamily="34" charset="0"/>
+                <a:ea typeface="Be Vietnam Pro" pitchFamily="34" charset="-122"/>
+                <a:cs typeface="Be Vietnam Pro" pitchFamily="34" charset="-120"/>
+              </a:rPr>
+              <a:t> Benchmarks</a:t>
+            </a:r>
+            <a:r>
+              <a:rPr lang="en-US" sz="2700" dirty="0" spc="1" kern="0">
+                <a:solidFill>
+                  <a:srgbClr val="C4C8D6"/>
+                </a:solidFill>
+                <a:latin typeface="Be Vietnam Pro" pitchFamily="34" charset="0"/>
+                <a:ea typeface="Be Vietnam Pro" pitchFamily="34" charset="-122"/>
+                <a:cs typeface="Be Vietnam Pro" pitchFamily="34" charset="-120"/>
+              </a:rPr>
+              <a:t> Game,</a:t>
             </a:r>
             <a:r>
               <a:rPr lang="en-US" sz="2700" dirty="0" spc="-5" kern="0">
@@ -5252,10 +5285,10 @@
                 <a:ea typeface="Be Vietnam Pro" pitchFamily="34" charset="-122"/>
                 <a:cs typeface="Be Vietnam Pro" pitchFamily="34" charset="-120"/>
               </a:rPr>
-              <a:t> viết bằng</a:t>
-            </a:r>
-            <a:r>
-              <a:rPr lang="en-US" sz="2700" dirty="0" spc="20" kern="0">
+              <a:t> viết</a:t>
+            </a:r>
+            <a:r>
+              <a:rPr lang="en-US" sz="2700" dirty="0" spc="-9" kern="0">
                 <a:solidFill>
                   <a:srgbClr val="C4C8D6"/>
                 </a:solidFill>
@@ -5263,10 +5296,10 @@
                 <a:ea typeface="Be Vietnam Pro" pitchFamily="34" charset="-122"/>
                 <a:cs typeface="Be Vietnam Pro" pitchFamily="34" charset="-120"/>
               </a:rPr>
-              <a:t> từng</a:t>
-            </a:r>
-            <a:r>
-              <a:rPr lang="en-US" sz="2700" dirty="0" spc="-13" kern="0">
+              <a:t> sẵn</a:t>
+            </a:r>
+            <a:r>
+              <a:rPr lang="en-US" sz="2700" dirty="0" spc="-1" kern="0">
                 <a:solidFill>
                   <a:srgbClr val="C4C8D6"/>
                 </a:solidFill>
@@ -5274,10 +5307,10 @@
                 <a:ea typeface="Be Vietnam Pro" pitchFamily="34" charset="-122"/>
                 <a:cs typeface="Be Vietnam Pro" pitchFamily="34" charset="-120"/>
               </a:rPr>
-              <a:t> ngôn</a:t>
-            </a:r>
-            <a:r>
-              <a:rPr lang="en-US" sz="2700" dirty="0" spc="-4" kern="0">
+              <a:t> cho</a:t>
+            </a:r>
+            <a:r>
+              <a:rPr lang="en-US" sz="2700" dirty="0" spc="-3" kern="0">
                 <a:solidFill>
                   <a:srgbClr val="C4C8D6"/>
                 </a:solidFill>
@@ -5285,65 +5318,10 @@
                 <a:ea typeface="Be Vietnam Pro" pitchFamily="34" charset="-122"/>
                 <a:cs typeface="Be Vietnam Pro" pitchFamily="34" charset="-120"/>
               </a:rPr>
-              <a:t> ngữ</a:t>
-            </a:r>
-            <a:r>
-              <a:rPr lang="en-US" sz="2700" dirty="0" spc="-20" kern="0">
-                <a:solidFill>
-                  <a:srgbClr val="C4C8D6"/>
-                </a:solidFill>
-                <a:latin typeface="Be Vietnam Pro" pitchFamily="34" charset="0"/>
-                <a:ea typeface="Be Vietnam Pro" pitchFamily="34" charset="-122"/>
-                <a:cs typeface="Be Vietnam Pro" pitchFamily="34" charset="-120"/>
-              </a:rPr>
-              <a:t> trong</a:t>
-            </a:r>
-            <a:r>
-              <a:rPr lang="en-US" sz="2700" dirty="0" spc="-2" kern="0">
-                <a:solidFill>
-                  <a:srgbClr val="C4C8D6"/>
-                </a:solidFill>
-                <a:latin typeface="Be Vietnam Pro" pitchFamily="34" charset="0"/>
-                <a:ea typeface="Be Vietnam Pro" pitchFamily="34" charset="-122"/>
-                <a:cs typeface="Be Vietnam Pro" pitchFamily="34" charset="-120"/>
-              </a:rPr>
-              <a:t> nhóm</a:t>
-            </a:r>
-            <a:r>
-              <a:rPr lang="en-US" sz="2700" dirty="0" spc="-15" kern="0">
-                <a:solidFill>
-                  <a:srgbClr val="C4C8D6"/>
-                </a:solidFill>
-                <a:latin typeface="Be Vietnam Pro" pitchFamily="34" charset="0"/>
-                <a:ea typeface="Be Vietnam Pro" pitchFamily="34" charset="-122"/>
-                <a:cs typeface="Be Vietnam Pro" pitchFamily="34" charset="-120"/>
-              </a:rPr>
-              <a:t> gần</a:t>
-            </a:r>
-            <a:r>
-              <a:rPr lang="en-US" sz="2700" dirty="0" spc="-8" kern="0">
-                <a:solidFill>
-                  <a:srgbClr val="C4C8D6"/>
-                </a:solidFill>
-                <a:latin typeface="Be Vietnam Pro" pitchFamily="34" charset="0"/>
-                <a:ea typeface="Be Vietnam Pro" pitchFamily="34" charset="-122"/>
-                <a:cs typeface="Be Vietnam Pro" pitchFamily="34" charset="-120"/>
-              </a:rPr>
-              <a:t> ba</a:t>
-            </a:r>
-            <a:r>
-              <a:rPr lang="en-US" sz="2700" dirty="0" spc="7" kern="0">
-                <a:solidFill>
-                  <a:srgbClr val="C4C8D6"/>
-                </a:solidFill>
-                <a:latin typeface="Be Vietnam Pro" pitchFamily="34" charset="0"/>
-                <a:ea typeface="Be Vietnam Pro" pitchFamily="34" charset="-122"/>
-                <a:cs typeface="Be Vietnam Pro" pitchFamily="34" charset="-120"/>
-              </a:rPr>
-              <a:t> mươi</a:t>
-            </a:r>
-            <a:r>
-              <a:rPr lang="en-US" sz="2700" dirty="0" spc="-13" kern="0">
+              <a:t> 28</a:t>
+            </a:r>
+            <a:r>
+              <a:rPr lang="en-US" sz="2700" dirty="0" spc="-14" kern="0">
                 <a:solidFill>
                   <a:srgbClr val="C4C8D6"/>
                 </a:solidFill>
@@ -5939,7 +5917,7 @@
               <a:buNone/>
             </a:pPr>
             <a:r>
-              <a:rPr lang="en-US" sz="2850" b="1" dirty="0" spc="-7" kern="0">
+              <a:rPr lang="en-US" sz="2850" b="1" dirty="0" spc="-1" kern="0">
                 <a:solidFill>
                   <a:srgbClr val="F3EEE3"/>
                 </a:solidFill>
@@ -5947,10 +5925,10 @@
                 <a:ea typeface="Be Vietnam Pro" pitchFamily="34" charset="-122"/>
                 <a:cs typeface="Be Vietnam Pro" pitchFamily="34" charset="-120"/>
               </a:rPr>
-              <a:t>Viết</a:t>
-            </a:r>
-            <a:r>
-              <a:rPr lang="en-US" sz="2850" b="1" dirty="0" spc="0" kern="0">
+              <a:t>Có</a:t>
+            </a:r>
+            <a:r>
+              <a:rPr lang="en-US" sz="2850" b="1" dirty="0" spc="4" kern="0">
                 <a:solidFill>
                   <a:srgbClr val="F3EEE3"/>
                 </a:solidFill>
@@ -5958,7 +5936,7 @@
                 <a:ea typeface="Be Vietnam Pro" pitchFamily="34" charset="-122"/>
                 <a:cs typeface="Be Vietnam Pro" pitchFamily="34" charset="-120"/>
               </a:rPr>
-              <a:t> mỗi</a:t>
+              <a:t> sẵn</a:t>
             </a:r>
             <a:r>
               <a:rPr lang="en-US" sz="2850" b="1" dirty="0" spc="3" kern="0">
@@ -5972,7 +5950,7 @@
               <a:t> bài</a:t>
             </a:r>
             <a:r>
-              <a:rPr lang="en-US" sz="2850" b="1" dirty="0" spc="-1" kern="0">
+              <a:rPr lang="en-US" sz="2850" b="1" dirty="0" spc="-3" kern="0">
                 <a:solidFill>
                   <a:srgbClr val="F3EEE3"/>
                 </a:solidFill>
@@ -5980,10 +5958,10 @@
                 <a:ea typeface="Be Vietnam Pro" pitchFamily="34" charset="-122"/>
                 <a:cs typeface="Be Vietnam Pro" pitchFamily="34" charset="-120"/>
               </a:rPr>
-              <a:t> bằng</a:t>
-            </a:r>
-            <a:r>
-              <a:rPr lang="en-US" sz="2850" b="1" dirty="0" spc="29" kern="0">
+              <a:t> cho</a:t>
+            </a:r>
+            <a:r>
+              <a:rPr lang="en-US" sz="2850" b="1" dirty="0" spc="5" kern="0">
                 <a:solidFill>
                   <a:srgbClr val="F3EEE3"/>
                 </a:solidFill>
@@ -5991,7 +5969,7 @@
                 <a:ea typeface="Be Vietnam Pro" pitchFamily="34" charset="-122"/>
                 <a:cs typeface="Be Vietnam Pro" pitchFamily="34" charset="-120"/>
               </a:rPr>
-              <a:t> từng</a:t>
+              <a:t> 28</a:t>
             </a:r>
             <a:r>
               <a:rPr lang="en-US" sz="2850" b="1" dirty="0" spc="-8" kern="0">
@@ -7175,15 +7153,15 @@
               <a:buChar char="•"/>
             </a:pPr>
             <a:r>
-              <a:rPr lang="en-US" sz="2400" dirty="0" spc="-9" kern="0">
-                <a:solidFill>
-                  <a:srgbClr val="14161C"/>
-                </a:solidFill>
-                <a:latin typeface="Be Vietnam Pro" pitchFamily="34" charset="0"/>
-                <a:ea typeface="Be Vietnam Pro" pitchFamily="34" charset="-122"/>
-                <a:cs typeface="Be Vietnam Pro" pitchFamily="34" charset="-120"/>
-              </a:rPr>
-              <a:t>Chạy</a:t>
+              <a:rPr lang="en-US" sz="2400" dirty="0" spc="-1" kern="0">
+                <a:solidFill>
+                  <a:srgbClr val="14161C"/>
+                </a:solidFill>
+                <a:latin typeface="Be Vietnam Pro" pitchFamily="34" charset="0"/>
+                <a:ea typeface="Be Vietnam Pro" pitchFamily="34" charset="-122"/>
+                <a:cs typeface="Be Vietnam Pro" pitchFamily="34" charset="-120"/>
+              </a:rPr>
+              <a:t>Tính</a:t>
             </a:r>
             <a:r>
               <a:rPr lang="en-US" sz="2400" dirty="0" spc="1" kern="0">
@@ -7194,40 +7172,29 @@
                 <a:ea typeface="Be Vietnam Pro" pitchFamily="34" charset="-122"/>
                 <a:cs typeface="Be Vietnam Pro" pitchFamily="34" charset="-120"/>
               </a:rPr>
-              <a:t> nhanh hơn</a:t>
-            </a:r>
-            <a:r>
-              <a:rPr lang="en-US" sz="2400" dirty="0" spc="-8" kern="0">
-                <a:solidFill>
-                  <a:srgbClr val="14161C"/>
-                </a:solidFill>
-                <a:latin typeface="Be Vietnam Pro" pitchFamily="34" charset="0"/>
-                <a:ea typeface="Be Vietnam Pro" pitchFamily="34" charset="-122"/>
-                <a:cs typeface="Be Vietnam Pro" pitchFamily="34" charset="-120"/>
-              </a:rPr>
-              <a:t> hay</a:t>
-            </a:r>
-            <a:r>
-              <a:rPr lang="en-US" sz="2400" dirty="0" spc="1" kern="0">
-                <a:solidFill>
-                  <a:srgbClr val="14161C"/>
-                </a:solidFill>
-                <a:latin typeface="Be Vietnam Pro" pitchFamily="34" charset="0"/>
-                <a:ea typeface="Be Vietnam Pro" pitchFamily="34" charset="-122"/>
-                <a:cs typeface="Be Vietnam Pro" pitchFamily="34" charset="-120"/>
-              </a:rPr>
-              <a:t> chậm</a:t>
-            </a:r>
-            <a:r>
-              <a:rPr lang="en-US" sz="2400" dirty="0" spc="2" kern="0">
-                <a:solidFill>
-                  <a:srgbClr val="14161C"/>
-                </a:solidFill>
-                <a:latin typeface="Be Vietnam Pro" pitchFamily="34" charset="0"/>
-                <a:ea typeface="Be Vietnam Pro" pitchFamily="34" charset="-122"/>
-                <a:cs typeface="Be Vietnam Pro" pitchFamily="34" charset="-120"/>
-              </a:rPr>
-              <a:t> hơn</a:t>
+              <a:t> bằng</a:t>
+            </a:r>
+            <a:r>
+              <a:rPr lang="en-US" sz="2400" dirty="0" spc="0" kern="0">
+                <a:solidFill>
+                  <a:srgbClr val="14161C"/>
+                </a:solidFill>
+                <a:latin typeface="Be Vietnam Pro" pitchFamily="34" charset="0"/>
+                <a:ea typeface="Be Vietnam Pro" pitchFamily="34" charset="-122"/>
+                <a:cs typeface="Be Vietnam Pro" pitchFamily="34" charset="-120"/>
+              </a:rPr>
+              <a:t> mili</a:t>
+            </a:r>
+            <a:r>
+              <a:rPr lang="en-US" sz="2400" dirty="0" spc="-6" kern="0">
+                <a:solidFill>
+                  <a:srgbClr val="14161C"/>
+                </a:solidFill>
+                <a:latin typeface="Be Vietnam Pro" pitchFamily="34" charset="0"/>
+                <a:ea typeface="Be Vietnam Pro" pitchFamily="34" charset="-122"/>
+                <a:cs typeface="Be Vietnam Pro" pitchFamily="34" charset="-120"/>
+              </a:rPr>
+              <a:t> giây</a:t>
             </a:r>
             <a:endParaRPr lang="en-US" sz="2400" dirty="0"/>
           </a:p>
@@ -7241,6 +7208,17 @@
               <a:buChar char="•"/>
             </a:pPr>
             <a:r>
+              <a:rPr lang="en-US" sz="2400" dirty="0" spc="0" kern="0">
+                <a:solidFill>
+                  <a:srgbClr val="14161C"/>
+                </a:solidFill>
+                <a:latin typeface="Be Vietnam Pro" pitchFamily="34" charset="0"/>
+                <a:ea typeface="Be Vietnam Pro" pitchFamily="34" charset="-122"/>
+                <a:cs typeface="Be Vietnam Pro" pitchFamily="34" charset="-120"/>
+              </a:rPr>
+              <a:t>Ghi</a:t>
+            </a:r>
+            <a:r>
               <a:rPr lang="en-US" sz="2400" dirty="0" spc="2" kern="0">
                 <a:solidFill>
                   <a:srgbClr val="14161C"/>
@@ -7249,62 +7227,29 @@
                 <a:ea typeface="Be Vietnam Pro" pitchFamily="34" charset="-122"/>
                 <a:cs typeface="Be Vietnam Pro" pitchFamily="34" charset="-120"/>
               </a:rPr>
-              <a:t>Chậm</a:t>
-            </a:r>
-            <a:r>
-              <a:rPr lang="en-US" sz="2400" dirty="0" spc="1" kern="0">
-                <a:solidFill>
-                  <a:srgbClr val="14161C"/>
-                </a:solidFill>
-                <a:latin typeface="Be Vietnam Pro" pitchFamily="34" charset="0"/>
-                <a:ea typeface="Be Vietnam Pro" pitchFamily="34" charset="-122"/>
-                <a:cs typeface="Be Vietnam Pro" pitchFamily="34" charset="-120"/>
-              </a:rPr>
-              <a:t> hơn</a:t>
-            </a:r>
-            <a:r>
-              <a:rPr lang="en-US" sz="2400" dirty="0" spc="0" kern="0">
-                <a:solidFill>
-                  <a:srgbClr val="14161C"/>
-                </a:solidFill>
-                <a:latin typeface="Be Vietnam Pro" pitchFamily="34" charset="0"/>
-                <a:ea typeface="Be Vietnam Pro" pitchFamily="34" charset="-122"/>
-                <a:cs typeface="Be Vietnam Pro" pitchFamily="34" charset="-120"/>
-              </a:rPr>
-              <a:t> có</a:t>
-            </a:r>
-            <a:r>
-              <a:rPr lang="en-US" sz="2400" dirty="0" spc="1" kern="0">
-                <a:solidFill>
-                  <a:srgbClr val="14161C"/>
-                </a:solidFill>
-                <a:latin typeface="Be Vietnam Pro" pitchFamily="34" charset="0"/>
-                <a:ea typeface="Be Vietnam Pro" pitchFamily="34" charset="-122"/>
-                <a:cs typeface="Be Vietnam Pro" pitchFamily="34" charset="-120"/>
-              </a:rPr>
-              <a:t> thể</a:t>
-            </a:r>
-            <a:r>
-              <a:rPr lang="en-US" sz="2400" dirty="0" spc="-11" kern="0">
-                <a:solidFill>
-                  <a:srgbClr val="14161C"/>
-                </a:solidFill>
-                <a:latin typeface="Be Vietnam Pro" pitchFamily="34" charset="0"/>
-                <a:ea typeface="Be Vietnam Pro" pitchFamily="34" charset="-122"/>
-                <a:cs typeface="Be Vietnam Pro" pitchFamily="34" charset="-120"/>
-              </a:rPr>
-              <a:t> tốn</a:t>
-            </a:r>
-            <a:r>
-              <a:rPr lang="en-US" sz="2400" dirty="0" spc="2" kern="0">
-                <a:solidFill>
-                  <a:srgbClr val="14161C"/>
-                </a:solidFill>
-                <a:latin typeface="Be Vietnam Pro" pitchFamily="34" charset="0"/>
-                <a:ea typeface="Be Vietnam Pro" pitchFamily="34" charset="-122"/>
-                <a:cs typeface="Be Vietnam Pro" pitchFamily="34" charset="-120"/>
-              </a:rPr>
-              <a:t> ít năng</a:t>
+              <a:t> cùng dòng</a:t>
+            </a:r>
+            <a:r>
+              <a:rPr lang="en-US" sz="2400" dirty="0" spc="-13" kern="0">
+                <a:solidFill>
+                  <a:srgbClr val="14161C"/>
+                </a:solidFill>
+                <a:latin typeface="Be Vietnam Pro" pitchFamily="34" charset="0"/>
+                <a:ea typeface="Be Vietnam Pro" pitchFamily="34" charset="-122"/>
+                <a:cs typeface="Be Vietnam Pro" pitchFamily="34" charset="-120"/>
+              </a:rPr>
+              <a:t> với</a:t>
+            </a:r>
+            <a:r>
+              <a:rPr lang="en-US" sz="2400" dirty="0" spc="3" kern="0">
+                <a:solidFill>
+                  <a:srgbClr val="14161C"/>
+                </a:solidFill>
+                <a:latin typeface="Be Vietnam Pro" pitchFamily="34" charset="0"/>
+                <a:ea typeface="Be Vietnam Pro" pitchFamily="34" charset="-122"/>
+                <a:cs typeface="Be Vietnam Pro" pitchFamily="34" charset="-120"/>
+              </a:rPr>
+              <a:t> năng</a:t>
             </a:r>
             <a:r>
               <a:rPr lang="en-US" sz="2400" dirty="0" spc="7" kern="0">
@@ -7316,17 +7261,6 @@
                 <a:cs typeface="Be Vietnam Pro" pitchFamily="34" charset="-120"/>
               </a:rPr>
               <a:t> lượng</a:t>
-            </a:r>
-            <a:r>
-              <a:rPr lang="en-US" sz="2400" dirty="0" spc="1" kern="0">
-                <a:solidFill>
-                  <a:srgbClr val="14161C"/>
-                </a:solidFill>
-                <a:latin typeface="Be Vietnam Pro" pitchFamily="34" charset="0"/>
-                <a:ea typeface="Be Vietnam Pro" pitchFamily="34" charset="-122"/>
-                <a:cs typeface="Be Vietnam Pro" pitchFamily="34" charset="-120"/>
-              </a:rPr>
-              <a:t> hơn</a:t>
             </a:r>
             <a:endParaRPr lang="en-US" sz="2400" dirty="0"/>
           </a:p>
@@ -7491,26 +7425,15 @@
               <a:buChar char="•"/>
             </a:pPr>
             <a:r>
-              <a:rPr lang="en-US" sz="2400" dirty="0" spc="12" kern="0">
-                <a:solidFill>
-                  <a:srgbClr val="14161C"/>
-                </a:solidFill>
-                <a:latin typeface="Be Vietnam Pro" pitchFamily="34" charset="0"/>
-                <a:ea typeface="Be Vietnam Pro" pitchFamily="34" charset="-122"/>
-                <a:cs typeface="Be Vietnam Pro" pitchFamily="34" charset="-120"/>
-              </a:rPr>
-              <a:t>Mức</a:t>
-            </a:r>
-            <a:r>
-              <a:rPr lang="en-US" sz="2400" dirty="0" spc="3" kern="0">
-                <a:solidFill>
-                  <a:srgbClr val="14161C"/>
-                </a:solidFill>
-                <a:latin typeface="Be Vietnam Pro" pitchFamily="34" charset="0"/>
-                <a:ea typeface="Be Vietnam Pro" pitchFamily="34" charset="-122"/>
-                <a:cs typeface="Be Vietnam Pro" pitchFamily="34" charset="-120"/>
-              </a:rPr>
-              <a:t> dùng</a:t>
+              <a:rPr lang="en-US" sz="2400" dirty="0" spc="1" kern="0">
+                <a:solidFill>
+                  <a:srgbClr val="14161C"/>
+                </a:solidFill>
+                <a:latin typeface="Be Vietnam Pro" pitchFamily="34" charset="0"/>
+                <a:ea typeface="Be Vietnam Pro" pitchFamily="34" charset="-122"/>
+                <a:cs typeface="Be Vietnam Pro" pitchFamily="34" charset="-120"/>
+              </a:rPr>
+              <a:t>Đỉnh</a:t>
             </a:r>
             <a:r>
               <a:rPr lang="en-US" sz="2400" dirty="0" spc="-2" kern="0">
@@ -7535,37 +7458,26 @@
               <a:t> nhớ</a:t>
             </a:r>
             <a:r>
-              <a:rPr lang="en-US" sz="2400" dirty="0" spc="2" kern="0">
-                <a:solidFill>
-                  <a:srgbClr val="14161C"/>
-                </a:solidFill>
-                <a:latin typeface="Be Vietnam Pro" pitchFamily="34" charset="0"/>
-                <a:ea typeface="Be Vietnam Pro" pitchFamily="34" charset="-122"/>
-                <a:cs typeface="Be Vietnam Pro" pitchFamily="34" charset="-120"/>
-              </a:rPr>
-              <a:t> của mỗi</a:t>
-            </a:r>
-            <a:r>
-              <a:rPr lang="en-US" sz="2400" dirty="0" spc="-8" kern="0">
-                <a:solidFill>
-                  <a:srgbClr val="14161C"/>
-                </a:solidFill>
-                <a:latin typeface="Be Vietnam Pro" pitchFamily="34" charset="0"/>
-                <a:ea typeface="Be Vietnam Pro" pitchFamily="34" charset="-122"/>
-                <a:cs typeface="Be Vietnam Pro" pitchFamily="34" charset="-120"/>
-              </a:rPr>
-              <a:t> ngôn</a:t>
-            </a:r>
-            <a:r>
-              <a:rPr lang="en-US" sz="2400" dirty="0" spc="4" kern="0">
-                <a:solidFill>
-                  <a:srgbClr val="14161C"/>
-                </a:solidFill>
-                <a:latin typeface="Be Vietnam Pro" pitchFamily="34" charset="0"/>
-                <a:ea typeface="Be Vietnam Pro" pitchFamily="34" charset="-122"/>
-                <a:cs typeface="Be Vietnam Pro" pitchFamily="34" charset="-120"/>
-              </a:rPr>
-              <a:t> ngữ</a:t>
+              <a:rPr lang="en-US" sz="2400" dirty="0" spc="-2" kern="0">
+                <a:solidFill>
+                  <a:srgbClr val="14161C"/>
+                </a:solidFill>
+                <a:latin typeface="Be Vietnam Pro" pitchFamily="34" charset="0"/>
+                <a:ea typeface="Be Vietnam Pro" pitchFamily="34" charset="-122"/>
+                <a:cs typeface="Be Vietnam Pro" pitchFamily="34" charset="-120"/>
+              </a:rPr>
+              <a:t> khi</a:t>
+            </a:r>
+            <a:r>
+              <a:rPr lang="en-US" sz="2400" dirty="0" spc="-7" kern="0">
+                <a:solidFill>
+                  <a:srgbClr val="14161C"/>
+                </a:solidFill>
+                <a:latin typeface="Be Vietnam Pro" pitchFamily="34" charset="0"/>
+                <a:ea typeface="Be Vietnam Pro" pitchFamily="34" charset="-122"/>
+                <a:cs typeface="Be Vietnam Pro" pitchFamily="34" charset="-120"/>
+              </a:rPr>
+              <a:t> chạy</a:t>
             </a:r>
             <a:endParaRPr lang="en-US" sz="2400" dirty="0"/>
           </a:p>
@@ -7579,37 +7491,15 @@
               <a:buChar char="•"/>
             </a:pPr>
             <a:r>
-              <a:rPr lang="en-US" sz="2400" dirty="0" spc="1" kern="0">
-                <a:solidFill>
-                  <a:srgbClr val="14161C"/>
-                </a:solidFill>
-                <a:latin typeface="Be Vietnam Pro" pitchFamily="34" charset="0"/>
-                <a:ea typeface="Be Vietnam Pro" pitchFamily="34" charset="-122"/>
-                <a:cs typeface="Be Vietnam Pro" pitchFamily="34" charset="-120"/>
-              </a:rPr>
-              <a:t>Ảnh</a:t>
-            </a:r>
-            <a:r>
-              <a:rPr lang="en-US" sz="2400" dirty="0" spc="7" kern="0">
-                <a:solidFill>
-                  <a:srgbClr val="14161C"/>
-                </a:solidFill>
-                <a:latin typeface="Be Vietnam Pro" pitchFamily="34" charset="0"/>
-                <a:ea typeface="Be Vietnam Pro" pitchFamily="34" charset="-122"/>
-                <a:cs typeface="Be Vietnam Pro" pitchFamily="34" charset="-120"/>
-              </a:rPr>
-              <a:t> hưởng</a:t>
-            </a:r>
-            <a:r>
-              <a:rPr lang="en-US" sz="2400" dirty="0" spc="-12" kern="0">
-                <a:solidFill>
-                  <a:srgbClr val="14161C"/>
-                </a:solidFill>
-                <a:latin typeface="Be Vietnam Pro" pitchFamily="34" charset="0"/>
-                <a:ea typeface="Be Vietnam Pro" pitchFamily="34" charset="-122"/>
-                <a:cs typeface="Be Vietnam Pro" pitchFamily="34" charset="-120"/>
-              </a:rPr>
-              <a:t> tới</a:t>
+              <a:rPr lang="en-US" sz="2400" dirty="0" spc="-30" kern="0">
+                <a:solidFill>
+                  <a:srgbClr val="14161C"/>
+                </a:solidFill>
+                <a:latin typeface="Be Vietnam Pro" pitchFamily="34" charset="0"/>
+                <a:ea typeface="Be Vietnam Pro" pitchFamily="34" charset="-122"/>
+                <a:cs typeface="Be Vietnam Pro" pitchFamily="34" charset="-120"/>
+              </a:rPr>
+              <a:t>Luật</a:t>
             </a:r>
             <a:r>
               <a:rPr lang="en-US" sz="2400" dirty="0" spc="3" kern="0">
@@ -7620,29 +7510,7 @@
                 <a:ea typeface="Be Vietnam Pro" pitchFamily="34" charset="-122"/>
                 <a:cs typeface="Be Vietnam Pro" pitchFamily="34" charset="-120"/>
               </a:rPr>
-              <a:t> năng</a:t>
-            </a:r>
-            <a:r>
-              <a:rPr lang="en-US" sz="2400" dirty="0" spc="7" kern="0">
-                <a:solidFill>
-                  <a:srgbClr val="14161C"/>
-                </a:solidFill>
-                <a:latin typeface="Be Vietnam Pro" pitchFamily="34" charset="0"/>
-                <a:ea typeface="Be Vietnam Pro" pitchFamily="34" charset="-122"/>
-                <a:cs typeface="Be Vietnam Pro" pitchFamily="34" charset="-120"/>
-              </a:rPr>
-              <a:t> lượng</a:t>
-            </a:r>
-            <a:r>
-              <a:rPr lang="en-US" sz="2400" dirty="0" spc="-1" kern="0">
-                <a:solidFill>
-                  <a:srgbClr val="14161C"/>
-                </a:solidFill>
-                <a:latin typeface="Be Vietnam Pro" pitchFamily="34" charset="0"/>
-                <a:ea typeface="Be Vietnam Pro" pitchFamily="34" charset="-122"/>
-                <a:cs typeface="Be Vietnam Pro" pitchFamily="34" charset="-120"/>
-              </a:rPr>
-              <a:t> tiêu</a:t>
+              <a:t> mem</a:t>
             </a:r>
             <a:r>
               <a:rPr lang="en-US" sz="2400" dirty="0" spc="2" kern="0">
@@ -7653,7 +7521,18 @@
                 <a:ea typeface="Be Vietnam Pro" pitchFamily="34" charset="-122"/>
                 <a:cs typeface="Be Vietnam Pro" pitchFamily="34" charset="-120"/>
               </a:rPr>
-              <a:t> thụ</a:t>
+              <a:t> của</a:t>
+            </a:r>
+            <a:r>
+              <a:rPr lang="en-US" sz="2400" dirty="0" spc="-11" kern="0">
+                <a:solidFill>
+                  <a:srgbClr val="14161C"/>
+                </a:solidFill>
+                <a:latin typeface="Be Vietnam Pro" pitchFamily="34" charset="0"/>
+                <a:ea typeface="Be Vietnam Pro" pitchFamily="34" charset="-122"/>
+                <a:cs typeface="Be Vietnam Pro" pitchFamily="34" charset="-120"/>
+              </a:rPr>
+              <a:t> Makefile</a:t>
             </a:r>
             <a:endParaRPr lang="en-US" sz="2400" dirty="0"/>
           </a:p>
@@ -8369,6 +8248,17 @@
               <a:buChar char="•"/>
             </a:pPr>
             <a:r>
+              <a:rPr lang="en-US" sz="2400" dirty="0" spc="-1" kern="0">
+                <a:solidFill>
+                  <a:srgbClr val="14161C"/>
+                </a:solidFill>
+                <a:latin typeface="Be Vietnam Pro" pitchFamily="34" charset="0"/>
+                <a:ea typeface="Be Vietnam Pro" pitchFamily="34" charset="-122"/>
+                <a:cs typeface="Be Vietnam Pro" pitchFamily="34" charset="-120"/>
+              </a:rPr>
+              <a:t>Tính</a:t>
+            </a:r>
+            <a:r>
               <a:rPr lang="en-US" sz="2400" dirty="0" spc="1" kern="0">
                 <a:solidFill>
                   <a:srgbClr val="14161C"/>
@@ -8377,62 +8267,18 @@
                 <a:ea typeface="Be Vietnam Pro" pitchFamily="34" charset="-122"/>
                 <a:cs typeface="Be Vietnam Pro" pitchFamily="34" charset="-120"/>
               </a:rPr>
-              <a:t>Năng</a:t>
-            </a:r>
-            <a:r>
-              <a:rPr lang="en-US" sz="2400" dirty="0" spc="7" kern="0">
-                <a:solidFill>
-                  <a:srgbClr val="14161C"/>
-                </a:solidFill>
-                <a:latin typeface="Be Vietnam Pro" pitchFamily="34" charset="0"/>
-                <a:ea typeface="Be Vietnam Pro" pitchFamily="34" charset="-122"/>
-                <a:cs typeface="Be Vietnam Pro" pitchFamily="34" charset="-120"/>
-              </a:rPr>
-              <a:t> lượng</a:t>
-            </a:r>
-            <a:r>
-              <a:rPr lang="en-US" sz="2400" dirty="0" spc="-1" kern="0">
-                <a:solidFill>
-                  <a:srgbClr val="14161C"/>
-                </a:solidFill>
-                <a:latin typeface="Be Vietnam Pro" pitchFamily="34" charset="0"/>
-                <a:ea typeface="Be Vietnam Pro" pitchFamily="34" charset="-122"/>
-                <a:cs typeface="Be Vietnam Pro" pitchFamily="34" charset="-120"/>
-              </a:rPr>
-              <a:t> tiêu</a:t>
-            </a:r>
-            <a:r>
-              <a:rPr lang="en-US" sz="2400" dirty="0" spc="2" kern="0">
-                <a:solidFill>
-                  <a:srgbClr val="14161C"/>
-                </a:solidFill>
-                <a:latin typeface="Be Vietnam Pro" pitchFamily="34" charset="0"/>
-                <a:ea typeface="Be Vietnam Pro" pitchFamily="34" charset="-122"/>
-                <a:cs typeface="Be Vietnam Pro" pitchFamily="34" charset="-120"/>
-              </a:rPr>
-              <a:t> thụ của mỗi</a:t>
-            </a:r>
-            <a:r>
-              <a:rPr lang="en-US" sz="2400" dirty="0" spc="-8" kern="0">
-                <a:solidFill>
-                  <a:srgbClr val="14161C"/>
-                </a:solidFill>
-                <a:latin typeface="Be Vietnam Pro" pitchFamily="34" charset="0"/>
-                <a:ea typeface="Be Vietnam Pro" pitchFamily="34" charset="-122"/>
-                <a:cs typeface="Be Vietnam Pro" pitchFamily="34" charset="-120"/>
-              </a:rPr>
-              <a:t> ngôn</a:t>
-            </a:r>
-            <a:r>
-              <a:rPr lang="en-US" sz="2400" dirty="0" spc="4" kern="0">
-                <a:solidFill>
-                  <a:srgbClr val="14161C"/>
-                </a:solidFill>
-                <a:latin typeface="Be Vietnam Pro" pitchFamily="34" charset="0"/>
-                <a:ea typeface="Be Vietnam Pro" pitchFamily="34" charset="-122"/>
-                <a:cs typeface="Be Vietnam Pro" pitchFamily="34" charset="-120"/>
-              </a:rPr>
-              <a:t> ngữ</a:t>
+              <a:t> bằng</a:t>
+            </a:r>
+            <a:r>
+              <a:rPr lang="en-US" sz="2400" dirty="0" spc="-9" kern="0">
+                <a:solidFill>
+                  <a:srgbClr val="14161C"/>
+                </a:solidFill>
+                <a:latin typeface="Be Vietnam Pro" pitchFamily="34" charset="0"/>
+                <a:ea typeface="Be Vietnam Pro" pitchFamily="34" charset="-122"/>
+                <a:cs typeface="Be Vietnam Pro" pitchFamily="34" charset="-120"/>
+              </a:rPr>
+              <a:t> joule</a:t>
             </a:r>
             <a:endParaRPr lang="en-US" sz="2400" dirty="0"/>
           </a:p>
@@ -8446,15 +8292,15 @@
               <a:buChar char="•"/>
             </a:pPr>
             <a:r>
-              <a:rPr lang="en-US" sz="2400" dirty="0" spc="-1" kern="0">
-                <a:solidFill>
-                  <a:srgbClr val="14161C"/>
-                </a:solidFill>
-                <a:latin typeface="Be Vietnam Pro" pitchFamily="34" charset="0"/>
-                <a:ea typeface="Be Vietnam Pro" pitchFamily="34" charset="-122"/>
-                <a:cs typeface="Be Vietnam Pro" pitchFamily="34" charset="-120"/>
-              </a:rPr>
-              <a:t>Mối</a:t>
+              <a:rPr lang="en-US" sz="2400" dirty="0" spc="4" kern="0">
+                <a:solidFill>
+                  <a:srgbClr val="14161C"/>
+                </a:solidFill>
+                <a:latin typeface="Be Vietnam Pro" pitchFamily="34" charset="0"/>
+                <a:ea typeface="Be Vietnam Pro" pitchFamily="34" charset="-122"/>
+                <a:cs typeface="Be Vietnam Pro" pitchFamily="34" charset="-120"/>
+              </a:rPr>
+              <a:t>Đo</a:t>
             </a:r>
             <a:r>
               <a:rPr lang="en-US" sz="2400" dirty="0" spc="0" kern="0">
@@ -8465,62 +8311,7 @@
                 <a:ea typeface="Be Vietnam Pro" pitchFamily="34" charset="-122"/>
                 <a:cs typeface="Be Vietnam Pro" pitchFamily="34" charset="-120"/>
               </a:rPr>
-              <a:t> quan</a:t>
-            </a:r>
-            <a:r>
-              <a:rPr lang="en-US" sz="2400" dirty="0" spc="-8" kern="0">
-                <a:solidFill>
-                  <a:srgbClr val="14161C"/>
-                </a:solidFill>
-                <a:latin typeface="Be Vietnam Pro" pitchFamily="34" charset="0"/>
-                <a:ea typeface="Be Vietnam Pro" pitchFamily="34" charset="-122"/>
-                <a:cs typeface="Be Vietnam Pro" pitchFamily="34" charset="-120"/>
-              </a:rPr>
-              <a:t> tâm</a:t>
-            </a:r>
-            <a:r>
-              <a:rPr lang="en-US" sz="2400" dirty="0" spc="-2" kern="0">
-                <a:solidFill>
-                  <a:srgbClr val="14161C"/>
-                </a:solidFill>
-                <a:latin typeface="Be Vietnam Pro" pitchFamily="34" charset="0"/>
-                <a:ea typeface="Be Vietnam Pro" pitchFamily="34" charset="-122"/>
-                <a:cs typeface="Be Vietnam Pro" pitchFamily="34" charset="-120"/>
-              </a:rPr>
-              <a:t> khi</a:t>
-            </a:r>
-            <a:r>
-              <a:rPr lang="en-US" sz="2400" dirty="0" spc="0" kern="0">
-                <a:solidFill>
-                  <a:srgbClr val="14161C"/>
-                </a:solidFill>
-                <a:latin typeface="Be Vietnam Pro" pitchFamily="34" charset="0"/>
-                <a:ea typeface="Be Vietnam Pro" pitchFamily="34" charset="-122"/>
-                <a:cs typeface="Be Vietnam Pro" pitchFamily="34" charset="-120"/>
-              </a:rPr>
-              <a:t> chọn</a:t>
-            </a:r>
-            <a:r>
-              <a:rPr lang="en-US" sz="2400" dirty="0" spc="-7" kern="0">
-                <a:solidFill>
-                  <a:srgbClr val="14161C"/>
-                </a:solidFill>
-                <a:latin typeface="Be Vietnam Pro" pitchFamily="34" charset="0"/>
-                <a:ea typeface="Be Vietnam Pro" pitchFamily="34" charset="-122"/>
-                <a:cs typeface="Be Vietnam Pro" pitchFamily="34" charset="-120"/>
-              </a:rPr>
-              <a:t> ngôn</a:t>
-            </a:r>
-            <a:r>
-              <a:rPr lang="en-US" sz="2400" dirty="0" spc="3" kern="0">
-                <a:solidFill>
-                  <a:srgbClr val="14161C"/>
-                </a:solidFill>
-                <a:latin typeface="Be Vietnam Pro" pitchFamily="34" charset="0"/>
-                <a:ea typeface="Be Vietnam Pro" pitchFamily="34" charset="-122"/>
-                <a:cs typeface="Be Vietnam Pro" pitchFamily="34" charset="-120"/>
-              </a:rPr>
-              <a:t> ngữ</a:t>
+              <a:t> bằng khung RAPL</a:t>
             </a:r>
             <a:endParaRPr lang="en-US" sz="2400" dirty="0"/>
           </a:p>
@@ -8630,6 +8421,28 @@
               <a:buNone/>
             </a:pPr>
             <a:r>
+              <a:rPr lang="en-US" sz="1950" b="1" spc="223" kern="0" dirty="0">
+                <a:solidFill>
+                  <a:srgbClr val="FF6A4D"/>
+                </a:solidFill>
+                <a:latin typeface="Be Vietnam Pro" pitchFamily="34" charset="0"/>
+                <a:ea typeface="Be Vietnam Pro" pitchFamily="34" charset="-122"/>
+                <a:cs typeface="Be Vietnam Pro" pitchFamily="34" charset="-120"/>
+              </a:rPr>
+              <a:t>KẾT</a:t>
+            </a:r>
+            <a:r>
+              <a:rPr lang="en-US" sz="1950" b="1" spc="213" kern="0" dirty="0">
+                <a:solidFill>
+                  <a:srgbClr val="FF6A4D"/>
+                </a:solidFill>
+                <a:latin typeface="Be Vietnam Pro" pitchFamily="34" charset="0"/>
+                <a:ea typeface="Be Vietnam Pro" pitchFamily="34" charset="-122"/>
+                <a:cs typeface="Be Vietnam Pro" pitchFamily="34" charset="-120"/>
+              </a:rPr>
+              <a:t> QUẢ</a:t>
+            </a:r>
+            <a:r>
               <a:rPr lang="en-US" sz="1950" b="1" spc="226" kern="0" dirty="0">
                 <a:solidFill>
                   <a:srgbClr val="FF6A4D"/>
@@ -8638,10 +8451,10 @@
                 <a:ea typeface="Be Vietnam Pro" pitchFamily="34" charset="-122"/>
                 <a:cs typeface="Be Vietnam Pro" pitchFamily="34" charset="-120"/>
               </a:rPr>
-              <a:t>ĐIỀU</a:t>
-            </a:r>
-            <a:r>
-              <a:rPr lang="en-US" sz="1950" b="1" spc="202" kern="0" dirty="0">
+              <a:t> ĐƯỢC GHI</a:t>
+            </a:r>
+            <a:r>
+              <a:rPr lang="en-US" sz="1950" b="1" spc="225" kern="0" dirty="0">
                 <a:solidFill>
                   <a:srgbClr val="FF6A4D"/>
                 </a:solidFill>
@@ -8649,29 +8462,7 @@
                 <a:ea typeface="Be Vietnam Pro" pitchFamily="34" charset="-122"/>
                 <a:cs typeface="Be Vietnam Pro" pitchFamily="34" charset="-120"/>
               </a:rPr>
-              <a:t> TÓM</a:t>
-            </a:r>
-            <a:r>
-              <a:rPr lang="en-US" sz="1950" b="1" spc="127" kern="0" dirty="0">
-                <a:solidFill>
-                  <a:srgbClr val="FF6A4D"/>
-                </a:solidFill>
-                <a:latin typeface="Be Vietnam Pro" pitchFamily="34" charset="0"/>
-                <a:ea typeface="Be Vietnam Pro" pitchFamily="34" charset="-122"/>
-                <a:cs typeface="Be Vietnam Pro" pitchFamily="34" charset="-120"/>
-              </a:rPr>
-              <a:t> TẮT</a:t>
-            </a:r>
-            <a:r>
-              <a:rPr lang="en-US" sz="1950" b="1" spc="224" kern="0" dirty="0">
-                <a:solidFill>
-                  <a:srgbClr val="FF6A4D"/>
-                </a:solidFill>
-                <a:latin typeface="Be Vietnam Pro" pitchFamily="34" charset="0"/>
-                <a:ea typeface="Be Vietnam Pro" pitchFamily="34" charset="-122"/>
-                <a:cs typeface="Be Vietnam Pro" pitchFamily="34" charset="-120"/>
-              </a:rPr>
-              <a:t> NÊU</a:t>
+              <a:t> RA</a:t>
             </a:r>
             <a:endParaRPr lang="en-US" sz="1950" dirty="0"/>
           </a:p>
@@ -8702,7 +8493,7 @@
               <a:buNone/>
             </a:pPr>
             <a:r>
-              <a:rPr lang="en-US" sz="7200" dirty="0" spc="0" kern="0">
+              <a:rPr lang="en-US" sz="7200" dirty="0" spc="-14" kern="0">
                 <a:solidFill>
                   <a:srgbClr val="F3EEE3"/>
                 </a:solidFill>
@@ -8710,10 +8501,10 @@
                 <a:ea typeface="Bricolage Grotesque ExtraBold" pitchFamily="34" charset="-122"/>
                 <a:cs typeface="Bricolage Grotesque ExtraBold" pitchFamily="34" charset="-120"/>
               </a:rPr>
-              <a:t>Ba</a:t>
-            </a:r>
-            <a:r>
-              <a:rPr lang="en-US" sz="7200" dirty="0" spc="2" kern="0">
+              <a:t>Một</a:t>
+            </a:r>
+            <a:r>
+              <a:rPr lang="en-US" sz="7200" dirty="0" spc="-2" kern="0">
                 <a:solidFill>
                   <a:srgbClr val="F3EEE3"/>
                 </a:solidFill>
@@ -8721,10 +8512,10 @@
                 <a:ea typeface="Bricolage Grotesque ExtraBold" pitchFamily="34" charset="-122"/>
                 <a:cs typeface="Bricolage Grotesque ExtraBold" pitchFamily="34" charset="-120"/>
               </a:rPr>
-              <a:t> ý</a:t>
-            </a:r>
-            <a:r>
-              <a:rPr lang="en-US" sz="7200" dirty="0" spc="-15" kern="0">
+              <a:t> dòng</a:t>
+            </a:r>
+            <a:r>
+              <a:rPr lang="en-US" sz="7200" dirty="0" spc="-42" kern="0">
                 <a:solidFill>
                   <a:srgbClr val="F3EEE3"/>
                 </a:solidFill>
@@ -8732,16 +8523,10 @@
                 <a:ea typeface="Bricolage Grotesque ExtraBold" pitchFamily="34" charset="-122"/>
                 <a:cs typeface="Bricolage Grotesque ExtraBold" pitchFamily="34" charset="-120"/>
               </a:rPr>
-              <a:t> trong</a:t>
-            </a:r>
-            <a:endParaRPr lang="en-US" sz="7200" dirty="0"/>
-          </a:p>
-          <a:p>
-            <a:pPr algn="l" indent="0" marL="0">
-              <a:buNone/>
-            </a:pPr>
-            <a:r>
-              <a:rPr lang="en-US" sz="7200" dirty="0" spc="0" kern="0">
+              <a:t> kết</a:t>
+            </a:r>
+            <a:r>
+              <a:rPr lang="en-US" sz="7200" dirty="0" spc="-3" kern="0">
                 <a:solidFill>
                   <a:srgbClr val="F3EEE3"/>
                 </a:solidFill>
@@ -8749,29 +8534,7 @@
                 <a:ea typeface="Bricolage Grotesque ExtraBold" pitchFamily="34" charset="-122"/>
                 <a:cs typeface="Bricolage Grotesque ExtraBold" pitchFamily="34" charset="-120"/>
               </a:rPr>
-              <a:t>phần</a:t>
-            </a:r>
-            <a:r>
-              <a:rPr lang="en-US" sz="7200" dirty="0" spc="-33" kern="0">
-                <a:solidFill>
-                  <a:srgbClr val="F3EEE3"/>
-                </a:solidFill>
-                <a:latin typeface="Bricolage Grotesque ExtraBold" pitchFamily="34" charset="0"/>
-                <a:ea typeface="Bricolage Grotesque ExtraBold" pitchFamily="34" charset="-122"/>
-                <a:cs typeface="Bricolage Grotesque ExtraBold" pitchFamily="34" charset="-120"/>
-              </a:rPr>
-              <a:t> tóm</a:t>
-            </a:r>
-            <a:r>
-              <a:rPr lang="en-US" sz="7200" dirty="0" spc="-7" kern="0">
-                <a:solidFill>
-                  <a:srgbClr val="F3EEE3"/>
-                </a:solidFill>
-                <a:latin typeface="Bricolage Grotesque ExtraBold" pitchFamily="34" charset="0"/>
-                <a:ea typeface="Bricolage Grotesque ExtraBold" pitchFamily="34" charset="-122"/>
-                <a:cs typeface="Bricolage Grotesque ExtraBold" pitchFamily="34" charset="-120"/>
-              </a:rPr>
-              <a:t> tắt</a:t>
+              <a:t> quả</a:t>
             </a:r>
             <a:endParaRPr lang="en-US" sz="7200" dirty="0"/>
           </a:p>
@@ -8805,7 +8568,7 @@
               <a:buNone/>
             </a:pPr>
             <a:r>
-              <a:rPr lang="en-US" sz="2700" dirty="0" spc="-4" kern="0">
+              <a:rPr lang="en-US" sz="2700" dirty="0" spc="0" kern="0">
                 <a:solidFill>
                   <a:srgbClr val="C4C8D6"/>
                 </a:solidFill>
@@ -8813,7 +8576,95 @@
                 <a:ea typeface="Be Vietnam Pro" pitchFamily="34" charset="-122"/>
                 <a:cs typeface="Be Vietnam Pro" pitchFamily="34" charset="-120"/>
               </a:rPr>
-              <a:t>Đoạn</a:t>
+              <a:t>Mỗi</a:t>
+            </a:r>
+            <a:r>
+              <a:rPr lang="en-US" sz="2700" dirty="0" spc="-13" kern="0">
+                <a:solidFill>
+                  <a:srgbClr val="C4C8D6"/>
+                </a:solidFill>
+                <a:latin typeface="Be Vietnam Pro" pitchFamily="34" charset="0"/>
+                <a:ea typeface="Be Vietnam Pro" pitchFamily="34" charset="-122"/>
+                <a:cs typeface="Be Vietnam Pro" pitchFamily="34" charset="-120"/>
+              </a:rPr>
+              <a:t> ngôn</a:t>
+            </a:r>
+            <a:r>
+              <a:rPr lang="en-US" sz="2700" dirty="0" spc="-3" kern="0">
+                <a:solidFill>
+                  <a:srgbClr val="C4C8D6"/>
+                </a:solidFill>
+                <a:latin typeface="Be Vietnam Pro" pitchFamily="34" charset="0"/>
+                <a:ea typeface="Be Vietnam Pro" pitchFamily="34" charset="-122"/>
+                <a:cs typeface="Be Vietnam Pro" pitchFamily="34" charset="-120"/>
+              </a:rPr>
+              <a:t> ngữ</a:t>
+            </a:r>
+            <a:r>
+              <a:rPr lang="en-US" sz="2700" dirty="0" spc="-8" kern="0">
+                <a:solidFill>
+                  <a:srgbClr val="C4C8D6"/>
+                </a:solidFill>
+                <a:latin typeface="Be Vietnam Pro" pitchFamily="34" charset="0"/>
+                <a:ea typeface="Be Vietnam Pro" pitchFamily="34" charset="-122"/>
+                <a:cs typeface="Be Vietnam Pro" pitchFamily="34" charset="-120"/>
+              </a:rPr>
+              <a:t> một</a:t>
+            </a:r>
+            <a:r>
+              <a:rPr lang="en-US" sz="2700" dirty="0" spc="-15" kern="0">
+                <a:solidFill>
+                  <a:srgbClr val="C4C8D6"/>
+                </a:solidFill>
+                <a:latin typeface="Be Vietnam Pro" pitchFamily="34" charset="0"/>
+                <a:ea typeface="Be Vietnam Pro" pitchFamily="34" charset="-122"/>
+                <a:cs typeface="Be Vietnam Pro" pitchFamily="34" charset="-120"/>
+              </a:rPr>
+              <a:t> tệp</a:t>
+            </a:r>
+            <a:r>
+              <a:rPr lang="en-US" sz="2700" dirty="0" spc="-38" kern="0">
+                <a:solidFill>
+                  <a:srgbClr val="C4C8D6"/>
+                </a:solidFill>
+                <a:latin typeface="Be Vietnam Pro" pitchFamily="34" charset="0"/>
+                <a:ea typeface="Be Vietnam Pro" pitchFamily="34" charset="-122"/>
+                <a:cs typeface="Be Vietnam Pro" pitchFamily="34" charset="-120"/>
+              </a:rPr>
+              <a:t> kết</a:t>
+            </a:r>
+            <a:r>
+              <a:rPr lang="en-US" sz="2700" dirty="0" spc="0" kern="0">
+                <a:solidFill>
+                  <a:srgbClr val="C4C8D6"/>
+                </a:solidFill>
+                <a:latin typeface="Be Vietnam Pro" pitchFamily="34" charset="0"/>
+                <a:ea typeface="Be Vietnam Pro" pitchFamily="34" charset="-122"/>
+                <a:cs typeface="Be Vietnam Pro" pitchFamily="34" charset="-120"/>
+              </a:rPr>
+              <a:t> quả,</a:t>
+            </a:r>
+            <a:r>
+              <a:rPr lang="en-US" sz="2700" dirty="0" spc="-1" kern="0">
+                <a:solidFill>
+                  <a:srgbClr val="C4C8D6"/>
+                </a:solidFill>
+                <a:latin typeface="Be Vietnam Pro" pitchFamily="34" charset="0"/>
+                <a:ea typeface="Be Vietnam Pro" pitchFamily="34" charset="-122"/>
+                <a:cs typeface="Be Vietnam Pro" pitchFamily="34" charset="-120"/>
+              </a:rPr>
+              <a:t> mỗi</a:t>
+            </a:r>
+            <a:r>
+              <a:rPr lang="en-US" sz="2700" dirty="0" spc="-5" kern="0">
+                <a:solidFill>
+                  <a:srgbClr val="C4C8D6"/>
+                </a:solidFill>
+                <a:latin typeface="Be Vietnam Pro" pitchFamily="34" charset="0"/>
+                <a:ea typeface="Be Vietnam Pro" pitchFamily="34" charset="-122"/>
+                <a:cs typeface="Be Vietnam Pro" pitchFamily="34" charset="-120"/>
+              </a:rPr>
+              <a:t> bài</a:t>
             </a:r>
             <a:r>
               <a:rPr lang="en-US" sz="2700" dirty="0" spc="-14" kern="0">
@@ -8824,10 +8675,10 @@
                 <a:ea typeface="Be Vietnam Pro" pitchFamily="34" charset="-122"/>
                 <a:cs typeface="Be Vietnam Pro" pitchFamily="34" charset="-120"/>
               </a:rPr>
-              <a:t> tóm</a:t>
-            </a:r>
-            <a:r>
-              <a:rPr lang="en-US" sz="2700" dirty="0" spc="-25" kern="0">
+              <a:t> toán</a:t>
+            </a:r>
+            <a:r>
+              <a:rPr lang="en-US" sz="2700" dirty="0" spc="-8" kern="0">
                 <a:solidFill>
                   <a:srgbClr val="C4C8D6"/>
                 </a:solidFill>
@@ -8835,10 +8686,10 @@
                 <a:ea typeface="Be Vietnam Pro" pitchFamily="34" charset="-122"/>
                 <a:cs typeface="Be Vietnam Pro" pitchFamily="34" charset="-120"/>
               </a:rPr>
-              <a:t> tắt</a:t>
-            </a:r>
-            <a:r>
-              <a:rPr lang="en-US" sz="2700" dirty="0" spc="-45" kern="0">
+              <a:t> một</a:t>
+            </a:r>
+            <a:r>
+              <a:rPr lang="en-US" sz="2700" dirty="0" spc="-2" kern="0">
                 <a:solidFill>
                   <a:srgbClr val="C4C8D6"/>
                 </a:solidFill>
@@ -8846,84 +8697,7 @@
                 <a:ea typeface="Be Vietnam Pro" pitchFamily="34" charset="-122"/>
                 <a:cs typeface="Be Vietnam Pro" pitchFamily="34" charset="-120"/>
               </a:rPr>
-              <a:t> kể</a:t>
-            </a:r>
-            <a:r>
-              <a:rPr lang="en-US" sz="2700" dirty="0" spc="15" kern="0">
-                <a:solidFill>
-                  <a:srgbClr val="C4C8D6"/>
-                </a:solidFill>
-                <a:latin typeface="Be Vietnam Pro" pitchFamily="34" charset="0"/>
-                <a:ea typeface="Be Vietnam Pro" pitchFamily="34" charset="-122"/>
-                <a:cs typeface="Be Vietnam Pro" pitchFamily="34" charset="-120"/>
-              </a:rPr>
-              <a:t> những</a:t>
-            </a:r>
-            <a:r>
-              <a:rPr lang="en-US" sz="2700" dirty="0" spc="-10" kern="0">
-                <a:solidFill>
-                  <a:srgbClr val="C4C8D6"/>
-                </a:solidFill>
-                <a:latin typeface="Be Vietnam Pro" pitchFamily="34" charset="0"/>
-                <a:ea typeface="Be Vietnam Pro" pitchFamily="34" charset="-122"/>
-                <a:cs typeface="Be Vietnam Pro" pitchFamily="34" charset="-120"/>
-              </a:rPr>
-              <a:t> phát</a:t>
-            </a:r>
-            <a:r>
-              <a:rPr lang="en-US" sz="2700" dirty="0" spc="-3" kern="0">
-                <a:solidFill>
-                  <a:srgbClr val="C4C8D6"/>
-                </a:solidFill>
-                <a:latin typeface="Be Vietnam Pro" pitchFamily="34" charset="0"/>
-                <a:ea typeface="Be Vietnam Pro" pitchFamily="34" charset="-122"/>
-                <a:cs typeface="Be Vietnam Pro" pitchFamily="34" charset="-120"/>
-              </a:rPr>
-              <a:t> hiện</a:t>
-            </a:r>
-            <a:r>
-              <a:rPr lang="en-US" sz="2700" dirty="0" spc="-1" kern="0">
-                <a:solidFill>
-                  <a:srgbClr val="C4C8D6"/>
-                </a:solidFill>
-                <a:latin typeface="Be Vietnam Pro" pitchFamily="34" charset="0"/>
-                <a:ea typeface="Be Vietnam Pro" pitchFamily="34" charset="-122"/>
-                <a:cs typeface="Be Vietnam Pro" pitchFamily="34" charset="-120"/>
-              </a:rPr>
-              <a:t> thú vị</a:t>
-            </a:r>
-            <a:r>
-              <a:rPr lang="en-US" sz="2700" dirty="0" spc="-2" kern="0">
-                <a:solidFill>
-                  <a:srgbClr val="C4C8D6"/>
-                </a:solidFill>
-                <a:latin typeface="Be Vietnam Pro" pitchFamily="34" charset="0"/>
-                <a:ea typeface="Be Vietnam Pro" pitchFamily="34" charset="-122"/>
-                <a:cs typeface="Be Vietnam Pro" pitchFamily="34" charset="-120"/>
-              </a:rPr>
-              <a:t> của</a:t>
-            </a:r>
-            <a:r>
-              <a:rPr lang="en-US" sz="2700" dirty="0" spc="-3" kern="0">
-                <a:solidFill>
-                  <a:srgbClr val="C4C8D6"/>
-                </a:solidFill>
-                <a:latin typeface="Be Vietnam Pro" pitchFamily="34" charset="0"/>
-                <a:ea typeface="Be Vietnam Pro" pitchFamily="34" charset="-122"/>
-                <a:cs typeface="Be Vietnam Pro" pitchFamily="34" charset="-120"/>
-              </a:rPr>
-              <a:t> nghiên</a:t>
-            </a:r>
-            <a:r>
-              <a:rPr lang="en-US" sz="2700" dirty="0" spc="16" kern="0">
-                <a:solidFill>
-                  <a:srgbClr val="C4C8D6"/>
-                </a:solidFill>
-                <a:latin typeface="Be Vietnam Pro" pitchFamily="34" charset="0"/>
-                <a:ea typeface="Be Vietnam Pro" pitchFamily="34" charset="-122"/>
-                <a:cs typeface="Be Vietnam Pro" pitchFamily="34" charset="-120"/>
-              </a:rPr>
-              <a:t> cứu.</a:t>
+              <a:t> dòng.</a:t>
             </a:r>
             <a:endParaRPr lang="en-US" sz="2700" dirty="0"/>
           </a:p>
@@ -9029,7 +8803,7 @@
               <a:buNone/>
             </a:pPr>
             <a:r>
-              <a:rPr lang="en-US" sz="2700" dirty="0" spc="-1" kern="0">
+              <a:rPr lang="en-US" sz="2700" dirty="0" spc="-7" kern="0">
                 <a:solidFill>
                   <a:srgbClr val="F3EEE3"/>
                 </a:solidFill>
@@ -9037,10 +8811,10 @@
                 <a:ea typeface="Be Vietnam Pro" pitchFamily="34" charset="-122"/>
                 <a:cs typeface="Be Vietnam Pro" pitchFamily="34" charset="-120"/>
               </a:rPr>
-              <a:t>Nhanh</a:t>
-            </a:r>
-            <a:r>
-              <a:rPr lang="en-US" sz="2700" dirty="0" spc="-13" kern="0">
+              <a:t>Một</a:t>
+            </a:r>
+            <a:r>
+              <a:rPr lang="en-US" sz="2700" dirty="0" spc="-2" kern="0">
                 <a:solidFill>
                   <a:srgbClr val="F3EEE3"/>
                 </a:solidFill>
@@ -9048,7 +8822,73 @@
                 <a:ea typeface="Be Vietnam Pro" pitchFamily="34" charset="-122"/>
                 <a:cs typeface="Be Vietnam Pro" pitchFamily="34" charset="-120"/>
               </a:rPr>
-              <a:t> hay</a:t>
+              <a:t> dòng</a:t>
+            </a:r>
+            <a:r>
+              <a:rPr lang="en-US" sz="2700" dirty="0" spc="-16" kern="0">
+                <a:solidFill>
+                  <a:srgbClr val="F3EEE3"/>
+                </a:solidFill>
+                <a:latin typeface="Be Vietnam Pro" pitchFamily="34" charset="0"/>
+                <a:ea typeface="Be Vietnam Pro" pitchFamily="34" charset="-122"/>
+                <a:cs typeface="Be Vietnam Pro" pitchFamily="34" charset="-120"/>
+              </a:rPr>
+              <a:t> gồm</a:t>
+            </a:r>
+            <a:r>
+              <a:rPr lang="en-US" sz="2700" dirty="0" spc="-15" kern="0">
+                <a:solidFill>
+                  <a:srgbClr val="F3EEE3"/>
+                </a:solidFill>
+                <a:latin typeface="Be Vietnam Pro" pitchFamily="34" charset="0"/>
+                <a:ea typeface="Be Vietnam Pro" pitchFamily="34" charset="-122"/>
+                <a:cs typeface="Be Vietnam Pro" pitchFamily="34" charset="-120"/>
+              </a:rPr>
+              <a:t> tên</a:t>
+            </a:r>
+            <a:r>
+              <a:rPr lang="en-US" sz="2700" dirty="0" spc="-3" kern="0">
+                <a:solidFill>
+                  <a:srgbClr val="F3EEE3"/>
+                </a:solidFill>
+                <a:latin typeface="Be Vietnam Pro" pitchFamily="34" charset="0"/>
+                <a:ea typeface="Be Vietnam Pro" pitchFamily="34" charset="-122"/>
+                <a:cs typeface="Be Vietnam Pro" pitchFamily="34" charset="-120"/>
+              </a:rPr>
+              <a:t> bài,</a:t>
+            </a:r>
+            <a:r>
+              <a:rPr lang="en-US" sz="2700" dirty="0" spc="-2" kern="0">
+                <a:solidFill>
+                  <a:srgbClr val="F3EEE3"/>
+                </a:solidFill>
+                <a:latin typeface="Be Vietnam Pro" pitchFamily="34" charset="0"/>
+                <a:ea typeface="Be Vietnam Pro" pitchFamily="34" charset="-122"/>
+                <a:cs typeface="Be Vietnam Pro" pitchFamily="34" charset="-120"/>
+              </a:rPr>
+              <a:t> năng</a:t>
+            </a:r>
+            <a:r>
+              <a:rPr lang="en-US" sz="2700" dirty="0" spc="6" kern="0">
+                <a:solidFill>
+                  <a:srgbClr val="F3EEE3"/>
+                </a:solidFill>
+                <a:latin typeface="Be Vietnam Pro" pitchFamily="34" charset="0"/>
+                <a:ea typeface="Be Vietnam Pro" pitchFamily="34" charset="-122"/>
+                <a:cs typeface="Be Vietnam Pro" pitchFamily="34" charset="-120"/>
+              </a:rPr>
+              <a:t> lượng</a:t>
+            </a:r>
+            <a:r>
+              <a:rPr lang="en-US" sz="2700" dirty="0" spc="-17" kern="0">
+                <a:solidFill>
+                  <a:srgbClr val="F3EEE3"/>
+                </a:solidFill>
+                <a:latin typeface="Be Vietnam Pro" pitchFamily="34" charset="0"/>
+                <a:ea typeface="Be Vietnam Pro" pitchFamily="34" charset="-122"/>
+                <a:cs typeface="Be Vietnam Pro" pitchFamily="34" charset="-120"/>
+              </a:rPr>
+              <a:t> và</a:t>
             </a:r>
             <a:r>
               <a:rPr lang="en-US" sz="2700" dirty="0" spc="0" kern="0">
@@ -9059,10 +8899,10 @@
                 <a:ea typeface="Be Vietnam Pro" pitchFamily="34" charset="-122"/>
                 <a:cs typeface="Be Vietnam Pro" pitchFamily="34" charset="-120"/>
               </a:rPr>
-              <a:t> chậm</a:t>
-            </a:r>
-            <a:r>
-              <a:rPr lang="en-US" sz="2700" dirty="0" spc="8" kern="0">
+              <a:t> thời</a:t>
+            </a:r>
+            <a:r>
+              <a:rPr lang="en-US" sz="2700" dirty="0" spc="-3" kern="0">
                 <a:solidFill>
                   <a:srgbClr val="F3EEE3"/>
                 </a:solidFill>
@@ -9070,10 +8910,10 @@
                 <a:ea typeface="Be Vietnam Pro" pitchFamily="34" charset="-122"/>
                 <a:cs typeface="Be Vietnam Pro" pitchFamily="34" charset="-120"/>
               </a:rPr>
-              <a:t> chưa</a:t>
-            </a:r>
-            <a:r>
-              <a:rPr lang="en-US" sz="2700" dirty="0" spc="-2" kern="0">
+              <a:t> gian</a:t>
+            </a:r>
+            <a:r>
+              <a:rPr lang="en-US" sz="2700" dirty="0" spc="-7" kern="0">
                 <a:solidFill>
                   <a:srgbClr val="F3EEE3"/>
                 </a:solidFill>
@@ -9081,106 +8921,7 @@
                 <a:ea typeface="Be Vietnam Pro" pitchFamily="34" charset="-122"/>
                 <a:cs typeface="Be Vietnam Pro" pitchFamily="34" charset="-120"/>
               </a:rPr>
-              <a:t> nói</a:t>
-            </a:r>
-            <a:r>
-              <a:rPr lang="en-US" sz="2700" dirty="0" spc="-8" kern="0">
-                <a:solidFill>
-                  <a:srgbClr val="F3EEE3"/>
-                </a:solidFill>
-                <a:latin typeface="Be Vietnam Pro" pitchFamily="34" charset="0"/>
-                <a:ea typeface="Be Vietnam Pro" pitchFamily="34" charset="-122"/>
-                <a:cs typeface="Be Vietnam Pro" pitchFamily="34" charset="-120"/>
-              </a:rPr>
-              <a:t> hết</a:t>
-            </a:r>
-            <a:r>
-              <a:rPr lang="en-US" sz="2700" dirty="0" spc="-14" kern="0">
-                <a:solidFill>
-                  <a:srgbClr val="F3EEE3"/>
-                </a:solidFill>
-                <a:latin typeface="Be Vietnam Pro" pitchFamily="34" charset="0"/>
-                <a:ea typeface="Be Vietnam Pro" pitchFamily="34" charset="-122"/>
-                <a:cs typeface="Be Vietnam Pro" pitchFamily="34" charset="-120"/>
-              </a:rPr>
-              <a:t> chuyện</a:t>
-            </a:r>
-            <a:r>
-              <a:rPr lang="en-US" sz="2700" dirty="0" spc="-3" kern="0">
-                <a:solidFill>
-                  <a:srgbClr val="F3EEE3"/>
-                </a:solidFill>
-                <a:latin typeface="Be Vietnam Pro" pitchFamily="34" charset="0"/>
-                <a:ea typeface="Be Vietnam Pro" pitchFamily="34" charset="-122"/>
-                <a:cs typeface="Be Vietnam Pro" pitchFamily="34" charset="-120"/>
-              </a:rPr>
-              <a:t> năng</a:t>
-            </a:r>
-            <a:r>
-              <a:rPr lang="en-US" sz="2700" dirty="0" spc="5" kern="0">
-                <a:solidFill>
-                  <a:srgbClr val="F3EEE3"/>
-                </a:solidFill>
-                <a:latin typeface="Be Vietnam Pro" pitchFamily="34" charset="0"/>
-                <a:ea typeface="Be Vietnam Pro" pitchFamily="34" charset="-122"/>
-                <a:cs typeface="Be Vietnam Pro" pitchFamily="34" charset="-120"/>
-              </a:rPr>
-              <a:t> lượng.</a:t>
-            </a:r>
-            <a:r>
-              <a:rPr lang="en-US" sz="2700" dirty="0" spc="-4" kern="0">
-                <a:solidFill>
-                  <a:srgbClr val="F3EEE3"/>
-                </a:solidFill>
-                <a:latin typeface="Be Vietnam Pro" pitchFamily="34" charset="0"/>
-                <a:ea typeface="Be Vietnam Pro" pitchFamily="34" charset="-122"/>
-                <a:cs typeface="Be Vietnam Pro" pitchFamily="34" charset="-120"/>
-              </a:rPr>
-              <a:t> Bộ</a:t>
-            </a:r>
-            <a:r>
-              <a:rPr lang="en-US" sz="2700" dirty="0" spc="-2" kern="0">
-                <a:solidFill>
-                  <a:srgbClr val="F3EEE3"/>
-                </a:solidFill>
-                <a:latin typeface="Be Vietnam Pro" pitchFamily="34" charset="0"/>
-                <a:ea typeface="Be Vietnam Pro" pitchFamily="34" charset="-122"/>
-                <a:cs typeface="Be Vietnam Pro" pitchFamily="34" charset="-120"/>
-              </a:rPr>
-              <a:t> nhớ cũng</a:t>
-            </a:r>
-            <a:r>
-              <a:rPr lang="en-US" sz="2700" dirty="0" spc="0" kern="0">
-                <a:solidFill>
-                  <a:srgbClr val="F3EEE3"/>
-                </a:solidFill>
-                <a:latin typeface="Be Vietnam Pro" pitchFamily="34" charset="0"/>
-                <a:ea typeface="Be Vietnam Pro" pitchFamily="34" charset="-122"/>
-                <a:cs typeface="Be Vietnam Pro" pitchFamily="34" charset="-120"/>
-              </a:rPr>
-              <a:t> có</a:t>
-            </a:r>
-            <a:r>
-              <a:rPr lang="en-US" sz="2700" dirty="0" spc="-2" kern="0">
-                <a:solidFill>
-                  <a:srgbClr val="F3EEE3"/>
-                </a:solidFill>
-                <a:latin typeface="Be Vietnam Pro" pitchFamily="34" charset="0"/>
-                <a:ea typeface="Be Vietnam Pro" pitchFamily="34" charset="-122"/>
-                <a:cs typeface="Be Vietnam Pro" pitchFamily="34" charset="-120"/>
-              </a:rPr>
-              <a:t> ảnh</a:t>
-            </a:r>
-            <a:r>
-              <a:rPr lang="en-US" sz="2700" dirty="0" spc="5" kern="0">
-                <a:solidFill>
-                  <a:srgbClr val="F3EEE3"/>
-                </a:solidFill>
-                <a:latin typeface="Be Vietnam Pro" pitchFamily="34" charset="0"/>
-                <a:ea typeface="Be Vietnam Pro" pitchFamily="34" charset="-122"/>
-                <a:cs typeface="Be Vietnam Pro" pitchFamily="34" charset="-120"/>
-              </a:rPr>
-              <a:t> hưởng.</a:t>
+              <a:t> chạy.</a:t>
             </a:r>
             <a:endParaRPr lang="en-US" sz="2700" dirty="0"/>
           </a:p>
@@ -9255,7 +8996,7 @@
               <a:buNone/>
             </a:pPr>
             <a:r>
-              <a:rPr lang="en-US" sz="1650" b="1" spc="223" kern="0" dirty="0">
+              <a:rPr lang="en-US" sz="1650" b="1" spc="224" kern="0" dirty="0">
                 <a:solidFill>
                   <a:srgbClr val="9AA0B5"/>
                 </a:solidFill>
@@ -9263,10 +9004,10 @@
                 <a:ea typeface="Be Vietnam Pro" pitchFamily="34" charset="-122"/>
                 <a:cs typeface="Be Vietnam Pro" pitchFamily="34" charset="-120"/>
               </a:rPr>
-              <a:t>CHẬM</a:t>
-            </a:r>
-            <a:r>
-              <a:rPr lang="en-US" sz="1650" b="1" spc="224" kern="0" dirty="0">
+              <a:t>TÊN</a:t>
+            </a:r>
+            <a:r>
+              <a:rPr lang="en-US" sz="1650" b="1" spc="220" kern="0" dirty="0">
                 <a:solidFill>
                   <a:srgbClr val="9AA0B5"/>
                 </a:solidFill>
@@ -9274,10 +9015,10 @@
                 <a:ea typeface="Be Vietnam Pro" pitchFamily="34" charset="-122"/>
                 <a:cs typeface="Be Vietnam Pro" pitchFamily="34" charset="-120"/>
               </a:rPr>
-              <a:t> HƠN,</a:t>
-            </a:r>
-            <a:r>
-              <a:rPr lang="en-US" sz="1650" b="1" spc="184" kern="0" dirty="0">
+              <a:t> BÀI</a:t>
+            </a:r>
+            <a:r>
+              <a:rPr lang="en-US" sz="1650" b="1" spc="196" kern="0" dirty="0">
                 <a:solidFill>
                   <a:srgbClr val="9AA0B5"/>
                 </a:solidFill>
@@ -9285,29 +9026,7 @@
                 <a:ea typeface="Be Vietnam Pro" pitchFamily="34" charset="-122"/>
                 <a:cs typeface="Be Vietnam Pro" pitchFamily="34" charset="-120"/>
               </a:rPr>
-              <a:t> VÀ</a:t>
-            </a:r>
-            <a:r>
-              <a:rPr lang="en-US" sz="1650" b="1" spc="227" kern="0" dirty="0">
-                <a:solidFill>
-                  <a:srgbClr val="9AA0B5"/>
-                </a:solidFill>
-                <a:latin typeface="Be Vietnam Pro" pitchFamily="34" charset="0"/>
-                <a:ea typeface="Be Vietnam Pro" pitchFamily="34" charset="-122"/>
-                <a:cs typeface="Be Vietnam Pro" pitchFamily="34" charset="-120"/>
-              </a:rPr>
-              <a:t> NGƯỢC</a:t>
-            </a:r>
-            <a:r>
-              <a:rPr lang="en-US" sz="1650" b="1" spc="226" kern="0" dirty="0">
-                <a:solidFill>
-                  <a:srgbClr val="9AA0B5"/>
-                </a:solidFill>
-                <a:latin typeface="Be Vietnam Pro" pitchFamily="34" charset="0"/>
-                <a:ea typeface="Be Vietnam Pro" pitchFamily="34" charset="-122"/>
-                <a:cs typeface="Be Vietnam Pro" pitchFamily="34" charset="-120"/>
-              </a:rPr>
-              <a:t> LẠI</a:t>
+              <a:t> TOÁN</a:t>
             </a:r>
             <a:endParaRPr lang="en-US" sz="1650" dirty="0"/>
           </a:p>
@@ -9342,26 +9061,48 @@
               <a:buNone/>
             </a:pPr>
             <a:r>
-              <a:rPr lang="en-US" sz="2100" b="1" dirty="0" spc="-7" kern="0">
-                <a:solidFill>
-                  <a:srgbClr val="14161C"/>
-                </a:solidFill>
-                <a:latin typeface="Be Vietnam Pro" pitchFamily="34" charset="0"/>
-                <a:ea typeface="Be Vietnam Pro" pitchFamily="34" charset="-122"/>
-                <a:cs typeface="Be Vietnam Pro" pitchFamily="34" charset="-120"/>
-              </a:rPr>
-              <a:t>Chạy</a:t>
-            </a:r>
-            <a:r>
-              <a:rPr lang="en-US" sz="2100" b="1" dirty="0" spc="-3" kern="0">
-                <a:solidFill>
-                  <a:srgbClr val="14161C"/>
-                </a:solidFill>
-                <a:latin typeface="Be Vietnam Pro" pitchFamily="34" charset="0"/>
-                <a:ea typeface="Be Vietnam Pro" pitchFamily="34" charset="-122"/>
-                <a:cs typeface="Be Vietnam Pro" pitchFamily="34" charset="-120"/>
-              </a:rPr>
-              <a:t> chậm</a:t>
+              <a:rPr lang="en-US" sz="2100" b="1" dirty="0" spc="-14" kern="0">
+                <a:solidFill>
+                  <a:srgbClr val="14161C"/>
+                </a:solidFill>
+                <a:latin typeface="Be Vietnam Pro" pitchFamily="34" charset="0"/>
+                <a:ea typeface="Be Vietnam Pro" pitchFamily="34" charset="-122"/>
+                <a:cs typeface="Be Vietnam Pro" pitchFamily="34" charset="-120"/>
+              </a:rPr>
+              <a:t>Một</a:t>
+            </a:r>
+            <a:r>
+              <a:rPr lang="en-US" sz="2100" b="1" dirty="0" spc="-9" kern="0">
+                <a:solidFill>
+                  <a:srgbClr val="14161C"/>
+                </a:solidFill>
+                <a:latin typeface="Be Vietnam Pro" pitchFamily="34" charset="0"/>
+                <a:ea typeface="Be Vietnam Pro" pitchFamily="34" charset="-122"/>
+                <a:cs typeface="Be Vietnam Pro" pitchFamily="34" charset="-120"/>
+              </a:rPr>
+              <a:t> dòng</a:t>
+            </a:r>
+            <a:r>
+              <a:rPr lang="en-US" sz="2100" b="1" dirty="0" spc="-6" kern="0">
+                <a:solidFill>
+                  <a:srgbClr val="14161C"/>
+                </a:solidFill>
+                <a:latin typeface="Be Vietnam Pro" pitchFamily="34" charset="0"/>
+                <a:ea typeface="Be Vietnam Pro" pitchFamily="34" charset="-122"/>
+                <a:cs typeface="Be Vietnam Pro" pitchFamily="34" charset="-120"/>
+              </a:rPr>
+              <a:t> cho</a:t>
+            </a:r>
+            <a:r>
+              <a:rPr lang="en-US" sz="2100" b="1" dirty="0" spc="-8" kern="0">
+                <a:solidFill>
+                  <a:srgbClr val="14161C"/>
+                </a:solidFill>
+                <a:latin typeface="Be Vietnam Pro" pitchFamily="34" charset="0"/>
+                <a:ea typeface="Be Vietnam Pro" pitchFamily="34" charset="-122"/>
+                <a:cs typeface="Be Vietnam Pro" pitchFamily="34" charset="-120"/>
+              </a:rPr>
+              <a:t> mỗi</a:t>
             </a:r>
             <a:r>
               <a:rPr lang="en-US" sz="2100" b="1" dirty="0" spc="-1" kern="0">
@@ -9372,7 +9113,7 @@
                 <a:ea typeface="Be Vietnam Pro" pitchFamily="34" charset="-122"/>
                 <a:cs typeface="Be Vietnam Pro" pitchFamily="34" charset="-120"/>
               </a:rPr>
-              <a:t> hơn</a:t>
+              <a:t> bài</a:t>
             </a:r>
             <a:endParaRPr lang="en-US" sz="2100" dirty="0"/>
           </a:p>
@@ -9432,6 +9173,28 @@
               <a:buNone/>
             </a:pPr>
             <a:r>
+              <a:rPr lang="en-US" sz="2100" b="1" dirty="0" spc="-36" kern="0">
+                <a:solidFill>
+                  <a:srgbClr val="14161C"/>
+                </a:solidFill>
+                <a:latin typeface="Be Vietnam Pro" pitchFamily="34" charset="0"/>
+                <a:ea typeface="Be Vietnam Pro" pitchFamily="34" charset="-122"/>
+                <a:cs typeface="Be Vietnam Pro" pitchFamily="34" charset="-120"/>
+              </a:rPr>
+              <a:t>Trong</a:t>
+            </a:r>
+            <a:r>
+              <a:rPr lang="en-US" sz="2100" b="1" dirty="0" spc="-10" kern="0">
+                <a:solidFill>
+                  <a:srgbClr val="14161C"/>
+                </a:solidFill>
+                <a:latin typeface="Be Vietnam Pro" pitchFamily="34" charset="0"/>
+                <a:ea typeface="Be Vietnam Pro" pitchFamily="34" charset="-122"/>
+                <a:cs typeface="Be Vietnam Pro" pitchFamily="34" charset="-120"/>
+              </a:rPr>
+              <a:t> tệp</a:t>
+            </a:r>
+            <a:r>
               <a:rPr lang="en-US" sz="2100" b="1" dirty="0" spc="-3" kern="0">
                 <a:solidFill>
                   <a:srgbClr val="14161C"/>
@@ -9440,73 +9203,40 @@
                 <a:ea typeface="Be Vietnam Pro" pitchFamily="34" charset="-122"/>
                 <a:cs typeface="Be Vietnam Pro" pitchFamily="34" charset="-120"/>
               </a:rPr>
-              <a:t>Có</a:t>
-            </a:r>
-            <a:r>
-              <a:rPr lang="en-US" sz="2100" b="1" dirty="0" spc="-5" kern="0">
-                <a:solidFill>
-                  <a:srgbClr val="14161C"/>
-                </a:solidFill>
-                <a:latin typeface="Be Vietnam Pro" pitchFamily="34" charset="0"/>
-                <a:ea typeface="Be Vietnam Pro" pitchFamily="34" charset="-122"/>
-                <a:cs typeface="Be Vietnam Pro" pitchFamily="34" charset="-120"/>
-              </a:rPr>
-              <a:t> thể</a:t>
-            </a:r>
-            <a:r>
-              <a:rPr lang="en-US" sz="2100" b="1" dirty="0" spc="-10" kern="0">
-                <a:solidFill>
-                  <a:srgbClr val="14161C"/>
-                </a:solidFill>
-                <a:latin typeface="Be Vietnam Pro" pitchFamily="34" charset="0"/>
-                <a:ea typeface="Be Vietnam Pro" pitchFamily="34" charset="-122"/>
-                <a:cs typeface="Be Vietnam Pro" pitchFamily="34" charset="-120"/>
-              </a:rPr>
-              <a:t> tốn</a:t>
-            </a:r>
-            <a:r>
-              <a:rPr lang="en-US" sz="2100" b="1" dirty="0" spc="-5" kern="0">
-                <a:solidFill>
-                  <a:srgbClr val="14161C"/>
-                </a:solidFill>
-                <a:latin typeface="Be Vietnam Pro" pitchFamily="34" charset="0"/>
-                <a:ea typeface="Be Vietnam Pro" pitchFamily="34" charset="-122"/>
-                <a:cs typeface="Be Vietnam Pro" pitchFamily="34" charset="-120"/>
-              </a:rPr>
-              <a:t> ít</a:t>
-            </a:r>
-            <a:r>
-              <a:rPr lang="en-US" sz="2100" b="1" dirty="0" spc="-2" kern="0">
-                <a:solidFill>
-                  <a:srgbClr val="14161C"/>
-                </a:solidFill>
-                <a:latin typeface="Be Vietnam Pro" pitchFamily="34" charset="0"/>
-                <a:ea typeface="Be Vietnam Pro" pitchFamily="34" charset="-122"/>
-                <a:cs typeface="Be Vietnam Pro" pitchFamily="34" charset="-120"/>
-              </a:rPr>
-              <a:t> năng</a:t>
-            </a:r>
-            <a:r>
-              <a:rPr lang="en-US" sz="2100" b="1" dirty="0" spc="6" kern="0">
-                <a:solidFill>
-                  <a:srgbClr val="14161C"/>
-                </a:solidFill>
-                <a:latin typeface="Be Vietnam Pro" pitchFamily="34" charset="0"/>
-                <a:ea typeface="Be Vietnam Pro" pitchFamily="34" charset="-122"/>
-                <a:cs typeface="Be Vietnam Pro" pitchFamily="34" charset="-120"/>
-              </a:rPr>
-              <a:t> lượng</a:t>
-            </a:r>
-            <a:r>
-              <a:rPr lang="en-US" sz="2100" b="1" dirty="0" spc="-2" kern="0">
-                <a:solidFill>
-                  <a:srgbClr val="14161C"/>
-                </a:solidFill>
-                <a:latin typeface="Be Vietnam Pro" pitchFamily="34" charset="0"/>
-                <a:ea typeface="Be Vietnam Pro" pitchFamily="34" charset="-122"/>
-                <a:cs typeface="Be Vietnam Pro" pitchFamily="34" charset="-120"/>
-              </a:rPr>
-              <a:t> hơn</a:t>
+              <a:t> của</a:t>
+            </a:r>
+            <a:r>
+              <a:rPr lang="en-US" sz="2100" b="1" dirty="0" spc="17" kern="0">
+                <a:solidFill>
+                  <a:srgbClr val="14161C"/>
+                </a:solidFill>
+                <a:latin typeface="Be Vietnam Pro" pitchFamily="34" charset="0"/>
+                <a:ea typeface="Be Vietnam Pro" pitchFamily="34" charset="-122"/>
+                <a:cs typeface="Be Vietnam Pro" pitchFamily="34" charset="-120"/>
+              </a:rPr>
+              <a:t> từng</a:t>
+            </a:r>
+            <a:r>
+              <a:rPr lang="en-US" sz="2100" b="1" dirty="0" spc="-8" kern="0">
+                <a:solidFill>
+                  <a:srgbClr val="14161C"/>
+                </a:solidFill>
+                <a:latin typeface="Be Vietnam Pro" pitchFamily="34" charset="0"/>
+                <a:ea typeface="Be Vietnam Pro" pitchFamily="34" charset="-122"/>
+                <a:cs typeface="Be Vietnam Pro" pitchFamily="34" charset="-120"/>
+              </a:rPr>
+              <a:t> ngôn</a:t>
+            </a:r>
+            <a:r>
+              <a:rPr lang="en-US" sz="2100" b="1" dirty="0" spc="-4" kern="0">
+                <a:solidFill>
+                  <a:srgbClr val="14161C"/>
+                </a:solidFill>
+                <a:latin typeface="Be Vietnam Pro" pitchFamily="34" charset="0"/>
+                <a:ea typeface="Be Vietnam Pro" pitchFamily="34" charset="-122"/>
+                <a:cs typeface="Be Vietnam Pro" pitchFamily="34" charset="-120"/>
+              </a:rPr>
+              <a:t> ngữ</a:t>
             </a:r>
             <a:endParaRPr lang="en-US" sz="2100" dirty="0"/>
           </a:p>
@@ -9559,7 +9289,7 @@
               <a:buNone/>
             </a:pPr>
             <a:r>
-              <a:rPr lang="en-US" sz="1650" b="1" spc="214" kern="0" dirty="0">
+              <a:rPr lang="en-US" sz="1650" b="1" spc="224" kern="0" dirty="0">
                 <a:solidFill>
                   <a:srgbClr val="9AA0B5"/>
                 </a:solidFill>
@@ -9567,40 +9297,7 @@
                 <a:ea typeface="Be Vietnam Pro" pitchFamily="34" charset="-122"/>
                 <a:cs typeface="Be Vietnam Pro" pitchFamily="34" charset="-120"/>
               </a:rPr>
-              <a:t>BỘ</a:t>
-            </a:r>
-            <a:r>
-              <a:rPr lang="en-US" sz="1650" b="1" spc="225" kern="0" dirty="0">
-                <a:solidFill>
-                  <a:srgbClr val="9AA0B5"/>
-                </a:solidFill>
-                <a:latin typeface="Be Vietnam Pro" pitchFamily="34" charset="0"/>
-                <a:ea typeface="Be Vietnam Pro" pitchFamily="34" charset="-122"/>
-                <a:cs typeface="Be Vietnam Pro" pitchFamily="34" charset="-120"/>
-              </a:rPr>
-              <a:t> NHỚ</a:t>
-            </a:r>
-            <a:r>
-              <a:rPr lang="en-US" sz="1650" b="1" spc="183" kern="0" dirty="0">
-                <a:solidFill>
-                  <a:srgbClr val="9AA0B5"/>
-                </a:solidFill>
-                <a:latin typeface="Be Vietnam Pro" pitchFamily="34" charset="0"/>
-                <a:ea typeface="Be Vietnam Pro" pitchFamily="34" charset="-122"/>
-                <a:cs typeface="Be Vietnam Pro" pitchFamily="34" charset="-120"/>
-              </a:rPr>
-              <a:t> VÀ</a:t>
-            </a:r>
-            <a:r>
-              <a:rPr lang="en-US" sz="1650" b="1" spc="225" kern="0" dirty="0">
-                <a:solidFill>
-                  <a:srgbClr val="9AA0B5"/>
-                </a:solidFill>
-                <a:latin typeface="Be Vietnam Pro" pitchFamily="34" charset="0"/>
-                <a:ea typeface="Be Vietnam Pro" pitchFamily="34" charset="-122"/>
-                <a:cs typeface="Be Vietnam Pro" pitchFamily="34" charset="-120"/>
-              </a:rPr>
-              <a:t> NĂNG</a:t>
+              <a:t>NĂNG</a:t>
             </a:r>
             <a:r>
               <a:rPr lang="en-US" sz="1650" b="1" spc="227" kern="0" dirty="0">
@@ -9646,48 +9343,37 @@
               <a:buNone/>
             </a:pPr>
             <a:r>
-              <a:rPr lang="en-US" sz="2100" b="1" dirty="0" spc="14" kern="0">
-                <a:solidFill>
-                  <a:srgbClr val="14161C"/>
-                </a:solidFill>
-                <a:latin typeface="Be Vietnam Pro" pitchFamily="34" charset="0"/>
-                <a:ea typeface="Be Vietnam Pro" pitchFamily="34" charset="-122"/>
-                <a:cs typeface="Be Vietnam Pro" pitchFamily="34" charset="-120"/>
-              </a:rPr>
-              <a:t>Mức</a:t>
-            </a:r>
-            <a:r>
-              <a:rPr lang="en-US" sz="2100" b="1" dirty="0" spc="-3" kern="0">
-                <a:solidFill>
-                  <a:srgbClr val="14161C"/>
-                </a:solidFill>
-                <a:latin typeface="Be Vietnam Pro" pitchFamily="34" charset="0"/>
-                <a:ea typeface="Be Vietnam Pro" pitchFamily="34" charset="-122"/>
-                <a:cs typeface="Be Vietnam Pro" pitchFamily="34" charset="-120"/>
-              </a:rPr>
-              <a:t> dùng</a:t>
-            </a:r>
-            <a:r>
-              <a:rPr lang="en-US" sz="2100" b="1" dirty="0" spc="-5" kern="0">
-                <a:solidFill>
-                  <a:srgbClr val="14161C"/>
-                </a:solidFill>
-                <a:latin typeface="Be Vietnam Pro" pitchFamily="34" charset="0"/>
-                <a:ea typeface="Be Vietnam Pro" pitchFamily="34" charset="-122"/>
-                <a:cs typeface="Be Vietnam Pro" pitchFamily="34" charset="-120"/>
-              </a:rPr>
-              <a:t> bộ</a:t>
-            </a:r>
-            <a:r>
-              <a:rPr lang="en-US" sz="2100" b="1" dirty="0" spc="-4" kern="0">
-                <a:solidFill>
-                  <a:srgbClr val="14161C"/>
-                </a:solidFill>
-                <a:latin typeface="Be Vietnam Pro" pitchFamily="34" charset="0"/>
-                <a:ea typeface="Be Vietnam Pro" pitchFamily="34" charset="-122"/>
-                <a:cs typeface="Be Vietnam Pro" pitchFamily="34" charset="-120"/>
-              </a:rPr>
-              <a:t> nhớ</a:t>
+              <a:rPr lang="en-US" sz="2100" b="1" dirty="0" spc="2" kern="0">
+                <a:solidFill>
+                  <a:srgbClr val="14161C"/>
+                </a:solidFill>
+                <a:latin typeface="Be Vietnam Pro" pitchFamily="34" charset="0"/>
+                <a:ea typeface="Be Vietnam Pro" pitchFamily="34" charset="-122"/>
+                <a:cs typeface="Be Vietnam Pro" pitchFamily="34" charset="-120"/>
+              </a:rPr>
+              <a:t>Tính</a:t>
+            </a:r>
+            <a:r>
+              <a:rPr lang="en-US" sz="2100" b="1" dirty="0" spc="-2" kern="0">
+                <a:solidFill>
+                  <a:srgbClr val="14161C"/>
+                </a:solidFill>
+                <a:latin typeface="Be Vietnam Pro" pitchFamily="34" charset="0"/>
+                <a:ea typeface="Be Vietnam Pro" pitchFamily="34" charset="-122"/>
+                <a:cs typeface="Be Vietnam Pro" pitchFamily="34" charset="-120"/>
+              </a:rPr>
+              <a:t> bằng</a:t>
+            </a:r>
+            <a:r>
+              <a:rPr lang="en-US" sz="2100" b="1" dirty="0" spc="-8" kern="0">
+                <a:solidFill>
+                  <a:srgbClr val="14161C"/>
+                </a:solidFill>
+                <a:latin typeface="Be Vietnam Pro" pitchFamily="34" charset="0"/>
+                <a:ea typeface="Be Vietnam Pro" pitchFamily="34" charset="-122"/>
+                <a:cs typeface="Be Vietnam Pro" pitchFamily="34" charset="-120"/>
+              </a:rPr>
+              <a:t> joule</a:t>
             </a:r>
             <a:endParaRPr lang="en-US" sz="2100" dirty="0"/>
           </a:p>
@@ -9747,26 +9433,81 @@
               <a:buNone/>
             </a:pPr>
             <a:r>
-              <a:rPr lang="en-US" sz="2100" b="1" dirty="0" spc="3" kern="0">
-                <a:solidFill>
-                  <a:srgbClr val="14161C"/>
-                </a:solidFill>
-                <a:latin typeface="Be Vietnam Pro" pitchFamily="34" charset="0"/>
-                <a:ea typeface="Be Vietnam Pro" pitchFamily="34" charset="-122"/>
-                <a:cs typeface="Be Vietnam Pro" pitchFamily="34" charset="-120"/>
-              </a:rPr>
-              <a:t>Ảnh</a:t>
-            </a:r>
-            <a:r>
-              <a:rPr lang="en-US" sz="2100" b="1" dirty="0" spc="5" kern="0">
-                <a:solidFill>
-                  <a:srgbClr val="14161C"/>
-                </a:solidFill>
-                <a:latin typeface="Be Vietnam Pro" pitchFamily="34" charset="0"/>
-                <a:ea typeface="Be Vietnam Pro" pitchFamily="34" charset="-122"/>
-                <a:cs typeface="Be Vietnam Pro" pitchFamily="34" charset="-120"/>
-              </a:rPr>
-              <a:t> hưởng</a:t>
+              <a:rPr lang="en-US" sz="2100" b="1" dirty="0" spc="-5" kern="0">
+                <a:solidFill>
+                  <a:srgbClr val="14161C"/>
+                </a:solidFill>
+                <a:latin typeface="Be Vietnam Pro" pitchFamily="34" charset="0"/>
+                <a:ea typeface="Be Vietnam Pro" pitchFamily="34" charset="-122"/>
+                <a:cs typeface="Be Vietnam Pro" pitchFamily="34" charset="-120"/>
+              </a:rPr>
+              <a:t>Cho</a:t>
+            </a:r>
+            <a:r>
+              <a:rPr lang="en-US" sz="2100" b="1" dirty="0" spc="-6" kern="0">
+                <a:solidFill>
+                  <a:srgbClr val="14161C"/>
+                </a:solidFill>
+                <a:latin typeface="Be Vietnam Pro" pitchFamily="34" charset="0"/>
+                <a:ea typeface="Be Vietnam Pro" pitchFamily="34" charset="-122"/>
+                <a:cs typeface="Be Vietnam Pro" pitchFamily="34" charset="-120"/>
+              </a:rPr>
+              <a:t> bộ</a:t>
+            </a:r>
+            <a:r>
+              <a:rPr lang="en-US" sz="2100" b="1" dirty="0" spc="-1" kern="0">
+                <a:solidFill>
+                  <a:srgbClr val="14161C"/>
+                </a:solidFill>
+                <a:latin typeface="Be Vietnam Pro" pitchFamily="34" charset="0"/>
+                <a:ea typeface="Be Vietnam Pro" pitchFamily="34" charset="-122"/>
+                <a:cs typeface="Be Vietnam Pro" pitchFamily="34" charset="-120"/>
+              </a:rPr>
+              <a:t> xử</a:t>
+            </a:r>
+            <a:r>
+              <a:rPr lang="en-US" sz="2100" b="1" dirty="0" spc="1" kern="0">
+                <a:solidFill>
+                  <a:srgbClr val="14161C"/>
+                </a:solidFill>
+                <a:latin typeface="Be Vietnam Pro" pitchFamily="34" charset="0"/>
+                <a:ea typeface="Be Vietnam Pro" pitchFamily="34" charset="-122"/>
+                <a:cs typeface="Be Vietnam Pro" pitchFamily="34" charset="-120"/>
+              </a:rPr>
+              <a:t> lý,</a:t>
+            </a:r>
+            <a:r>
+              <a:rPr lang="en-US" sz="2100" b="1" dirty="0" spc="2" kern="0">
+                <a:solidFill>
+                  <a:srgbClr val="14161C"/>
+                </a:solidFill>
+                <a:latin typeface="Be Vietnam Pro" pitchFamily="34" charset="0"/>
+                <a:ea typeface="Be Vietnam Pro" pitchFamily="34" charset="-122"/>
+                <a:cs typeface="Be Vietnam Pro" pitchFamily="34" charset="-120"/>
+              </a:rPr>
+              <a:t> đồ</a:t>
+            </a:r>
+            <a:r>
+              <a:rPr lang="en-US" sz="2100" b="1" dirty="0" spc="-7" kern="0">
+                <a:solidFill>
+                  <a:srgbClr val="14161C"/>
+                </a:solidFill>
+                <a:latin typeface="Be Vietnam Pro" pitchFamily="34" charset="0"/>
+                <a:ea typeface="Be Vietnam Pro" pitchFamily="34" charset="-122"/>
+                <a:cs typeface="Be Vietnam Pro" pitchFamily="34" charset="-120"/>
+              </a:rPr>
+              <a:t> họa,</a:t>
+            </a:r>
+            <a:r>
+              <a:rPr lang="en-US" sz="2100" b="1" dirty="0" spc="-6" kern="0">
+                <a:solidFill>
+                  <a:srgbClr val="14161C"/>
+                </a:solidFill>
+                <a:latin typeface="Be Vietnam Pro" pitchFamily="34" charset="0"/>
+                <a:ea typeface="Be Vietnam Pro" pitchFamily="34" charset="-122"/>
+                <a:cs typeface="Be Vietnam Pro" pitchFamily="34" charset="-120"/>
+              </a:rPr>
+              <a:t> bộ</a:t>
             </a:r>
             <a:r>
               <a:rPr lang="en-US" sz="2100" b="1" dirty="0" spc="-4" kern="0">
@@ -9777,51 +9518,7 @@
                 <a:ea typeface="Be Vietnam Pro" pitchFamily="34" charset="-122"/>
                 <a:cs typeface="Be Vietnam Pro" pitchFamily="34" charset="-120"/>
               </a:rPr>
-              <a:t> tới</a:t>
-            </a:r>
-            <a:r>
-              <a:rPr lang="en-US" sz="2100" b="1" dirty="0" spc="-2" kern="0">
-                <a:solidFill>
-                  <a:srgbClr val="14161C"/>
-                </a:solidFill>
-                <a:latin typeface="Be Vietnam Pro" pitchFamily="34" charset="0"/>
-                <a:ea typeface="Be Vietnam Pro" pitchFamily="34" charset="-122"/>
-                <a:cs typeface="Be Vietnam Pro" pitchFamily="34" charset="-120"/>
-              </a:rPr>
-              <a:t> năng</a:t>
-            </a:r>
-            <a:r>
-              <a:rPr lang="en-US" sz="2100" b="1" dirty="0" spc="6" kern="0">
-                <a:solidFill>
-                  <a:srgbClr val="14161C"/>
-                </a:solidFill>
-                <a:latin typeface="Be Vietnam Pro" pitchFamily="34" charset="0"/>
-                <a:ea typeface="Be Vietnam Pro" pitchFamily="34" charset="-122"/>
-                <a:cs typeface="Be Vietnam Pro" pitchFamily="34" charset="-120"/>
-              </a:rPr>
-              <a:t> lượng</a:t>
-            </a:r>
-            <a:r>
-              <a:rPr lang="en-US" sz="2100" b="1" dirty="0" spc="-4" kern="0">
-                <a:solidFill>
-                  <a:srgbClr val="14161C"/>
-                </a:solidFill>
-                <a:latin typeface="Be Vietnam Pro" pitchFamily="34" charset="0"/>
-                <a:ea typeface="Be Vietnam Pro" pitchFamily="34" charset="-122"/>
-                <a:cs typeface="Be Vietnam Pro" pitchFamily="34" charset="-120"/>
-              </a:rPr>
-              <a:t> tiêu</a:t>
-            </a:r>
-            <a:r>
-              <a:rPr lang="en-US" sz="2100" b="1" dirty="0" spc="-2" kern="0">
-                <a:solidFill>
-                  <a:srgbClr val="14161C"/>
-                </a:solidFill>
-                <a:latin typeface="Be Vietnam Pro" pitchFamily="34" charset="0"/>
-                <a:ea typeface="Be Vietnam Pro" pitchFamily="34" charset="-122"/>
-                <a:cs typeface="Be Vietnam Pro" pitchFamily="34" charset="-120"/>
-              </a:rPr>
-              <a:t> thụ</a:t>
+              <a:t> nhớ</a:t>
             </a:r>
             <a:endParaRPr lang="en-US" sz="2100" dirty="0"/>
           </a:p>
@@ -9874,7 +9571,7 @@
               <a:buNone/>
             </a:pPr>
             <a:r>
-              <a:rPr lang="en-US" sz="1650" b="1" spc="227" kern="0" dirty="0">
+              <a:rPr lang="en-US" sz="1650" b="1" spc="224" kern="0" dirty="0">
                 <a:solidFill>
                   <a:srgbClr val="9AA0B5"/>
                 </a:solidFill>
@@ -9882,10 +9579,10 @@
                 <a:ea typeface="Be Vietnam Pro" pitchFamily="34" charset="-122"/>
                 <a:cs typeface="Be Vietnam Pro" pitchFamily="34" charset="-120"/>
               </a:rPr>
-              <a:t>MONG</a:t>
-            </a:r>
-            <a:r>
-              <a:rPr lang="en-US" sz="1650" b="1" spc="228" kern="0" dirty="0">
+              <a:t>THỜI</a:t>
+            </a:r>
+            <a:r>
+              <a:rPr lang="en-US" sz="1650" b="1" spc="226" kern="0" dirty="0">
                 <a:solidFill>
                   <a:srgbClr val="9AA0B5"/>
                 </a:solidFill>
@@ -9893,10 +9590,10 @@
                 <a:ea typeface="Be Vietnam Pro" pitchFamily="34" charset="-122"/>
                 <a:cs typeface="Be Vietnam Pro" pitchFamily="34" charset="-120"/>
               </a:rPr>
-              <a:t> MUỐN</a:t>
-            </a:r>
-            <a:r>
-              <a:rPr lang="en-US" sz="1650" b="1" spc="216" kern="0" dirty="0">
+              <a:t> GIAN</a:t>
+            </a:r>
+            <a:r>
+              <a:rPr lang="en-US" sz="1650" b="1" spc="191" kern="0" dirty="0">
                 <a:solidFill>
                   <a:srgbClr val="9AA0B5"/>
                 </a:solidFill>
@@ -9904,40 +9601,7 @@
                 <a:ea typeface="Be Vietnam Pro" pitchFamily="34" charset="-122"/>
                 <a:cs typeface="Be Vietnam Pro" pitchFamily="34" charset="-120"/>
               </a:rPr>
-              <a:t> CỦA</a:t>
-            </a:r>
-            <a:r>
-              <a:rPr lang="en-US" sz="1650" b="1" spc="194" kern="0" dirty="0">
-                <a:solidFill>
-                  <a:srgbClr val="9AA0B5"/>
-                </a:solidFill>
-                <a:latin typeface="Be Vietnam Pro" pitchFamily="34" charset="0"/>
-                <a:ea typeface="Be Vietnam Pro" pitchFamily="34" charset="-122"/>
-                <a:cs typeface="Be Vietnam Pro" pitchFamily="34" charset="-120"/>
-              </a:rPr>
-              <a:t> CÁC</a:t>
-            </a:r>
-            <a:r>
-              <a:rPr lang="en-US" sz="1650" b="1" spc="168" kern="0" dirty="0">
-                <a:solidFill>
-                  <a:srgbClr val="9AA0B5"/>
-                </a:solidFill>
-                <a:latin typeface="Be Vietnam Pro" pitchFamily="34" charset="0"/>
-                <a:ea typeface="Be Vietnam Pro" pitchFamily="34" charset="-122"/>
-                <a:cs typeface="Be Vietnam Pro" pitchFamily="34" charset="-120"/>
-              </a:rPr>
-              <a:t> TÁC</a:t>
-            </a:r>
-            <a:r>
-              <a:rPr lang="en-US" sz="1650" b="1" spc="227" kern="0" dirty="0">
-                <a:solidFill>
-                  <a:srgbClr val="9AA0B5"/>
-                </a:solidFill>
-                <a:latin typeface="Be Vietnam Pro" pitchFamily="34" charset="0"/>
-                <a:ea typeface="Be Vietnam Pro" pitchFamily="34" charset="-122"/>
-                <a:cs typeface="Be Vietnam Pro" pitchFamily="34" charset="-120"/>
-              </a:rPr>
-              <a:t> GIẢ</a:t>
+              <a:t> CHẠY</a:t>
             </a:r>
             <a:endParaRPr lang="en-US" sz="1650" dirty="0"/>
           </a:p>
@@ -9972,48 +9636,48 @@
               <a:buNone/>
             </a:pPr>
             <a:r>
-              <a:rPr lang="en-US" sz="2100" b="1" dirty="0" spc="-39" kern="0">
-                <a:solidFill>
-                  <a:srgbClr val="14161C"/>
-                </a:solidFill>
-                <a:latin typeface="Be Vietnam Pro" pitchFamily="34" charset="0"/>
-                <a:ea typeface="Be Vietnam Pro" pitchFamily="34" charset="-122"/>
-                <a:cs typeface="Be Vietnam Pro" pitchFamily="34" charset="-120"/>
-              </a:rPr>
-              <a:t>Kết</a:t>
-            </a:r>
-            <a:r>
-              <a:rPr lang="en-US" sz="2100" b="1" dirty="0" spc="0" kern="0">
-                <a:solidFill>
-                  <a:srgbClr val="14161C"/>
-                </a:solidFill>
-                <a:latin typeface="Be Vietnam Pro" pitchFamily="34" charset="0"/>
-                <a:ea typeface="Be Vietnam Pro" pitchFamily="34" charset="-122"/>
-                <a:cs typeface="Be Vietnam Pro" pitchFamily="34" charset="-120"/>
-              </a:rPr>
-              <a:t> quả</a:t>
-            </a:r>
-            <a:r>
-              <a:rPr lang="en-US" sz="2100" b="1" dirty="0" spc="-4" kern="0">
-                <a:solidFill>
-                  <a:srgbClr val="14161C"/>
-                </a:solidFill>
-                <a:latin typeface="Be Vietnam Pro" pitchFamily="34" charset="0"/>
-                <a:ea typeface="Be Vietnam Pro" pitchFamily="34" charset="-122"/>
-                <a:cs typeface="Be Vietnam Pro" pitchFamily="34" charset="-120"/>
-              </a:rPr>
-              <a:t> nghiên</a:t>
-            </a:r>
-            <a:r>
-              <a:rPr lang="en-US" sz="2100" b="1" dirty="0" spc="26" kern="0">
-                <a:solidFill>
-                  <a:srgbClr val="14161C"/>
-                </a:solidFill>
-                <a:latin typeface="Be Vietnam Pro" pitchFamily="34" charset="0"/>
-                <a:ea typeface="Be Vietnam Pro" pitchFamily="34" charset="-122"/>
-                <a:cs typeface="Be Vietnam Pro" pitchFamily="34" charset="-120"/>
-              </a:rPr>
-              <a:t> cứu</a:t>
+              <a:rPr lang="en-US" sz="2100" b="1" dirty="0" spc="2" kern="0">
+                <a:solidFill>
+                  <a:srgbClr val="14161C"/>
+                </a:solidFill>
+                <a:latin typeface="Be Vietnam Pro" pitchFamily="34" charset="0"/>
+                <a:ea typeface="Be Vietnam Pro" pitchFamily="34" charset="-122"/>
+                <a:cs typeface="Be Vietnam Pro" pitchFamily="34" charset="-120"/>
+              </a:rPr>
+              <a:t>Tính</a:t>
+            </a:r>
+            <a:r>
+              <a:rPr lang="en-US" sz="2100" b="1" dirty="0" spc="-2" kern="0">
+                <a:solidFill>
+                  <a:srgbClr val="14161C"/>
+                </a:solidFill>
+                <a:latin typeface="Be Vietnam Pro" pitchFamily="34" charset="0"/>
+                <a:ea typeface="Be Vietnam Pro" pitchFamily="34" charset="-122"/>
+                <a:cs typeface="Be Vietnam Pro" pitchFamily="34" charset="-120"/>
+              </a:rPr>
+              <a:t> bằng</a:t>
+            </a:r>
+            <a:r>
+              <a:rPr lang="en-US" sz="2100" b="1" dirty="0" spc="-3" kern="0">
+                <a:solidFill>
+                  <a:srgbClr val="14161C"/>
+                </a:solidFill>
+                <a:latin typeface="Be Vietnam Pro" pitchFamily="34" charset="0"/>
+                <a:ea typeface="Be Vietnam Pro" pitchFamily="34" charset="-122"/>
+                <a:cs typeface="Be Vietnam Pro" pitchFamily="34" charset="-120"/>
+              </a:rPr>
+              <a:t> mili</a:t>
+            </a:r>
+            <a:r>
+              <a:rPr lang="en-US" sz="2100" b="1" dirty="0" spc="-6" kern="0">
+                <a:solidFill>
+                  <a:srgbClr val="14161C"/>
+                </a:solidFill>
+                <a:latin typeface="Be Vietnam Pro" pitchFamily="34" charset="0"/>
+                <a:ea typeface="Be Vietnam Pro" pitchFamily="34" charset="-122"/>
+                <a:cs typeface="Be Vietnam Pro" pitchFamily="34" charset="-120"/>
+              </a:rPr>
+              <a:t> giây</a:t>
             </a:r>
             <a:endParaRPr lang="en-US" sz="2100" dirty="0"/>
           </a:p>
@@ -10073,37 +9737,15 @@
               <a:buNone/>
             </a:pPr>
             <a:r>
-              <a:rPr lang="en-US" sz="2100" b="1" dirty="0" spc="-1" kern="0">
-                <a:solidFill>
-                  <a:srgbClr val="14161C"/>
-                </a:solidFill>
-                <a:latin typeface="Be Vietnam Pro" pitchFamily="34" charset="0"/>
-                <a:ea typeface="Be Vietnam Pro" pitchFamily="34" charset="-122"/>
-                <a:cs typeface="Be Vietnam Pro" pitchFamily="34" charset="-120"/>
-              </a:rPr>
-              <a:t>Giúp</a:t>
-            </a:r>
-            <a:r>
-              <a:rPr lang="en-US" sz="2100" b="1" dirty="0" spc="-6" kern="0">
-                <a:solidFill>
-                  <a:srgbClr val="14161C"/>
-                </a:solidFill>
-                <a:latin typeface="Be Vietnam Pro" pitchFamily="34" charset="0"/>
-                <a:ea typeface="Be Vietnam Pro" pitchFamily="34" charset="-122"/>
-                <a:cs typeface="Be Vietnam Pro" pitchFamily="34" charset="-120"/>
-              </a:rPr>
-              <a:t> chọn</a:t>
-            </a:r>
-            <a:r>
-              <a:rPr lang="en-US" sz="2100" b="1" dirty="0" spc="-9" kern="0">
-                <a:solidFill>
-                  <a:srgbClr val="14161C"/>
-                </a:solidFill>
-                <a:latin typeface="Be Vietnam Pro" pitchFamily="34" charset="0"/>
-                <a:ea typeface="Be Vietnam Pro" pitchFamily="34" charset="-122"/>
-                <a:cs typeface="Be Vietnam Pro" pitchFamily="34" charset="-120"/>
-              </a:rPr>
-              <a:t> ngôn</a:t>
+              <a:rPr lang="en-US" sz="2100" b="1" dirty="0" spc="-2" kern="0">
+                <a:solidFill>
+                  <a:srgbClr val="14161C"/>
+                </a:solidFill>
+                <a:latin typeface="Be Vietnam Pro" pitchFamily="34" charset="0"/>
+                <a:ea typeface="Be Vietnam Pro" pitchFamily="34" charset="-122"/>
+                <a:cs typeface="Be Vietnam Pro" pitchFamily="34" charset="-120"/>
+              </a:rPr>
+              <a:t>Ghi</a:t>
             </a:r>
             <a:r>
               <a:rPr lang="en-US" sz="2100" b="1" dirty="0" spc="-4" kern="0">
@@ -10114,40 +9756,29 @@
                 <a:ea typeface="Be Vietnam Pro" pitchFamily="34" charset="-122"/>
                 <a:cs typeface="Be Vietnam Pro" pitchFamily="34" charset="-120"/>
               </a:rPr>
-              <a:t> ngữ</a:t>
-            </a:r>
-            <a:r>
-              <a:rPr lang="en-US" sz="2100" b="1" dirty="0" spc="-3" kern="0">
-                <a:solidFill>
-                  <a:srgbClr val="14161C"/>
-                </a:solidFill>
-                <a:latin typeface="Be Vietnam Pro" pitchFamily="34" charset="0"/>
-                <a:ea typeface="Be Vietnam Pro" pitchFamily="34" charset="-122"/>
-                <a:cs typeface="Be Vietnam Pro" pitchFamily="34" charset="-120"/>
-              </a:rPr>
-              <a:t> khi</a:t>
-            </a:r>
-            <a:r>
-              <a:rPr lang="en-US" sz="2100" b="1" dirty="0" spc="0" kern="0">
-                <a:solidFill>
-                  <a:srgbClr val="14161C"/>
-                </a:solidFill>
-                <a:latin typeface="Be Vietnam Pro" pitchFamily="34" charset="0"/>
-                <a:ea typeface="Be Vietnam Pro" pitchFamily="34" charset="-122"/>
-                <a:cs typeface="Be Vietnam Pro" pitchFamily="34" charset="-120"/>
-              </a:rPr>
-              <a:t> quan</a:t>
-            </a:r>
-            <a:r>
-              <a:rPr lang="en-US" sz="2100" b="1" dirty="0" spc="-5" kern="0">
-                <a:solidFill>
-                  <a:srgbClr val="14161C"/>
-                </a:solidFill>
-                <a:latin typeface="Be Vietnam Pro" pitchFamily="34" charset="0"/>
-                <a:ea typeface="Be Vietnam Pro" pitchFamily="34" charset="-122"/>
-                <a:cs typeface="Be Vietnam Pro" pitchFamily="34" charset="-120"/>
-              </a:rPr>
-              <a:t> tâm</a:t>
+              <a:t> cùng</a:t>
+            </a:r>
+            <a:r>
+              <a:rPr lang="en-US" sz="2100" b="1" dirty="0" spc="-8" kern="0">
+                <a:solidFill>
+                  <a:srgbClr val="14161C"/>
+                </a:solidFill>
+                <a:latin typeface="Be Vietnam Pro" pitchFamily="34" charset="0"/>
+                <a:ea typeface="Be Vietnam Pro" pitchFamily="34" charset="-122"/>
+                <a:cs typeface="Be Vietnam Pro" pitchFamily="34" charset="-120"/>
+              </a:rPr>
+              <a:t> dòng</a:t>
+            </a:r>
+            <a:r>
+              <a:rPr lang="en-US" sz="2100" b="1" dirty="0" spc="-13" kern="0">
+                <a:solidFill>
+                  <a:srgbClr val="14161C"/>
+                </a:solidFill>
+                <a:latin typeface="Be Vietnam Pro" pitchFamily="34" charset="0"/>
+                <a:ea typeface="Be Vietnam Pro" pitchFamily="34" charset="-122"/>
+                <a:cs typeface="Be Vietnam Pro" pitchFamily="34" charset="-120"/>
+              </a:rPr>
+              <a:t> với</a:t>
             </a:r>
             <a:r>
               <a:rPr lang="en-US" sz="2100" b="1" dirty="0" spc="-2" kern="0">
@@ -10161,7 +9792,7 @@
               <a:t> năng</a:t>
             </a:r>
             <a:r>
-              <a:rPr lang="en-US" sz="2100" b="1" dirty="0" spc="6" kern="0">
+              <a:rPr lang="en-US" sz="2100" b="1" dirty="0" spc="5" kern="0">
                 <a:solidFill>
                   <a:srgbClr val="14161C"/>
                 </a:solidFill>
@@ -10512,13 +10143,90 @@
           <a:ln/>
         </p:spPr>
         <p:txBody>
-          <a:bodyPr wrap="square" lIns="0" tIns="0" rIns="0" bIns="0" rtlCol="0" anchor="ctr"/>
+          <a:bodyPr wrap="square" lIns="0" tIns="0" rIns="0" bIns="0" rtlCol="0" anchor="t"/>
           <a:lstStyle/>
           <a:p>
             <a:pPr algn="l" indent="0" marL="0">
               <a:buNone/>
             </a:pPr>
             <a:r>
+              <a:rPr lang="en-US" sz="3000" b="1" dirty="0" spc="1" kern="0">
+                <a:solidFill>
+                  <a:srgbClr val="F3EEE3"/>
+                </a:solidFill>
+                <a:latin typeface="Be Vietnam Pro" pitchFamily="34" charset="0"/>
+                <a:ea typeface="Be Vietnam Pro" pitchFamily="34" charset="-122"/>
+                <a:cs typeface="Be Vietnam Pro" pitchFamily="34" charset="-120"/>
+              </a:rPr>
+              <a:t>Có</a:t>
+            </a:r>
+            <a:r>
+              <a:rPr lang="en-US" sz="3000" b="1" dirty="0" spc="-4" kern="0">
+                <a:solidFill>
+                  <a:srgbClr val="F3EEE3"/>
+                </a:solidFill>
+                <a:latin typeface="Be Vietnam Pro" pitchFamily="34" charset="0"/>
+                <a:ea typeface="Be Vietnam Pro" pitchFamily="34" charset="-122"/>
+                <a:cs typeface="Be Vietnam Pro" pitchFamily="34" charset="-120"/>
+              </a:rPr>
+              <a:t> số</a:t>
+            </a:r>
+            <a:r>
+              <a:rPr lang="en-US" sz="3000" b="1" dirty="0" spc="9" kern="0">
+                <a:solidFill>
+                  <a:srgbClr val="F3EEE3"/>
+                </a:solidFill>
+                <a:latin typeface="Be Vietnam Pro" pitchFamily="34" charset="0"/>
+                <a:ea typeface="Be Vietnam Pro" pitchFamily="34" charset="-122"/>
+                <a:cs typeface="Be Vietnam Pro" pitchFamily="34" charset="-120"/>
+              </a:rPr>
+              <a:t> đo đồ</a:t>
+            </a:r>
+            <a:r>
+              <a:rPr lang="en-US" sz="3000" b="1" dirty="0" spc="-8" kern="0">
+                <a:solidFill>
+                  <a:srgbClr val="F3EEE3"/>
+                </a:solidFill>
+                <a:latin typeface="Be Vietnam Pro" pitchFamily="34" charset="0"/>
+                <a:ea typeface="Be Vietnam Pro" pitchFamily="34" charset="-122"/>
+                <a:cs typeface="Be Vietnam Pro" pitchFamily="34" charset="-120"/>
+              </a:rPr>
+              <a:t> họa</a:t>
+            </a:r>
+            <a:r>
+              <a:rPr lang="en-US" sz="3000" b="1" dirty="0" spc="-13" kern="0">
+                <a:solidFill>
+                  <a:srgbClr val="F3EEE3"/>
+                </a:solidFill>
+                <a:latin typeface="Be Vietnam Pro" pitchFamily="34" charset="0"/>
+                <a:ea typeface="Be Vietnam Pro" pitchFamily="34" charset="-122"/>
+                <a:cs typeface="Be Vietnam Pro" pitchFamily="34" charset="-120"/>
+              </a:rPr>
+              <a:t> hay</a:t>
+            </a:r>
+            <a:r>
+              <a:rPr lang="en-US" sz="3000" b="1" dirty="0" spc="-10" kern="0">
+                <a:solidFill>
+                  <a:srgbClr val="F3EEE3"/>
+                </a:solidFill>
+                <a:latin typeface="Be Vietnam Pro" pitchFamily="34" charset="0"/>
+                <a:ea typeface="Be Vietnam Pro" pitchFamily="34" charset="-122"/>
+                <a:cs typeface="Be Vietnam Pro" pitchFamily="34" charset="-120"/>
+              </a:rPr>
+              <a:t> không</a:t>
+            </a:r>
+            <a:r>
+              <a:rPr lang="en-US" sz="3000" b="1" dirty="0" spc="3" kern="0">
+                <a:solidFill>
+                  <a:srgbClr val="F3EEE3"/>
+                </a:solidFill>
+                <a:latin typeface="Be Vietnam Pro" pitchFamily="34" charset="0"/>
+                <a:ea typeface="Be Vietnam Pro" pitchFamily="34" charset="-122"/>
+                <a:cs typeface="Be Vietnam Pro" pitchFamily="34" charset="-120"/>
+              </a:rPr>
+              <a:t> tùy</a:t>
+            </a:r>
+            <a:r>
               <a:rPr lang="en-US" sz="3000" b="1" dirty="0" spc="-12" kern="0">
                 <a:solidFill>
                   <a:srgbClr val="F3EEE3"/>
@@ -10527,84 +10235,7 @@
                 <a:ea typeface="Be Vietnam Pro" pitchFamily="34" charset="-122"/>
                 <a:cs typeface="Be Vietnam Pro" pitchFamily="34" charset="-120"/>
               </a:rPr>
-              <a:t>Chạy</a:t>
-            </a:r>
-            <a:r>
-              <a:rPr lang="en-US" sz="3000" b="1" dirty="0" spc="-1" kern="0">
-                <a:solidFill>
-                  <a:srgbClr val="F3EEE3"/>
-                </a:solidFill>
-                <a:latin typeface="Be Vietnam Pro" pitchFamily="34" charset="0"/>
-                <a:ea typeface="Be Vietnam Pro" pitchFamily="34" charset="-122"/>
-                <a:cs typeface="Be Vietnam Pro" pitchFamily="34" charset="-120"/>
-              </a:rPr>
-              <a:t> chậm,</a:t>
-            </a:r>
-            <a:r>
-              <a:rPr lang="en-US" sz="3000" b="1" dirty="0" spc="-5" kern="0">
-                <a:solidFill>
-                  <a:srgbClr val="F3EEE3"/>
-                </a:solidFill>
-                <a:latin typeface="Be Vietnam Pro" pitchFamily="34" charset="0"/>
-                <a:ea typeface="Be Vietnam Pro" pitchFamily="34" charset="-122"/>
-                <a:cs typeface="Be Vietnam Pro" pitchFamily="34" charset="-120"/>
-              </a:rPr>
-              <a:t> có</a:t>
-            </a:r>
-            <a:r>
-              <a:rPr lang="en-US" sz="3000" b="1" dirty="0" spc="-3" kern="0">
-                <a:solidFill>
-                  <a:srgbClr val="F3EEE3"/>
-                </a:solidFill>
-                <a:latin typeface="Be Vietnam Pro" pitchFamily="34" charset="0"/>
-                <a:ea typeface="Be Vietnam Pro" pitchFamily="34" charset="-122"/>
-                <a:cs typeface="Be Vietnam Pro" pitchFamily="34" charset="-120"/>
-              </a:rPr>
-              <a:t> thể</a:t>
-            </a:r>
-            <a:r>
-              <a:rPr lang="en-US" sz="3000" b="1" dirty="0" spc="3" kern="0">
-                <a:solidFill>
-                  <a:srgbClr val="F3EEE3"/>
-                </a:solidFill>
-                <a:latin typeface="Be Vietnam Pro" pitchFamily="34" charset="0"/>
-                <a:ea typeface="Be Vietnam Pro" pitchFamily="34" charset="-122"/>
-                <a:cs typeface="Be Vietnam Pro" pitchFamily="34" charset="-120"/>
-              </a:rPr>
-              <a:t> ít</a:t>
-            </a:r>
-            <a:r>
-              <a:rPr lang="en-US" sz="3000" b="1" dirty="0" spc="-11" kern="0">
-                <a:solidFill>
-                  <a:srgbClr val="F3EEE3"/>
-                </a:solidFill>
-                <a:latin typeface="Be Vietnam Pro" pitchFamily="34" charset="0"/>
-                <a:ea typeface="Be Vietnam Pro" pitchFamily="34" charset="-122"/>
-                <a:cs typeface="Be Vietnam Pro" pitchFamily="34" charset="-120"/>
-              </a:rPr>
-              <a:t> tốn</a:t>
-            </a:r>
-            <a:r>
-              <a:rPr lang="en-US" sz="3000" b="1" dirty="0" spc="-7" kern="0">
-                <a:solidFill>
-                  <a:srgbClr val="F3EEE3"/>
-                </a:solidFill>
-                <a:latin typeface="Be Vietnam Pro" pitchFamily="34" charset="0"/>
-                <a:ea typeface="Be Vietnam Pro" pitchFamily="34" charset="-122"/>
-                <a:cs typeface="Be Vietnam Pro" pitchFamily="34" charset="-120"/>
-              </a:rPr>
-              <a:t> năng</a:t>
-            </a:r>
-            <a:r>
-              <a:rPr lang="en-US" sz="3000" b="1" dirty="0" spc="8" kern="0">
-                <a:solidFill>
-                  <a:srgbClr val="F3EEE3"/>
-                </a:solidFill>
-                <a:latin typeface="Be Vietnam Pro" pitchFamily="34" charset="0"/>
-                <a:ea typeface="Be Vietnam Pro" pitchFamily="34" charset="-122"/>
-                <a:cs typeface="Be Vietnam Pro" pitchFamily="34" charset="-120"/>
-              </a:rPr>
-              <a:t> lượng</a:t>
+              <a:t> máy</a:t>
             </a:r>
             <a:endParaRPr lang="en-US" sz="3000" dirty="0"/>
           </a:p>
@@ -11085,48 +10716,15 @@
               <a:buNone/>
             </a:pPr>
             <a:r>
-              <a:rPr lang="en-US" sz="2700" b="1" dirty="0" spc="4" kern="0">
-                <a:solidFill>
-                  <a:srgbClr val="14161C"/>
-                </a:solidFill>
-                <a:latin typeface="Be Vietnam Pro" pitchFamily="34" charset="0"/>
-                <a:ea typeface="Be Vietnam Pro" pitchFamily="34" charset="-122"/>
-                <a:cs typeface="Be Vietnam Pro" pitchFamily="34" charset="-120"/>
-              </a:rPr>
-              <a:t>Có</a:t>
-            </a:r>
-            <a:r>
-              <a:rPr lang="en-US" sz="2700" b="1" dirty="0" spc="-4" kern="0">
-                <a:solidFill>
-                  <a:srgbClr val="14161C"/>
-                </a:solidFill>
-                <a:latin typeface="Be Vietnam Pro" pitchFamily="34" charset="0"/>
-                <a:ea typeface="Be Vietnam Pro" pitchFamily="34" charset="-122"/>
-                <a:cs typeface="Be Vietnam Pro" pitchFamily="34" charset="-120"/>
-              </a:rPr>
-              <a:t> thể</a:t>
-            </a:r>
-            <a:r>
-              <a:rPr lang="en-US" sz="2700" b="1" dirty="0" spc="-13" kern="0">
-                <a:solidFill>
-                  <a:srgbClr val="14161C"/>
-                </a:solidFill>
-                <a:latin typeface="Be Vietnam Pro" pitchFamily="34" charset="0"/>
-                <a:ea typeface="Be Vietnam Pro" pitchFamily="34" charset="-122"/>
-                <a:cs typeface="Be Vietnam Pro" pitchFamily="34" charset="-120"/>
-              </a:rPr>
-              <a:t> gây</a:t>
-            </a:r>
-            <a:r>
-              <a:rPr lang="en-US" sz="2700" b="1" dirty="0" spc="-9" kern="0">
-                <a:solidFill>
-                  <a:srgbClr val="14161C"/>
-                </a:solidFill>
-                <a:latin typeface="Be Vietnam Pro" pitchFamily="34" charset="0"/>
-                <a:ea typeface="Be Vietnam Pro" pitchFamily="34" charset="-122"/>
-                <a:cs typeface="Be Vietnam Pro" pitchFamily="34" charset="-120"/>
-              </a:rPr>
-              <a:t> tranh</a:t>
+              <a:rPr lang="en-US" sz="2700" b="1" dirty="0" spc="-1" kern="0">
+                <a:solidFill>
+                  <a:srgbClr val="14161C"/>
+                </a:solidFill>
+                <a:latin typeface="Be Vietnam Pro" pitchFamily="34" charset="0"/>
+                <a:ea typeface="Be Vietnam Pro" pitchFamily="34" charset="-122"/>
+                <a:cs typeface="Be Vietnam Pro" pitchFamily="34" charset="-120"/>
+              </a:rPr>
+              <a:t>Phụ</a:t>
             </a:r>
             <a:r>
               <a:rPr lang="en-US" sz="2700" b="1" dirty="0" spc="-3" kern="0">
@@ -11137,7 +10735,18 @@
                 <a:ea typeface="Be Vietnam Pro" pitchFamily="34" charset="-122"/>
                 <a:cs typeface="Be Vietnam Pro" pitchFamily="34" charset="-120"/>
               </a:rPr>
-              <a:t> cãi</a:t>
+              <a:t> thuộc</a:t>
+            </a:r>
+            <a:r>
+              <a:rPr lang="en-US" sz="2700" b="1" dirty="0" spc="-14" kern="0">
+                <a:solidFill>
+                  <a:srgbClr val="14161C"/>
+                </a:solidFill>
+                <a:latin typeface="Be Vietnam Pro" pitchFamily="34" charset="0"/>
+                <a:ea typeface="Be Vietnam Pro" pitchFamily="34" charset="-122"/>
+                <a:cs typeface="Be Vietnam Pro" pitchFamily="34" charset="-120"/>
+              </a:rPr>
+              <a:t> máy</a:t>
             </a:r>
             <a:endParaRPr lang="en-US" sz="2700" dirty="0"/>
           </a:p>
@@ -11171,17 +10780,6 @@
               <a:buNone/>
             </a:pPr>
             <a:r>
-              <a:rPr lang="en-US" sz="2400" dirty="0" spc="-1" kern="0">
-                <a:solidFill>
-                  <a:srgbClr val="14161C"/>
-                </a:solidFill>
-                <a:latin typeface="Be Vietnam Pro" pitchFamily="34" charset="0"/>
-                <a:ea typeface="Be Vietnam Pro" pitchFamily="34" charset="-122"/>
-                <a:cs typeface="Be Vietnam Pro" pitchFamily="34" charset="-120"/>
-              </a:rPr>
-              <a:t>Chính bài</a:t>
-            </a:r>
-            <a:r>
               <a:rPr lang="en-US" sz="2400" dirty="0" spc="1" kern="0">
                 <a:solidFill>
                   <a:srgbClr val="14161C"/>
@@ -11190,7 +10788,73 @@
                 <a:ea typeface="Be Vietnam Pro" pitchFamily="34" charset="-122"/>
                 <a:cs typeface="Be Vietnam Pro" pitchFamily="34" charset="-120"/>
               </a:rPr>
-              <a:t> nguồn</a:t>
+              <a:t>Số</a:t>
+            </a:r>
+            <a:r>
+              <a:rPr lang="en-US" sz="2400" dirty="0" spc="18" kern="0">
+                <a:solidFill>
+                  <a:srgbClr val="14161C"/>
+                </a:solidFill>
+                <a:latin typeface="Be Vietnam Pro" pitchFamily="34" charset="0"/>
+                <a:ea typeface="Be Vietnam Pro" pitchFamily="34" charset="-122"/>
+                <a:cs typeface="Be Vietnam Pro" pitchFamily="34" charset="-120"/>
+              </a:rPr>
+              <a:t> đo</a:t>
+            </a:r>
+            <a:r>
+              <a:rPr lang="en-US" sz="2400" dirty="0" spc="2" kern="0">
+                <a:solidFill>
+                  <a:srgbClr val="14161C"/>
+                </a:solidFill>
+                <a:latin typeface="Be Vietnam Pro" pitchFamily="34" charset="0"/>
+                <a:ea typeface="Be Vietnam Pro" pitchFamily="34" charset="-122"/>
+                <a:cs typeface="Be Vietnam Pro" pitchFamily="34" charset="-120"/>
+              </a:rPr>
+              <a:t> phụ</a:t>
+            </a:r>
+            <a:r>
+              <a:rPr lang="en-US" sz="2400" dirty="0" spc="-2" kern="0">
+                <a:solidFill>
+                  <a:srgbClr val="14161C"/>
+                </a:solidFill>
+                <a:latin typeface="Be Vietnam Pro" pitchFamily="34" charset="0"/>
+                <a:ea typeface="Be Vietnam Pro" pitchFamily="34" charset="-122"/>
+                <a:cs typeface="Be Vietnam Pro" pitchFamily="34" charset="-120"/>
+              </a:rPr>
+              <a:t> thuộc</a:t>
+            </a:r>
+            <a:r>
+              <a:rPr lang="en-US" sz="2400" dirty="0" spc="-6" kern="0">
+                <a:solidFill>
+                  <a:srgbClr val="14161C"/>
+                </a:solidFill>
+                <a:latin typeface="Be Vietnam Pro" pitchFamily="34" charset="0"/>
+                <a:ea typeface="Be Vietnam Pro" pitchFamily="34" charset="-122"/>
+                <a:cs typeface="Be Vietnam Pro" pitchFamily="34" charset="-120"/>
+              </a:rPr>
+              <a:t> máy</a:t>
+            </a:r>
+            <a:r>
+              <a:rPr lang="en-US" sz="2400" dirty="0" spc="-16" kern="0">
+                <a:solidFill>
+                  <a:srgbClr val="14161C"/>
+                </a:solidFill>
+                <a:latin typeface="Be Vietnam Pro" pitchFamily="34" charset="0"/>
+                <a:ea typeface="Be Vietnam Pro" pitchFamily="34" charset="-122"/>
+                <a:cs typeface="Be Vietnam Pro" pitchFamily="34" charset="-120"/>
+              </a:rPr>
+              <a:t> và</a:t>
+            </a:r>
+            <a:r>
+              <a:rPr lang="en-US" sz="2400" dirty="0" spc="9" kern="0">
+                <a:solidFill>
+                  <a:srgbClr val="14161C"/>
+                </a:solidFill>
+                <a:latin typeface="Be Vietnam Pro" pitchFamily="34" charset="0"/>
+                <a:ea typeface="Be Vietnam Pro" pitchFamily="34" charset="-122"/>
+                <a:cs typeface="Be Vietnam Pro" pitchFamily="34" charset="-120"/>
+              </a:rPr>
+              <a:t> trình</a:t>
             </a:r>
             <a:r>
               <a:rPr lang="en-US" sz="2400" dirty="0" spc="0" kern="0">
@@ -11201,95 +10865,40 @@
                 <a:ea typeface="Be Vietnam Pro" pitchFamily="34" charset="-122"/>
                 <a:cs typeface="Be Vietnam Pro" pitchFamily="34" charset="-120"/>
               </a:rPr>
-              <a:t> nói</a:t>
-            </a:r>
-            <a:r>
-              <a:rPr lang="en-US" sz="2400" dirty="0" spc="-1" kern="0">
-                <a:solidFill>
-                  <a:srgbClr val="14161C"/>
-                </a:solidFill>
-                <a:latin typeface="Be Vietnam Pro" pitchFamily="34" charset="0"/>
-                <a:ea typeface="Be Vietnam Pro" pitchFamily="34" charset="-122"/>
-                <a:cs typeface="Be Vietnam Pro" pitchFamily="34" charset="-120"/>
-              </a:rPr>
-              <a:t> cách</a:t>
-            </a:r>
-            <a:r>
-              <a:rPr lang="en-US" sz="2400" dirty="0" spc="1" kern="0">
-                <a:solidFill>
-                  <a:srgbClr val="14161C"/>
-                </a:solidFill>
-                <a:latin typeface="Be Vietnam Pro" pitchFamily="34" charset="0"/>
-                <a:ea typeface="Be Vietnam Pro" pitchFamily="34" charset="-122"/>
-                <a:cs typeface="Be Vietnam Pro" pitchFamily="34" charset="-120"/>
-              </a:rPr>
-              <a:t> nhìn</a:t>
-            </a:r>
-            <a:r>
-              <a:rPr lang="en-US" sz="2400" dirty="0" spc="-8" kern="0">
-                <a:solidFill>
-                  <a:srgbClr val="14161C"/>
-                </a:solidFill>
-                <a:latin typeface="Be Vietnam Pro" pitchFamily="34" charset="0"/>
-                <a:ea typeface="Be Vietnam Pro" pitchFamily="34" charset="-122"/>
-                <a:cs typeface="Be Vietnam Pro" pitchFamily="34" charset="-120"/>
-              </a:rPr>
-              <a:t> này</a:t>
-            </a:r>
-            <a:r>
-              <a:rPr lang="en-US" sz="2400" dirty="0" spc="0" kern="0">
-                <a:solidFill>
-                  <a:srgbClr val="14161C"/>
-                </a:solidFill>
-                <a:latin typeface="Be Vietnam Pro" pitchFamily="34" charset="0"/>
-                <a:ea typeface="Be Vietnam Pro" pitchFamily="34" charset="-122"/>
-                <a:cs typeface="Be Vietnam Pro" pitchFamily="34" charset="-120"/>
-              </a:rPr>
-              <a:t> có</a:t>
-            </a:r>
-            <a:r>
-              <a:rPr lang="en-US" sz="2400" dirty="0" spc="1" kern="0">
-                <a:solidFill>
-                  <a:srgbClr val="14161C"/>
-                </a:solidFill>
-                <a:latin typeface="Be Vietnam Pro" pitchFamily="34" charset="0"/>
-                <a:ea typeface="Be Vietnam Pro" pitchFamily="34" charset="-122"/>
-                <a:cs typeface="Be Vietnam Pro" pitchFamily="34" charset="-120"/>
-              </a:rPr>
-              <a:t> thể</a:t>
-            </a:r>
-            <a:r>
-              <a:rPr lang="en-US" sz="2400" dirty="0" spc="-18" kern="0">
-                <a:solidFill>
-                  <a:srgbClr val="14161C"/>
-                </a:solidFill>
-                <a:latin typeface="Be Vietnam Pro" pitchFamily="34" charset="0"/>
-                <a:ea typeface="Be Vietnam Pro" pitchFamily="34" charset="-122"/>
-                <a:cs typeface="Be Vietnam Pro" pitchFamily="34" charset="-120"/>
-              </a:rPr>
-              <a:t> gây</a:t>
-            </a:r>
-            <a:r>
-              <a:rPr lang="en-US" sz="2400" dirty="0" spc="-14" kern="0">
-                <a:solidFill>
-                  <a:srgbClr val="14161C"/>
-                </a:solidFill>
-                <a:latin typeface="Be Vietnam Pro" pitchFamily="34" charset="0"/>
-                <a:ea typeface="Be Vietnam Pro" pitchFamily="34" charset="-122"/>
-                <a:cs typeface="Be Vietnam Pro" pitchFamily="34" charset="-120"/>
-              </a:rPr>
-              <a:t> tranh</a:t>
-            </a:r>
-            <a:r>
-              <a:rPr lang="en-US" sz="2400" dirty="0" spc="-1" kern="0">
-                <a:solidFill>
-                  <a:srgbClr val="14161C"/>
-                </a:solidFill>
-                <a:latin typeface="Be Vietnam Pro" pitchFamily="34" charset="0"/>
-                <a:ea typeface="Be Vietnam Pro" pitchFamily="34" charset="-122"/>
-                <a:cs typeface="Be Vietnam Pro" pitchFamily="34" charset="-120"/>
-              </a:rPr>
-              <a:t> cãi.</a:t>
+              <a:t> biên dịch</a:t>
+            </a:r>
+            <a:r>
+              <a:rPr lang="en-US" sz="2400" dirty="0" spc="3" kern="0">
+                <a:solidFill>
+                  <a:srgbClr val="14161C"/>
+                </a:solidFill>
+                <a:latin typeface="Be Vietnam Pro" pitchFamily="34" charset="0"/>
+                <a:ea typeface="Be Vietnam Pro" pitchFamily="34" charset="-122"/>
+                <a:cs typeface="Be Vietnam Pro" pitchFamily="34" charset="-120"/>
+              </a:rPr>
+              <a:t> dùng</a:t>
+            </a:r>
+            <a:r>
+              <a:rPr lang="en-US" sz="2400" dirty="0" spc="17" kern="0">
+                <a:solidFill>
+                  <a:srgbClr val="14161C"/>
+                </a:solidFill>
+                <a:latin typeface="Be Vietnam Pro" pitchFamily="34" charset="0"/>
+                <a:ea typeface="Be Vietnam Pro" pitchFamily="34" charset="-122"/>
+                <a:cs typeface="Be Vietnam Pro" pitchFamily="34" charset="-120"/>
+              </a:rPr>
+              <a:t> để</a:t>
+            </a:r>
+            <a:r>
+              <a:rPr lang="en-US" sz="2400" dirty="0" spc="14" kern="0">
+                <a:solidFill>
+                  <a:srgbClr val="14161C"/>
+                </a:solidFill>
+                <a:latin typeface="Be Vietnam Pro" pitchFamily="34" charset="0"/>
+                <a:ea typeface="Be Vietnam Pro" pitchFamily="34" charset="-122"/>
+                <a:cs typeface="Be Vietnam Pro" pitchFamily="34" charset="-120"/>
+              </a:rPr>
+              <a:t> đo.</a:t>
             </a:r>
             <a:endParaRPr lang="en-US" sz="2400" dirty="0"/>
           </a:p>
@@ -13662,7 +13271,29 @@
                 <a:ea typeface="Be Vietnam Pro" pitchFamily="34" charset="-122"/>
                 <a:cs typeface="Be Vietnam Pro" pitchFamily="34" charset="-120"/>
               </a:rPr>
-              <a:t> chỉ nói: gần</a:t>
+              <a:t> chỉ nói:</a:t>
+            </a:r>
+            <a:r>
+              <a:rPr lang="en-US" sz="2550" b="1" dirty="0" spc="3" kern="0">
+                <a:solidFill>
+                  <a:srgbClr val="14161C"/>
+                </a:solidFill>
+                <a:latin typeface="Be Vietnam Pro" pitchFamily="34" charset="0"/>
+                <a:ea typeface="Be Vietnam Pro" pitchFamily="34" charset="-122"/>
+                <a:cs typeface="Be Vietnam Pro" pitchFamily="34" charset="-120"/>
+              </a:rPr>
+              <a:t> 28</a:t>
+            </a:r>
+            <a:r>
+              <a:rPr lang="en-US" sz="2550" b="1" dirty="0" spc="1" kern="0">
+                <a:solidFill>
+                  <a:srgbClr val="14161C"/>
+                </a:solidFill>
+                <a:latin typeface="Be Vietnam Pro" pitchFamily="34" charset="0"/>
+                <a:ea typeface="Be Vietnam Pro" pitchFamily="34" charset="-122"/>
+                <a:cs typeface="Be Vietnam Pro" pitchFamily="34" charset="-120"/>
+              </a:rPr>
+              <a:t> thư</a:t>
             </a:r>
             <a:r>
               <a:rPr lang="en-US" sz="2550" b="1" dirty="0" spc="-2" kern="0">
@@ -13673,18 +13304,29 @@
                 <a:ea typeface="Be Vietnam Pro" pitchFamily="34" charset="-122"/>
                 <a:cs typeface="Be Vietnam Pro" pitchFamily="34" charset="-120"/>
               </a:rPr>
-              <a:t> ba</a:t>
-            </a:r>
-            <a:r>
-              <a:rPr lang="en-US" sz="2550" b="1" dirty="0" spc="16" kern="0">
-                <a:solidFill>
-                  <a:srgbClr val="14161C"/>
-                </a:solidFill>
-                <a:latin typeface="Be Vietnam Pro" pitchFamily="34" charset="0"/>
-                <a:ea typeface="Be Vietnam Pro" pitchFamily="34" charset="-122"/>
-                <a:cs typeface="Be Vietnam Pro" pitchFamily="34" charset="-120"/>
-              </a:rPr>
-              <a:t> mươi</a:t>
+              <a:t> mục</a:t>
+            </a:r>
+            <a:r>
+              <a:rPr lang="en-US" sz="2550" b="1" dirty="0" spc="-9" kern="0">
+                <a:solidFill>
+                  <a:srgbClr val="14161C"/>
+                </a:solidFill>
+                <a:latin typeface="Be Vietnam Pro" pitchFamily="34" charset="0"/>
+                <a:ea typeface="Be Vietnam Pro" pitchFamily="34" charset="-122"/>
+                <a:cs typeface="Be Vietnam Pro" pitchFamily="34" charset="-120"/>
+              </a:rPr>
+              <a:t> ngôn</a:t>
+            </a:r>
+            <a:r>
+              <a:rPr lang="en-US" sz="2550" b="1" dirty="0" spc="-3" kern="0">
+                <a:solidFill>
+                  <a:srgbClr val="14161C"/>
+                </a:solidFill>
+                <a:latin typeface="Be Vietnam Pro" pitchFamily="34" charset="0"/>
+                <a:ea typeface="Be Vietnam Pro" pitchFamily="34" charset="-122"/>
+                <a:cs typeface="Be Vietnam Pro" pitchFamily="34" charset="-120"/>
+              </a:rPr>
+              <a:t> ngữ</a:t>
             </a:r>
             <a:endParaRPr lang="en-US" sz="2550" dirty="0"/>
           </a:p>
@@ -15311,6 +14953,17 @@
               <a:buNone/>
             </a:pPr>
             <a:r>
+              <a:rPr lang="en-US" sz="2550" b="1" dirty="0" spc="-1" kern="0">
+                <a:solidFill>
+                  <a:srgbClr val="14161C"/>
+                </a:solidFill>
+                <a:latin typeface="Be Vietnam Pro" pitchFamily="34" charset="0"/>
+                <a:ea typeface="Be Vietnam Pro" pitchFamily="34" charset="-122"/>
+                <a:cs typeface="Be Vietnam Pro" pitchFamily="34" charset="-120"/>
+              </a:rPr>
+              <a:t>Hỏi</a:t>
+            </a:r>
+            <a:r>
               <a:rPr lang="en-US" sz="2550" b="1" dirty="0" spc="-2" kern="0">
                 <a:solidFill>
                   <a:srgbClr val="14161C"/>
@@ -15319,29 +14972,18 @@
                 <a:ea typeface="Be Vietnam Pro" pitchFamily="34" charset="-122"/>
                 <a:cs typeface="Be Vietnam Pro" pitchFamily="34" charset="-120"/>
               </a:rPr>
-              <a:t>Nhìn</a:t>
-            </a:r>
-            <a:r>
-              <a:rPr lang="en-US" sz="2550" b="1" dirty="0" spc="-4" kern="0">
-                <a:solidFill>
-                  <a:srgbClr val="14161C"/>
-                </a:solidFill>
-                <a:latin typeface="Be Vietnam Pro" pitchFamily="34" charset="0"/>
-                <a:ea typeface="Be Vietnam Pro" pitchFamily="34" charset="-122"/>
-                <a:cs typeface="Be Vietnam Pro" pitchFamily="34" charset="-120"/>
-              </a:rPr>
-              <a:t> đủ</a:t>
-            </a:r>
-            <a:r>
-              <a:rPr lang="en-US" sz="2550" b="1" dirty="0" spc="-3" kern="0">
-                <a:solidFill>
-                  <a:srgbClr val="14161C"/>
-                </a:solidFill>
-                <a:latin typeface="Be Vietnam Pro" pitchFamily="34" charset="0"/>
-                <a:ea typeface="Be Vietnam Pro" pitchFamily="34" charset="-122"/>
-                <a:cs typeface="Be Vietnam Pro" pitchFamily="34" charset="-120"/>
-              </a:rPr>
-              <a:t> cả</a:t>
+              <a:t> bảng</a:t>
+            </a:r>
+            <a:r>
+              <a:rPr lang="en-US" sz="2550" b="1" dirty="0" spc="5" kern="0">
+                <a:solidFill>
+                  <a:srgbClr val="14161C"/>
+                </a:solidFill>
+                <a:latin typeface="Be Vietnam Pro" pitchFamily="34" charset="0"/>
+                <a:ea typeface="Be Vietnam Pro" pitchFamily="34" charset="-122"/>
+                <a:cs typeface="Be Vietnam Pro" pitchFamily="34" charset="-120"/>
+              </a:rPr>
+              <a:t> đo</a:t>
             </a:r>
             <a:r>
               <a:rPr lang="en-US" sz="2550" b="1" dirty="0" spc="-2" kern="0">
@@ -15352,40 +14994,7 @@
                 <a:ea typeface="Be Vietnam Pro" pitchFamily="34" charset="-122"/>
                 <a:cs typeface="Be Vietnam Pro" pitchFamily="34" charset="-120"/>
               </a:rPr>
-              <a:t> ba</a:t>
-            </a:r>
-            <a:r>
-              <a:rPr lang="en-US" sz="2550" b="1" dirty="0" spc="-5" kern="0">
-                <a:solidFill>
-                  <a:srgbClr val="14161C"/>
-                </a:solidFill>
-                <a:latin typeface="Be Vietnam Pro" pitchFamily="34" charset="0"/>
-                <a:ea typeface="Be Vietnam Pro" pitchFamily="34" charset="-122"/>
-                <a:cs typeface="Be Vietnam Pro" pitchFamily="34" charset="-120"/>
-              </a:rPr>
-              <a:t> số</a:t>
-            </a:r>
-            <a:r>
-              <a:rPr lang="en-US" sz="2550" b="1" dirty="0" spc="3" kern="0">
-                <a:solidFill>
-                  <a:srgbClr val="14161C"/>
-                </a:solidFill>
-                <a:latin typeface="Be Vietnam Pro" pitchFamily="34" charset="0"/>
-                <a:ea typeface="Be Vietnam Pro" pitchFamily="34" charset="-122"/>
-                <a:cs typeface="Be Vietnam Pro" pitchFamily="34" charset="-120"/>
-              </a:rPr>
-              <a:t> đo,</a:t>
-            </a:r>
-            <a:r>
-              <a:rPr lang="en-US" sz="2550" b="1" dirty="0" spc="-6" kern="0">
-                <a:solidFill>
-                  <a:srgbClr val="14161C"/>
-                </a:solidFill>
-                <a:latin typeface="Be Vietnam Pro" pitchFamily="34" charset="0"/>
-                <a:ea typeface="Be Vietnam Pro" pitchFamily="34" charset="-122"/>
-                <a:cs typeface="Be Vietnam Pro" pitchFamily="34" charset="-120"/>
-              </a:rPr>
-              <a:t> không</a:t>
+              <a:t> bằng</a:t>
             </a:r>
             <a:r>
               <a:rPr lang="en-US" sz="2550" b="1" dirty="0" spc="2" kern="0">
@@ -15396,40 +15005,7 @@
                 <a:ea typeface="Be Vietnam Pro" pitchFamily="34" charset="-122"/>
                 <a:cs typeface="Be Vietnam Pro" pitchFamily="34" charset="-120"/>
               </a:rPr>
-              <a:t> riêng</a:t>
-            </a:r>
-            <a:r>
-              <a:rPr lang="en-US" sz="2550" b="1" dirty="0" spc="3" kern="0">
-                <a:solidFill>
-                  <a:srgbClr val="14161C"/>
-                </a:solidFill>
-                <a:latin typeface="Be Vietnam Pro" pitchFamily="34" charset="0"/>
-                <a:ea typeface="Be Vietnam Pro" pitchFamily="34" charset="-122"/>
-                <a:cs typeface="Be Vietnam Pro" pitchFamily="34" charset="-120"/>
-              </a:rPr>
-              <a:t> thời</a:t>
-            </a:r>
-            <a:r>
-              <a:rPr lang="en-US" sz="2550" b="1" dirty="0" spc="4" kern="0">
-                <a:solidFill>
-                  <a:srgbClr val="14161C"/>
-                </a:solidFill>
-                <a:latin typeface="Be Vietnam Pro" pitchFamily="34" charset="0"/>
-                <a:ea typeface="Be Vietnam Pro" pitchFamily="34" charset="-122"/>
-                <a:cs typeface="Be Vietnam Pro" pitchFamily="34" charset="-120"/>
-              </a:rPr>
-              <a:t> gian</a:t>
-            </a:r>
-            <a:r>
-              <a:rPr lang="en-US" sz="2550" b="1" dirty="0" spc="-8" kern="0">
-                <a:solidFill>
-                  <a:srgbClr val="14161C"/>
-                </a:solidFill>
-                <a:latin typeface="Be Vietnam Pro" pitchFamily="34" charset="0"/>
-                <a:ea typeface="Be Vietnam Pro" pitchFamily="34" charset="-122"/>
-                <a:cs typeface="Be Vietnam Pro" pitchFamily="34" charset="-120"/>
-              </a:rPr>
-              <a:t> chạy</a:t>
+              <a:t> cách nào</a:t>
             </a:r>
             <a:endParaRPr lang="en-US" sz="2550" dirty="0"/>
           </a:p>
@@ -15463,37 +15039,103 @@
               <a:buNone/>
             </a:pPr>
             <a:r>
-              <a:rPr lang="en-US" sz="2250" dirty="0" spc="-2" kern="0">
-                <a:solidFill>
-                  <a:srgbClr val="14161C"/>
-                </a:solidFill>
-                <a:latin typeface="Be Vietnam Pro" pitchFamily="34" charset="0"/>
-                <a:ea typeface="Be Vietnam Pro" pitchFamily="34" charset="-122"/>
-                <a:cs typeface="Be Vietnam Pro" pitchFamily="34" charset="-120"/>
-              </a:rPr>
-              <a:t>Nhanh</a:t>
-            </a:r>
-            <a:r>
-              <a:rPr lang="en-US" sz="2250" dirty="0" spc="1" kern="0">
-                <a:solidFill>
-                  <a:srgbClr val="14161C"/>
-                </a:solidFill>
-                <a:latin typeface="Be Vietnam Pro" pitchFamily="34" charset="0"/>
-                <a:ea typeface="Be Vietnam Pro" pitchFamily="34" charset="-122"/>
-                <a:cs typeface="Be Vietnam Pro" pitchFamily="34" charset="-120"/>
-              </a:rPr>
-              <a:t> hơn</a:t>
-            </a:r>
-            <a:r>
-              <a:rPr lang="en-US" sz="2250" dirty="0" spc="-9" kern="0">
-                <a:solidFill>
-                  <a:srgbClr val="14161C"/>
-                </a:solidFill>
-                <a:latin typeface="Be Vietnam Pro" pitchFamily="34" charset="0"/>
-                <a:ea typeface="Be Vietnam Pro" pitchFamily="34" charset="-122"/>
-                <a:cs typeface="Be Vietnam Pro" pitchFamily="34" charset="-120"/>
-              </a:rPr>
-              <a:t> hay</a:t>
+              <a:rPr lang="en-US" sz="2250" dirty="0" spc="-3" kern="0">
+                <a:solidFill>
+                  <a:srgbClr val="14161C"/>
+                </a:solidFill>
+                <a:latin typeface="Be Vietnam Pro" pitchFamily="34" charset="0"/>
+                <a:ea typeface="Be Vietnam Pro" pitchFamily="34" charset="-122"/>
+                <a:cs typeface="Be Vietnam Pro" pitchFamily="34" charset="-120"/>
+              </a:rPr>
+              <a:t>Thao</a:t>
+            </a:r>
+            <a:r>
+              <a:rPr lang="en-US" sz="2250" dirty="0" spc="-10" kern="0">
+                <a:solidFill>
+                  <a:srgbClr val="14161C"/>
+                </a:solidFill>
+                <a:latin typeface="Be Vietnam Pro" pitchFamily="34" charset="0"/>
+                <a:ea typeface="Be Vietnam Pro" pitchFamily="34" charset="-122"/>
+                <a:cs typeface="Be Vietnam Pro" pitchFamily="34" charset="-120"/>
+              </a:rPr>
+              <a:t> tác</a:t>
+            </a:r>
+            <a:r>
+              <a:rPr lang="en-US" sz="2250" dirty="0" spc="-1" kern="0">
+                <a:solidFill>
+                  <a:srgbClr val="14161C"/>
+                </a:solidFill>
+                <a:latin typeface="Be Vietnam Pro" pitchFamily="34" charset="0"/>
+                <a:ea typeface="Be Vietnam Pro" pitchFamily="34" charset="-122"/>
+                <a:cs typeface="Be Vietnam Pro" pitchFamily="34" charset="-120"/>
+              </a:rPr>
+              <a:t> nào</a:t>
+            </a:r>
+            <a:r>
+              <a:rPr lang="en-US" sz="2250" dirty="0" spc="15" kern="0">
+                <a:solidFill>
+                  <a:srgbClr val="14161C"/>
+                </a:solidFill>
+                <a:latin typeface="Be Vietnam Pro" pitchFamily="34" charset="0"/>
+                <a:ea typeface="Be Vietnam Pro" pitchFamily="34" charset="-122"/>
+                <a:cs typeface="Be Vietnam Pro" pitchFamily="34" charset="-120"/>
+              </a:rPr>
+              <a:t> đã</a:t>
+            </a:r>
+            <a:r>
+              <a:rPr lang="en-US" sz="2250" dirty="0" spc="-6" kern="0">
+                <a:solidFill>
+                  <a:srgbClr val="14161C"/>
+                </a:solidFill>
+                <a:latin typeface="Be Vietnam Pro" pitchFamily="34" charset="0"/>
+                <a:ea typeface="Be Vietnam Pro" pitchFamily="34" charset="-122"/>
+                <a:cs typeface="Be Vietnam Pro" pitchFamily="34" charset="-120"/>
+              </a:rPr>
+              <a:t> chạy,</a:t>
+            </a:r>
+            <a:r>
+              <a:rPr lang="en-US" sz="2250" dirty="0" spc="-19" kern="0">
+                <a:solidFill>
+                  <a:srgbClr val="14161C"/>
+                </a:solidFill>
+                <a:latin typeface="Be Vietnam Pro" pitchFamily="34" charset="0"/>
+                <a:ea typeface="Be Vietnam Pro" pitchFamily="34" charset="-122"/>
+                <a:cs typeface="Be Vietnam Pro" pitchFamily="34" charset="-120"/>
+              </a:rPr>
+              <a:t> trên</a:t>
+            </a:r>
+            <a:r>
+              <a:rPr lang="en-US" sz="2250" dirty="0" spc="-10" kern="0">
+                <a:solidFill>
+                  <a:srgbClr val="14161C"/>
+                </a:solidFill>
+                <a:latin typeface="Be Vietnam Pro" pitchFamily="34" charset="0"/>
+                <a:ea typeface="Be Vietnam Pro" pitchFamily="34" charset="-122"/>
+                <a:cs typeface="Be Vietnam Pro" pitchFamily="34" charset="-120"/>
+              </a:rPr>
+              <a:t> máy</a:t>
+            </a:r>
+            <a:r>
+              <a:rPr lang="en-US" sz="2250" dirty="0" spc="-16" kern="0">
+                <a:solidFill>
+                  <a:srgbClr val="14161C"/>
+                </a:solidFill>
+                <a:latin typeface="Be Vietnam Pro" pitchFamily="34" charset="0"/>
+                <a:ea typeface="Be Vietnam Pro" pitchFamily="34" charset="-122"/>
+                <a:cs typeface="Be Vietnam Pro" pitchFamily="34" charset="-120"/>
+              </a:rPr>
+              <a:t> và</a:t>
+            </a:r>
+            <a:r>
+              <a:rPr lang="en-US" sz="2250" dirty="0" spc="7" kern="0">
+                <a:solidFill>
+                  <a:srgbClr val="14161C"/>
+                </a:solidFill>
+                <a:latin typeface="Be Vietnam Pro" pitchFamily="34" charset="0"/>
+                <a:ea typeface="Be Vietnam Pro" pitchFamily="34" charset="-122"/>
+                <a:cs typeface="Be Vietnam Pro" pitchFamily="34" charset="-120"/>
+              </a:rPr>
+              <a:t> trình</a:t>
             </a:r>
             <a:r>
               <a:rPr lang="en-US" sz="2250" dirty="0" spc="0" kern="0">
@@ -15504,51 +15146,18 @@
                 <a:ea typeface="Be Vietnam Pro" pitchFamily="34" charset="-122"/>
                 <a:cs typeface="Be Vietnam Pro" pitchFamily="34" charset="-120"/>
               </a:rPr>
-              <a:t> chậm hơn</a:t>
-            </a:r>
-            <a:r>
-              <a:rPr lang="en-US" sz="2250" dirty="0" spc="1" kern="0">
-                <a:solidFill>
-                  <a:srgbClr val="14161C"/>
-                </a:solidFill>
-                <a:latin typeface="Be Vietnam Pro" pitchFamily="34" charset="0"/>
-                <a:ea typeface="Be Vietnam Pro" pitchFamily="34" charset="-122"/>
-                <a:cs typeface="Be Vietnam Pro" pitchFamily="34" charset="-120"/>
-              </a:rPr>
-              <a:t> không</a:t>
-            </a:r>
-            <a:r>
-              <a:rPr lang="en-US" sz="2250" dirty="0" spc="5" kern="0">
-                <a:solidFill>
-                  <a:srgbClr val="14161C"/>
-                </a:solidFill>
-                <a:latin typeface="Be Vietnam Pro" pitchFamily="34" charset="0"/>
-                <a:ea typeface="Be Vietnam Pro" pitchFamily="34" charset="-122"/>
-                <a:cs typeface="Be Vietnam Pro" pitchFamily="34" charset="-120"/>
-              </a:rPr>
-              <a:t> đương</a:t>
-            </a:r>
-            <a:r>
-              <a:rPr lang="en-US" sz="2250" dirty="0" spc="-1" kern="0">
-                <a:solidFill>
-                  <a:srgbClr val="14161C"/>
-                </a:solidFill>
-                <a:latin typeface="Be Vietnam Pro" pitchFamily="34" charset="0"/>
-                <a:ea typeface="Be Vietnam Pro" pitchFamily="34" charset="-122"/>
-                <a:cs typeface="Be Vietnam Pro" pitchFamily="34" charset="-120"/>
-              </a:rPr>
-              <a:t> nhiên</a:t>
-            </a:r>
-            <a:r>
-              <a:rPr lang="en-US" sz="2250" dirty="0" spc="-8" kern="0">
-                <a:solidFill>
-                  <a:srgbClr val="14161C"/>
-                </a:solidFill>
-                <a:latin typeface="Be Vietnam Pro" pitchFamily="34" charset="0"/>
-                <a:ea typeface="Be Vietnam Pro" pitchFamily="34" charset="-122"/>
-                <a:cs typeface="Be Vietnam Pro" pitchFamily="34" charset="-120"/>
-              </a:rPr>
-              <a:t> tốn</a:t>
+              <a:t> biên</a:t>
+            </a:r>
+            <a:r>
+              <a:rPr lang="en-US" sz="2250" dirty="0" spc="2" kern="0">
+                <a:solidFill>
+                  <a:srgbClr val="14161C"/>
+                </a:solidFill>
+                <a:latin typeface="Be Vietnam Pro" pitchFamily="34" charset="0"/>
+                <a:ea typeface="Be Vietnam Pro" pitchFamily="34" charset="-122"/>
+                <a:cs typeface="Be Vietnam Pro" pitchFamily="34" charset="-120"/>
+              </a:rPr>
+              <a:t> dịch</a:t>
             </a:r>
             <a:r>
               <a:rPr lang="en-US" sz="2250" dirty="0" spc="0" kern="0">
@@ -15559,62 +15168,7 @@
                 <a:ea typeface="Be Vietnam Pro" pitchFamily="34" charset="-122"/>
                 <a:cs typeface="Be Vietnam Pro" pitchFamily="34" charset="-120"/>
               </a:rPr>
-              <a:t> ít</a:t>
-            </a:r>
-            <a:r>
-              <a:rPr lang="en-US" sz="2250" dirty="0" spc="-9" kern="0">
-                <a:solidFill>
-                  <a:srgbClr val="14161C"/>
-                </a:solidFill>
-                <a:latin typeface="Be Vietnam Pro" pitchFamily="34" charset="0"/>
-                <a:ea typeface="Be Vietnam Pro" pitchFamily="34" charset="-122"/>
-                <a:cs typeface="Be Vietnam Pro" pitchFamily="34" charset="-120"/>
-              </a:rPr>
-              <a:t> hay</a:t>
-            </a:r>
-            <a:r>
-              <a:rPr lang="en-US" sz="2250" dirty="0" spc="-1" kern="0">
-                <a:solidFill>
-                  <a:srgbClr val="14161C"/>
-                </a:solidFill>
-                <a:latin typeface="Be Vietnam Pro" pitchFamily="34" charset="0"/>
-                <a:ea typeface="Be Vietnam Pro" pitchFamily="34" charset="-122"/>
-                <a:cs typeface="Be Vietnam Pro" pitchFamily="34" charset="-120"/>
-              </a:rPr>
-              <a:t> nhiều</a:t>
-            </a:r>
-            <a:r>
-              <a:rPr lang="en-US" sz="2250" dirty="0" spc="0" kern="0">
-                <a:solidFill>
-                  <a:srgbClr val="14161C"/>
-                </a:solidFill>
-                <a:latin typeface="Be Vietnam Pro" pitchFamily="34" charset="0"/>
-                <a:ea typeface="Be Vietnam Pro" pitchFamily="34" charset="-122"/>
-                <a:cs typeface="Be Vietnam Pro" pitchFamily="34" charset="-120"/>
-              </a:rPr>
-              <a:t> năng</a:t>
-            </a:r>
-            <a:r>
-              <a:rPr lang="en-US" sz="2250" dirty="0" spc="6" kern="0">
-                <a:solidFill>
-                  <a:srgbClr val="14161C"/>
-                </a:solidFill>
-                <a:latin typeface="Be Vietnam Pro" pitchFamily="34" charset="0"/>
-                <a:ea typeface="Be Vietnam Pro" pitchFamily="34" charset="-122"/>
-                <a:cs typeface="Be Vietnam Pro" pitchFamily="34" charset="-120"/>
-              </a:rPr>
-              <a:t> lượng</a:t>
-            </a:r>
-            <a:r>
-              <a:rPr lang="en-US" sz="2250" dirty="0" spc="2" kern="0">
-                <a:solidFill>
-                  <a:srgbClr val="14161C"/>
-                </a:solidFill>
-                <a:latin typeface="Be Vietnam Pro" pitchFamily="34" charset="0"/>
-                <a:ea typeface="Be Vietnam Pro" pitchFamily="34" charset="-122"/>
-                <a:cs typeface="Be Vietnam Pro" pitchFamily="34" charset="-120"/>
-              </a:rPr>
-              <a:t> hơn.</a:t>
+              <a:t> nào.</a:t>
             </a:r>
             <a:endParaRPr lang="en-US" sz="2250" dirty="0"/>
           </a:p>
@@ -17547,40 +17101,7 @@
                 <a:ea typeface="Bricolage Grotesque ExtraBold" pitchFamily="34" charset="-122"/>
                 <a:cs typeface="Bricolage Grotesque ExtraBold" pitchFamily="34" charset="-120"/>
               </a:rPr>
-              <a:t>Năng</a:t>
-            </a:r>
-            <a:r>
-              <a:rPr lang="en-US" sz="3900" dirty="0" spc="-41" kern="0">
-                <a:solidFill>
-                  <a:srgbClr val="3DD6A0"/>
-                </a:solidFill>
-                <a:latin typeface="Bricolage Grotesque ExtraBold" pitchFamily="34" charset="0"/>
-                <a:ea typeface="Bricolage Grotesque ExtraBold" pitchFamily="34" charset="-122"/>
-                <a:cs typeface="Bricolage Grotesque ExtraBold" pitchFamily="34" charset="-120"/>
-              </a:rPr>
-              <a:t> lượng</a:t>
-            </a:r>
-            <a:r>
-              <a:rPr lang="en-US" sz="3900" dirty="0" spc="2" kern="0">
-                <a:solidFill>
-                  <a:srgbClr val="3DD6A0"/>
-                </a:solidFill>
-                <a:latin typeface="Bricolage Grotesque ExtraBold" pitchFamily="34" charset="0"/>
-                <a:ea typeface="Bricolage Grotesque ExtraBold" pitchFamily="34" charset="-122"/>
-                <a:cs typeface="Bricolage Grotesque ExtraBold" pitchFamily="34" charset="-120"/>
-              </a:rPr>
-              <a:t> tiêu</a:t>
-            </a:r>
-            <a:r>
-              <a:rPr lang="en-US" sz="3900" dirty="0" spc="0" kern="0">
-                <a:solidFill>
-                  <a:srgbClr val="3DD6A0"/>
-                </a:solidFill>
-                <a:latin typeface="Bricolage Grotesque ExtraBold" pitchFamily="34" charset="0"/>
-                <a:ea typeface="Bricolage Grotesque ExtraBold" pitchFamily="34" charset="-122"/>
-                <a:cs typeface="Bricolage Grotesque ExtraBold" pitchFamily="34" charset="-120"/>
-              </a:rPr>
-              <a:t> thụ</a:t>
+              <a:t>RAPL</a:t>
             </a:r>
             <a:endParaRPr lang="en-US" sz="3900" dirty="0"/>
           </a:p>
@@ -17611,7 +17132,7 @@
               <a:buNone/>
             </a:pPr>
             <a:r>
-              <a:rPr lang="en-US" sz="2100" b="1" dirty="0" spc="-11" kern="0">
+              <a:rPr lang="en-US" sz="2100" b="1" dirty="0" spc="-3" kern="0">
                 <a:solidFill>
                   <a:srgbClr val="9AA0B5"/>
                 </a:solidFill>
@@ -17619,10 +17140,10 @@
                 <a:ea typeface="Be Vietnam Pro" pitchFamily="34" charset="-122"/>
                 <a:cs typeface="Be Vietnam Pro" pitchFamily="34" charset="-120"/>
               </a:rPr>
-              <a:t>energy</a:t>
-            </a:r>
-            <a:r>
-              <a:rPr lang="en-US" sz="2100" b="1" dirty="0" spc="-7" kern="0">
+              <a:t>khung</a:t>
+            </a:r>
+            <a:r>
+              <a:rPr lang="en-US" sz="2100" b="1" dirty="0" spc="2" kern="0">
                 <a:solidFill>
                   <a:srgbClr val="9AA0B5"/>
                 </a:solidFill>
@@ -17630,7 +17151,29 @@
                 <a:ea typeface="Be Vietnam Pro" pitchFamily="34" charset="-122"/>
                 <a:cs typeface="Be Vietnam Pro" pitchFamily="34" charset="-120"/>
               </a:rPr>
-              <a:t> consumption</a:t>
+              <a:t> đo</a:t>
+            </a:r>
+            <a:r>
+              <a:rPr lang="en-US" sz="2100" b="1" dirty="0" spc="-2" kern="0">
+                <a:solidFill>
+                  <a:srgbClr val="9AA0B5"/>
+                </a:solidFill>
+                <a:latin typeface="Be Vietnam Pro" pitchFamily="34" charset="0"/>
+                <a:ea typeface="Be Vietnam Pro" pitchFamily="34" charset="-122"/>
+                <a:cs typeface="Be Vietnam Pro" pitchFamily="34" charset="-120"/>
+              </a:rPr>
+              <a:t> năng</a:t>
+            </a:r>
+            <a:r>
+              <a:rPr lang="en-US" sz="2100" b="1" dirty="0" spc="5" kern="0">
+                <a:solidFill>
+                  <a:srgbClr val="9AA0B5"/>
+                </a:solidFill>
+                <a:latin typeface="Be Vietnam Pro" pitchFamily="34" charset="0"/>
+                <a:ea typeface="Be Vietnam Pro" pitchFamily="34" charset="-122"/>
+                <a:cs typeface="Be Vietnam Pro" pitchFamily="34" charset="-120"/>
+              </a:rPr>
+              <a:t> lượng</a:t>
             </a:r>
             <a:endParaRPr lang="en-US" sz="2100" dirty="0"/>
           </a:p>
@@ -17664,7 +17207,7 @@
               <a:buNone/>
             </a:pPr>
             <a:r>
-              <a:rPr lang="en-US" sz="2400" dirty="0" spc="1" kern="0">
+              <a:rPr lang="en-US" sz="2400" dirty="0" spc="-3" kern="0">
                 <a:solidFill>
                   <a:srgbClr val="C4C8D6"/>
                 </a:solidFill>
@@ -17672,10 +17215,10 @@
                 <a:ea typeface="Be Vietnam Pro" pitchFamily="34" charset="-122"/>
                 <a:cs typeface="Be Vietnam Pro" pitchFamily="34" charset="-120"/>
               </a:rPr>
-              <a:t>Số</a:t>
-            </a:r>
-            <a:r>
-              <a:rPr lang="en-US" sz="2400" dirty="0" spc="18" kern="0">
+              <a:t>Đọc</a:t>
+            </a:r>
+            <a:r>
+              <a:rPr lang="en-US" sz="2400" dirty="0" spc="2" kern="0">
                 <a:solidFill>
                   <a:srgbClr val="C4C8D6"/>
                 </a:solidFill>
@@ -17683,10 +17226,10 @@
                 <a:ea typeface="Be Vietnam Pro" pitchFamily="34" charset="-122"/>
                 <a:cs typeface="Be Vietnam Pro" pitchFamily="34" charset="-120"/>
               </a:rPr>
-              <a:t> đo</a:t>
-            </a:r>
-            <a:r>
-              <a:rPr lang="en-US" sz="2400" dirty="0" spc="4" kern="0">
+              <a:t> năng</a:t>
+            </a:r>
+            <a:r>
+              <a:rPr lang="en-US" sz="2400" dirty="0" spc="7" kern="0">
                 <a:solidFill>
                   <a:srgbClr val="C4C8D6"/>
                 </a:solidFill>
@@ -17694,10 +17237,10 @@
                 <a:ea typeface="Be Vietnam Pro" pitchFamily="34" charset="-122"/>
                 <a:cs typeface="Be Vietnam Pro" pitchFamily="34" charset="-120"/>
               </a:rPr>
-              <a:t> mà</a:t>
-            </a:r>
-            <a:r>
-              <a:rPr lang="en-US" sz="2400" dirty="0" spc="6" kern="0">
+              <a:t> lượng</a:t>
+            </a:r>
+            <a:r>
+              <a:rPr lang="en-US" sz="2400" dirty="0" spc="-2" kern="0">
                 <a:solidFill>
                   <a:srgbClr val="C4C8D6"/>
                 </a:solidFill>
@@ -17705,10 +17248,10 @@
                 <a:ea typeface="Be Vietnam Pro" pitchFamily="34" charset="-122"/>
                 <a:cs typeface="Be Vietnam Pro" pitchFamily="34" charset="-120"/>
               </a:rPr>
-              <a:t> người</a:t>
-            </a:r>
-            <a:r>
-              <a:rPr lang="en-US" sz="2400" dirty="0" spc="-6" kern="0">
+              <a:t> khi</a:t>
+            </a:r>
+            <a:r>
+              <a:rPr lang="en-US" sz="2400" dirty="0" spc="-7" kern="0">
                 <a:solidFill>
                   <a:srgbClr val="C4C8D6"/>
                 </a:solidFill>
@@ -17716,10 +17259,10 @@
                 <a:ea typeface="Be Vietnam Pro" pitchFamily="34" charset="-122"/>
                 <a:cs typeface="Be Vietnam Pro" pitchFamily="34" charset="-120"/>
               </a:rPr>
-              <a:t> viết</a:t>
-            </a:r>
-            <a:r>
-              <a:rPr lang="en-US" sz="2400" dirty="0" spc="2" kern="0">
+              <a:t> chạy</a:t>
+            </a:r>
+            <a:r>
+              <a:rPr lang="en-US" sz="2400" dirty="0" spc="23" kern="0">
                 <a:solidFill>
                   <a:srgbClr val="C4C8D6"/>
                 </a:solidFill>
@@ -17727,10 +17270,10 @@
                 <a:ea typeface="Be Vietnam Pro" pitchFamily="34" charset="-122"/>
                 <a:cs typeface="Be Vietnam Pro" pitchFamily="34" charset="-120"/>
               </a:rPr>
-              <a:t> phần</a:t>
-            </a:r>
-            <a:r>
-              <a:rPr lang="en-US" sz="2400" dirty="0" spc="3" kern="0">
+              <a:t> từng</a:t>
+            </a:r>
+            <a:r>
+              <a:rPr lang="en-US" sz="2400" dirty="0" spc="-2" kern="0">
                 <a:solidFill>
                   <a:srgbClr val="C4C8D6"/>
                 </a:solidFill>
@@ -17738,29 +17281,7 @@
                 <a:ea typeface="Be Vietnam Pro" pitchFamily="34" charset="-122"/>
                 <a:cs typeface="Be Vietnam Pro" pitchFamily="34" charset="-120"/>
               </a:rPr>
-              <a:t> mềm</a:t>
-            </a:r>
-            <a:r>
-              <a:rPr lang="en-US" sz="2400" dirty="0" spc="1" kern="0">
-                <a:solidFill>
-                  <a:srgbClr val="C4C8D6"/>
-                </a:solidFill>
-                <a:latin typeface="Be Vietnam Pro" pitchFamily="34" charset="0"/>
-                <a:ea typeface="Be Vietnam Pro" pitchFamily="34" charset="-122"/>
-                <a:cs typeface="Be Vietnam Pro" pitchFamily="34" charset="-120"/>
-              </a:rPr>
-              <a:t> quan</a:t>
-            </a:r>
-            <a:r>
-              <a:rPr lang="en-US" sz="2400" dirty="0" spc="-7" kern="0">
-                <a:solidFill>
-                  <a:srgbClr val="C4C8D6"/>
-                </a:solidFill>
-                <a:latin typeface="Be Vietnam Pro" pitchFamily="34" charset="0"/>
-                <a:ea typeface="Be Vietnam Pro" pitchFamily="34" charset="-122"/>
-                <a:cs typeface="Be Vietnam Pro" pitchFamily="34" charset="-120"/>
-              </a:rPr>
-              <a:t> tâm.</a:t>
+              <a:t> bài.</a:t>
             </a:r>
             <a:endParaRPr lang="en-US" sz="2400" dirty="0"/>
           </a:p>
@@ -17971,6 +17492,17 @@
               <a:buNone/>
             </a:pPr>
             <a:r>
+              <a:rPr lang="en-US" sz="2100" dirty="0" spc="0" kern="0">
+                <a:solidFill>
+                  <a:srgbClr val="C4C8D6"/>
+                </a:solidFill>
+                <a:latin typeface="Be Vietnam Pro" pitchFamily="34" charset="0"/>
+                <a:ea typeface="Be Vietnam Pro" pitchFamily="34" charset="-122"/>
+                <a:cs typeface="Be Vietnam Pro" pitchFamily="34" charset="-120"/>
+              </a:rPr>
+              <a:t>Câu</a:t>
+            </a:r>
+            <a:r>
               <a:rPr lang="en-US" sz="2100" dirty="0" spc="-2" kern="0">
                 <a:solidFill>
                   <a:srgbClr val="C4C8D6"/>
@@ -17979,7 +17511,84 @@
                 <a:ea typeface="Be Vietnam Pro" pitchFamily="34" charset="-122"/>
                 <a:cs typeface="Be Vietnam Pro" pitchFamily="34" charset="-120"/>
               </a:rPr>
-              <a:t>Đoạn</a:t>
+              <a:t> hỏi</a:t>
+            </a:r>
+            <a:r>
+              <a:rPr lang="en-US" sz="2100" dirty="0" spc="-15" kern="0">
+                <a:solidFill>
+                  <a:srgbClr val="C4C8D6"/>
+                </a:solidFill>
+                <a:latin typeface="Be Vietnam Pro" pitchFamily="34" charset="0"/>
+                <a:ea typeface="Be Vietnam Pro" pitchFamily="34" charset="-122"/>
+                <a:cs typeface="Be Vietnam Pro" pitchFamily="34" charset="-120"/>
+              </a:rPr>
+              <a:t> về</a:t>
+            </a:r>
+            <a:r>
+              <a:rPr lang="en-US" sz="2100" dirty="0" spc="-9" kern="0">
+                <a:solidFill>
+                  <a:srgbClr val="C4C8D6"/>
+                </a:solidFill>
+                <a:latin typeface="Be Vietnam Pro" pitchFamily="34" charset="0"/>
+                <a:ea typeface="Be Vietnam Pro" pitchFamily="34" charset="-122"/>
+                <a:cs typeface="Be Vietnam Pro" pitchFamily="34" charset="-120"/>
+              </a:rPr>
+              <a:t> ngôn</a:t>
+            </a:r>
+            <a:r>
+              <a:rPr lang="en-US" sz="2100" dirty="0" spc="1" kern="0">
+                <a:solidFill>
+                  <a:srgbClr val="C4C8D6"/>
+                </a:solidFill>
+                <a:latin typeface="Be Vietnam Pro" pitchFamily="34" charset="0"/>
+                <a:ea typeface="Be Vietnam Pro" pitchFamily="34" charset="-122"/>
+                <a:cs typeface="Be Vietnam Pro" pitchFamily="34" charset="-120"/>
+              </a:rPr>
+              <a:t> ngữ</a:t>
+            </a:r>
+            <a:r>
+              <a:rPr lang="en-US" sz="2100" dirty="0" spc="-12" kern="0">
+                <a:solidFill>
+                  <a:srgbClr val="C4C8D6"/>
+                </a:solidFill>
+                <a:latin typeface="Be Vietnam Pro" pitchFamily="34" charset="0"/>
+                <a:ea typeface="Be Vietnam Pro" pitchFamily="34" charset="-122"/>
+                <a:cs typeface="Be Vietnam Pro" pitchFamily="34" charset="-120"/>
+              </a:rPr>
+              <a:t> xanh;</a:t>
+            </a:r>
+            <a:r>
+              <a:rPr lang="en-US" sz="2100" dirty="0" spc="1" kern="0">
+                <a:solidFill>
+                  <a:srgbClr val="C4C8D6"/>
+                </a:solidFill>
+                <a:latin typeface="Be Vietnam Pro" pitchFamily="34" charset="0"/>
+                <a:ea typeface="Be Vietnam Pro" pitchFamily="34" charset="-122"/>
+                <a:cs typeface="Be Vietnam Pro" pitchFamily="34" charset="-120"/>
+              </a:rPr>
+              <a:t> README</a:t>
+            </a:r>
+            <a:r>
+              <a:rPr lang="en-US" sz="2100" dirty="0" spc="-1" kern="0">
+                <a:solidFill>
+                  <a:srgbClr val="C4C8D6"/>
+                </a:solidFill>
+                <a:latin typeface="Be Vietnam Pro" pitchFamily="34" charset="0"/>
+                <a:ea typeface="Be Vietnam Pro" pitchFamily="34" charset="-122"/>
+                <a:cs typeface="Be Vietnam Pro" pitchFamily="34" charset="-120"/>
+              </a:rPr>
+              <a:t> kho</a:t>
+            </a:r>
+            <a:r>
+              <a:rPr lang="en-US" sz="2100" dirty="0" spc="-13" kern="0">
+                <a:solidFill>
+                  <a:srgbClr val="C4C8D6"/>
+                </a:solidFill>
+                <a:latin typeface="Be Vietnam Pro" pitchFamily="34" charset="0"/>
+                <a:ea typeface="Be Vietnam Pro" pitchFamily="34" charset="-122"/>
+                <a:cs typeface="Be Vietnam Pro" pitchFamily="34" charset="-120"/>
+              </a:rPr>
+              <a:t> Energy-Languages</a:t>
             </a:r>
             <a:r>
               <a:rPr lang="en-US" sz="2100" dirty="0" spc="-3" kern="0">
@@ -17990,10 +17599,10 @@
                 <a:ea typeface="Be Vietnam Pro" pitchFamily="34" charset="-122"/>
                 <a:cs typeface="Be Vietnam Pro" pitchFamily="34" charset="-120"/>
               </a:rPr>
-              <a:t> dẫn</a:t>
-            </a:r>
-            <a:r>
-              <a:rPr lang="en-US" sz="2100" dirty="0" spc="-17" kern="0">
+              <a:t> (bài</a:t>
+            </a:r>
+            <a:r>
+              <a:rPr lang="en-US" sz="2100" dirty="0" spc="-11" kern="0">
                 <a:solidFill>
                   <a:srgbClr val="C4C8D6"/>
                 </a:solidFill>
@@ -18001,10 +17610,10 @@
                 <a:ea typeface="Be Vietnam Pro" pitchFamily="34" charset="-122"/>
                 <a:cs typeface="Be Vietnam Pro" pitchFamily="34" charset="-120"/>
               </a:rPr>
-              <a:t> và</a:t>
-            </a:r>
-            <a:r>
-              <a:rPr lang="en-US" sz="2100" dirty="0" spc="-2" kern="0">
+              <a:t> toán,</a:t>
+            </a:r>
+            <a:r>
+              <a:rPr lang="en-US" sz="2100" dirty="0" spc="-1" kern="0">
                 <a:solidFill>
                   <a:srgbClr val="C4C8D6"/>
                 </a:solidFill>
@@ -18012,10 +17621,10 @@
                 <a:ea typeface="Be Vietnam Pro" pitchFamily="34" charset="-122"/>
                 <a:cs typeface="Be Vietnam Pro" pitchFamily="34" charset="-120"/>
               </a:rPr>
-              <a:t> phần</a:t>
-            </a:r>
-            <a:r>
-              <a:rPr lang="en-US" sz="2100" dirty="0" spc="-14" kern="0">
+              <a:t> thao</a:t>
+            </a:r>
+            <a:r>
+              <a:rPr lang="en-US" sz="2100" dirty="0" spc="-11" kern="0">
                 <a:solidFill>
                   <a:srgbClr val="C4C8D6"/>
                 </a:solidFill>
@@ -18023,10 +17632,10 @@
                 <a:ea typeface="Be Vietnam Pro" pitchFamily="34" charset="-122"/>
                 <a:cs typeface="Be Vietnam Pro" pitchFamily="34" charset="-120"/>
               </a:rPr>
-              <a:t> tóm</a:t>
-            </a:r>
-            <a:r>
-              <a:rPr lang="en-US" sz="2100" dirty="0" spc="-23" kern="0">
+              <a:t> tác,</a:t>
+            </a:r>
+            <a:r>
+              <a:rPr lang="en-US" sz="2100" dirty="0" spc="-1" kern="0">
                 <a:solidFill>
                   <a:srgbClr val="C4C8D6"/>
                 </a:solidFill>
@@ -18034,10 +17643,10 @@
                 <a:ea typeface="Be Vietnam Pro" pitchFamily="34" charset="-122"/>
                 <a:cs typeface="Be Vietnam Pro" pitchFamily="34" charset="-120"/>
               </a:rPr>
-              <a:t> tắt</a:t>
-            </a:r>
-            <a:r>
-              <a:rPr lang="en-US" sz="2100" dirty="0" spc="1" kern="0">
+              <a:t> RAPL).</a:t>
+            </a:r>
+            <a:r>
+              <a:rPr lang="en-US" sz="2100" dirty="0" spc="5" kern="0">
                 <a:solidFill>
                   <a:srgbClr val="C4C8D6"/>
                 </a:solidFill>
@@ -18045,139 +17654,7 @@
                 <a:ea typeface="Be Vietnam Pro" pitchFamily="34" charset="-122"/>
                 <a:cs typeface="Be Vietnam Pro" pitchFamily="34" charset="-120"/>
               </a:rPr>
-              <a:t> nghiên</a:t>
-            </a:r>
-            <a:r>
-              <a:rPr lang="en-US" sz="2100" dirty="0" spc="16" kern="0">
-                <a:solidFill>
-                  <a:srgbClr val="C4C8D6"/>
-                </a:solidFill>
-                <a:latin typeface="Be Vietnam Pro" pitchFamily="34" charset="0"/>
-                <a:ea typeface="Be Vietnam Pro" pitchFamily="34" charset="-122"/>
-                <a:cs typeface="Be Vietnam Pro" pitchFamily="34" charset="-120"/>
-              </a:rPr>
-              <a:t> cứu</a:t>
-            </a:r>
-            <a:r>
-              <a:rPr lang="en-US" sz="2100" dirty="0" spc="-15" kern="0">
-                <a:solidFill>
-                  <a:srgbClr val="C4C8D6"/>
-                </a:solidFill>
-                <a:latin typeface="Be Vietnam Pro" pitchFamily="34" charset="0"/>
-                <a:ea typeface="Be Vietnam Pro" pitchFamily="34" charset="-122"/>
-                <a:cs typeface="Be Vietnam Pro" pitchFamily="34" charset="-120"/>
-              </a:rPr>
-              <a:t> về</a:t>
-            </a:r>
-            <a:r>
-              <a:rPr lang="en-US" sz="2100" dirty="0" spc="-2" kern="0">
-                <a:solidFill>
-                  <a:srgbClr val="C4C8D6"/>
-                </a:solidFill>
-                <a:latin typeface="Be Vietnam Pro" pitchFamily="34" charset="0"/>
-                <a:ea typeface="Be Vietnam Pro" pitchFamily="34" charset="-122"/>
-                <a:cs typeface="Be Vietnam Pro" pitchFamily="34" charset="-120"/>
-              </a:rPr>
-              <a:t> thời</a:t>
-            </a:r>
-            <a:r>
-              <a:rPr lang="en-US" sz="2100" dirty="0" spc="1" kern="0">
-                <a:solidFill>
-                  <a:srgbClr val="C4C8D6"/>
-                </a:solidFill>
-                <a:latin typeface="Be Vietnam Pro" pitchFamily="34" charset="0"/>
-                <a:ea typeface="Be Vietnam Pro" pitchFamily="34" charset="-122"/>
-                <a:cs typeface="Be Vietnam Pro" pitchFamily="34" charset="-120"/>
-              </a:rPr>
-              <a:t> gian</a:t>
-            </a:r>
-            <a:r>
-              <a:rPr lang="en-US" sz="2100" dirty="0" spc="-7" kern="0">
-                <a:solidFill>
-                  <a:srgbClr val="C4C8D6"/>
-                </a:solidFill>
-                <a:latin typeface="Be Vietnam Pro" pitchFamily="34" charset="0"/>
-                <a:ea typeface="Be Vietnam Pro" pitchFamily="34" charset="-122"/>
-                <a:cs typeface="Be Vietnam Pro" pitchFamily="34" charset="-120"/>
-              </a:rPr>
-              <a:t> chạy,</a:t>
-            </a:r>
-            <a:r>
-              <a:rPr lang="en-US" sz="2100" dirty="0" spc="-10" kern="0">
-                <a:solidFill>
-                  <a:srgbClr val="C4C8D6"/>
-                </a:solidFill>
-                <a:latin typeface="Be Vietnam Pro" pitchFamily="34" charset="0"/>
-                <a:ea typeface="Be Vietnam Pro" pitchFamily="34" charset="-122"/>
-                <a:cs typeface="Be Vietnam Pro" pitchFamily="34" charset="-120"/>
-              </a:rPr>
-              <a:t> bộ</a:t>
-            </a:r>
-            <a:r>
-              <a:rPr lang="en-US" sz="2100" dirty="0" spc="-2" kern="0">
-                <a:solidFill>
-                  <a:srgbClr val="C4C8D6"/>
-                </a:solidFill>
-                <a:latin typeface="Be Vietnam Pro" pitchFamily="34" charset="0"/>
-                <a:ea typeface="Be Vietnam Pro" pitchFamily="34" charset="-122"/>
-                <a:cs typeface="Be Vietnam Pro" pitchFamily="34" charset="-120"/>
-              </a:rPr>
-              <a:t> nhớ</a:t>
-            </a:r>
-            <a:r>
-              <a:rPr lang="en-US" sz="2100" dirty="0" spc="-17" kern="0">
-                <a:solidFill>
-                  <a:srgbClr val="C4C8D6"/>
-                </a:solidFill>
-                <a:latin typeface="Be Vietnam Pro" pitchFamily="34" charset="0"/>
-                <a:ea typeface="Be Vietnam Pro" pitchFamily="34" charset="-122"/>
-                <a:cs typeface="Be Vietnam Pro" pitchFamily="34" charset="-120"/>
-              </a:rPr>
-              <a:t> và</a:t>
-            </a:r>
-            <a:r>
-              <a:rPr lang="en-US" sz="2100" dirty="0" spc="0" kern="0">
-                <a:solidFill>
-                  <a:srgbClr val="C4C8D6"/>
-                </a:solidFill>
-                <a:latin typeface="Be Vietnam Pro" pitchFamily="34" charset="0"/>
-                <a:ea typeface="Be Vietnam Pro" pitchFamily="34" charset="-122"/>
-                <a:cs typeface="Be Vietnam Pro" pitchFamily="34" charset="-120"/>
-              </a:rPr>
-              <a:t> năng</a:t>
-            </a:r>
-            <a:r>
-              <a:rPr lang="en-US" sz="2100" dirty="0" spc="3" kern="0">
-                <a:solidFill>
-                  <a:srgbClr val="C4C8D6"/>
-                </a:solidFill>
-                <a:latin typeface="Be Vietnam Pro" pitchFamily="34" charset="0"/>
-                <a:ea typeface="Be Vietnam Pro" pitchFamily="34" charset="-122"/>
-                <a:cs typeface="Be Vietnam Pro" pitchFamily="34" charset="-120"/>
-              </a:rPr>
-              <a:t> lượng.</a:t>
-            </a:r>
-            <a:r>
-              <a:rPr lang="en-US" sz="2100" dirty="0" spc="4" kern="0">
-                <a:solidFill>
-                  <a:srgbClr val="C4C8D6"/>
-                </a:solidFill>
-                <a:latin typeface="Be Vietnam Pro" pitchFamily="34" charset="0"/>
-                <a:ea typeface="Be Vietnam Pro" pitchFamily="34" charset="-122"/>
-                <a:cs typeface="Be Vietnam Pro" pitchFamily="34" charset="-120"/>
-              </a:rPr>
-              <a:t> Chưa</a:t>
-            </a:r>
-            <a:r>
-              <a:rPr lang="en-US" sz="2100" dirty="0" spc="6" kern="0">
-                <a:solidFill>
-                  <a:srgbClr val="C4C8D6"/>
-                </a:solidFill>
-                <a:latin typeface="Be Vietnam Pro" pitchFamily="34" charset="0"/>
-                <a:ea typeface="Be Vietnam Pro" pitchFamily="34" charset="-122"/>
-                <a:cs typeface="Be Vietnam Pro" pitchFamily="34" charset="-120"/>
-              </a:rPr>
-              <a:t> đọc</a:t>
+              <a:t> Chưa đọc</a:t>
             </a:r>
             <a:r>
               <a:rPr lang="en-US" sz="2100" dirty="0" spc="-5" kern="0">
@@ -18293,10 +17770,10 @@
                 <a:ea typeface="Be Vietnam Pro" pitchFamily="34" charset="-122"/>
                 <a:cs typeface="Be Vietnam Pro" pitchFamily="34" charset="-120"/>
               </a:rPr>
-              <a:t> 2026-10-18.</a:t>
-            </a:r>
-            <a:r>
-              <a:rPr lang="en-US" sz="1950" dirty="0" spc="0" kern="0">
+              <a:t> 2026-10-19.</a:t>
+            </a:r>
+            <a:r>
+              <a:rPr lang="en-US" sz="1950" dirty="0" spc="1" kern="0">
                 <a:solidFill>
                   <a:srgbClr val="C4C8D6"/>
                 </a:solidFill>
@@ -18318,7 +17795,7 @@
               <a:t> minh</a:t>
             </a:r>
             <a:r>
-              <a:rPr lang="en-US" sz="1950" dirty="0" spc="-3" kern="0">
+              <a:rPr lang="en-US" sz="1950" dirty="0" spc="-4" kern="0">
                 <a:solidFill>
                   <a:srgbClr val="C4C8D6"/>
                 </a:solidFill>
